--- a/Day1/gumballs/gumballs.pptx
+++ b/Day1/gumballs/gumballs.pptx
@@ -5,7 +5,11 @@
     <p:sldMasterId id="2147483648" r:id="rId1"/>
   </p:sldMasterIdLst>
   <p:sldIdLst>
-    <p:sldId id="257" r:id="rId3"/>
+    <p:sldId id="263" r:id="rId3"/>
+    <p:sldId id="264" r:id="rId4"/>
+    <p:sldId id="257" r:id="rId5"/>
+    <p:sldId id="261" r:id="rId6"/>
+    <p:sldId id="262" r:id="rId7"/>
   </p:sldIdLst>
   <p:sldSz cx="12192000" cy="6858000"/>
   <p:notesSz cx="6858000" cy="9144000"/>
@@ -112,7 +116,7 @@
             <a:srgbClr val="A4A3A4"/>
           </p15:clr>
         </p15:guide>
-        <p15:guide id="2" pos="3840" userDrawn="1">
+        <p15:guide id="2" pos="3838" userDrawn="1">
           <p15:clr>
             <a:srgbClr val="A4A3A4"/>
           </p15:clr>
@@ -3079,6 +3083,140 @@
             <a:spLocks noGrp="1"/>
           </p:cNvSpPr>
           <p:nvPr>
+            <p:ph type="ctrTitle"/>
+            <p:custDataLst>
+              <p:tags r:id="rId1"/>
+            </p:custDataLst>
+          </p:nvPr>
+        </p:nvSpPr>
+        <p:spPr/>
+        <p:txBody>
+          <a:bodyPr/>
+          <a:p>
+            <a:r>
+              <a:rPr lang="en-US"/>
+              <a:t>The Gumball Experiment</a:t>
+            </a:r>
+            <a:endParaRPr lang="en-US"/>
+          </a:p>
+        </p:txBody>
+      </p:sp>
+      <p:sp>
+        <p:nvSpPr>
+          <p:cNvPr id="3" name="Subtitle 2"/>
+          <p:cNvSpPr>
+            <a:spLocks noGrp="1"/>
+          </p:cNvSpPr>
+          <p:nvPr>
+            <p:ph type="subTitle" idx="1"/>
+            <p:custDataLst>
+              <p:tags r:id="rId2"/>
+            </p:custDataLst>
+          </p:nvPr>
+        </p:nvSpPr>
+        <p:spPr/>
+        <p:txBody>
+          <a:bodyPr/>
+          <a:p>
+            <a:r>
+              <a:rPr lang="en-US"/>
+              <a:t>An Exercise in Estimation</a:t>
+            </a:r>
+            <a:endParaRPr lang="en-US"/>
+          </a:p>
+        </p:txBody>
+      </p:sp>
+    </p:spTree>
+  </p:cSld>
+  <p:clrMapOvr>
+    <a:masterClrMapping/>
+  </p:clrMapOvr>
+</p:sld>
+</file>
+
+<file path=ppt/slides/slide2.xml><?xml version="1.0" encoding="utf-8"?>
+<p:sld xmlns:a="http://schemas.openxmlformats.org/drawingml/2006/main" xmlns:r="http://schemas.openxmlformats.org/officeDocument/2006/relationships" xmlns:p="http://schemas.openxmlformats.org/presentationml/2006/main">
+  <p:cSld>
+    <p:spTree>
+      <p:nvGrpSpPr>
+        <p:cNvPr id="1" name=""/>
+        <p:cNvGrpSpPr/>
+        <p:nvPr/>
+      </p:nvGrpSpPr>
+      <p:grpSpPr/>
+      <p:sp>
+        <p:nvSpPr>
+          <p:cNvPr id="2" name="Title 1"/>
+          <p:cNvSpPr>
+            <a:spLocks noGrp="1"/>
+          </p:cNvSpPr>
+          <p:nvPr>
+            <p:ph type="title"/>
+            <p:custDataLst>
+              <p:tags r:id="rId1"/>
+            </p:custDataLst>
+          </p:nvPr>
+        </p:nvSpPr>
+        <p:spPr/>
+        <p:txBody>
+          <a:bodyPr/>
+          <a:p>
+            <a:r>
+              <a:rPr lang="en-US">
+                <a:sym typeface="+mn-ea"/>
+              </a:rPr>
+              <a:t>How many gumballs do you see ?</a:t>
+            </a:r>
+            <a:endParaRPr lang="en-US"/>
+          </a:p>
+        </p:txBody>
+      </p:sp>
+      <p:sp>
+        <p:nvSpPr>
+          <p:cNvPr id="3" name="Content Placeholder 2"/>
+          <p:cNvSpPr>
+            <a:spLocks noGrp="1"/>
+          </p:cNvSpPr>
+          <p:nvPr>
+            <p:ph idx="1"/>
+            <p:custDataLst>
+              <p:tags r:id="rId2"/>
+            </p:custDataLst>
+          </p:nvPr>
+        </p:nvSpPr>
+        <p:spPr/>
+        <p:txBody>
+          <a:bodyPr/>
+          <a:p>
+            <a:endParaRPr lang="en-US"/>
+          </a:p>
+        </p:txBody>
+      </p:sp>
+    </p:spTree>
+  </p:cSld>
+  <p:clrMapOvr>
+    <a:masterClrMapping/>
+  </p:clrMapOvr>
+</p:sld>
+</file>
+
+<file path=ppt/slides/slide3.xml><?xml version="1.0" encoding="utf-8"?>
+<p:sld xmlns:a="http://schemas.openxmlformats.org/drawingml/2006/main" xmlns:r="http://schemas.openxmlformats.org/officeDocument/2006/relationships" xmlns:p="http://schemas.openxmlformats.org/presentationml/2006/main">
+  <p:cSld>
+    <p:spTree>
+      <p:nvGrpSpPr>
+        <p:cNvPr id="1" name=""/>
+        <p:cNvGrpSpPr/>
+        <p:nvPr/>
+      </p:nvGrpSpPr>
+      <p:grpSpPr/>
+      <p:sp>
+        <p:nvSpPr>
+          <p:cNvPr id="2" name="Title 1"/>
+          <p:cNvSpPr>
+            <a:spLocks noGrp="1"/>
+          </p:cNvSpPr>
+          <p:nvPr>
             <p:ph type="title"/>
             <p:custDataLst>
               <p:tags r:id="rId1"/>
@@ -3154,6 +3292,9 @@
                     <p:cTn id="3" fill="hold">
                       <p:stCondLst>
                         <p:cond delay="indefinite"/>
+                        <p:cond evt="onBegin" delay="0">
+                          <p:tn val="2"/>
+                        </p:cond>
                       </p:stCondLst>
                       <p:childTnLst>
                         <p:par>
@@ -3163,9 +3304,9 @@
                             </p:stCondLst>
                             <p:childTnLst>
                               <p:par>
-                                <p:cTn id="5" presetID="9" presetClass="exit" presetSubtype="0" fill="hold" nodeType="clickEffect">
+                                <p:cTn id="5" presetID="9" presetClass="exit" presetSubtype="0" fill="hold" nodeType="withEffect">
                                   <p:stCondLst>
-                                    <p:cond delay="0"/>
+                                    <p:cond delay="10000"/>
                                   </p:stCondLst>
                                   <p:childTnLst>
                                     <p:animEffect transition="out" filter="dissolve">
@@ -3228,6 +3369,228 @@
 </p:sld>
 </file>
 
+<file path=ppt/slides/slide4.xml><?xml version="1.0" encoding="utf-8"?>
+<p:sld xmlns:a="http://schemas.openxmlformats.org/drawingml/2006/main" xmlns:r="http://schemas.openxmlformats.org/officeDocument/2006/relationships" xmlns:p="http://schemas.openxmlformats.org/presentationml/2006/main">
+  <p:cSld>
+    <p:spTree>
+      <p:nvGrpSpPr>
+        <p:cNvPr id="1" name=""/>
+        <p:cNvGrpSpPr/>
+        <p:nvPr/>
+      </p:nvGrpSpPr>
+      <p:grpSpPr/>
+      <p:sp>
+        <p:nvSpPr>
+          <p:cNvPr id="2" name="Title 1"/>
+          <p:cNvSpPr>
+            <a:spLocks noGrp="1"/>
+          </p:cNvSpPr>
+          <p:nvPr>
+            <p:ph type="title"/>
+            <p:custDataLst>
+              <p:tags r:id="rId1"/>
+            </p:custDataLst>
+          </p:nvPr>
+        </p:nvSpPr>
+        <p:spPr/>
+        <p:txBody>
+          <a:bodyPr/>
+          <a:p>
+            <a:r>
+              <a:rPr lang="en-US"/>
+              <a:t>And the correct answer is ...</a:t>
+            </a:r>
+            <a:endParaRPr lang="en-US"/>
+          </a:p>
+        </p:txBody>
+      </p:sp>
+      <p:sp>
+        <p:nvSpPr>
+          <p:cNvPr id="3" name="Content Placeholder 2"/>
+          <p:cNvSpPr>
+            <a:spLocks noGrp="1"/>
+          </p:cNvSpPr>
+          <p:nvPr>
+            <p:ph idx="1"/>
+            <p:custDataLst>
+              <p:tags r:id="rId2"/>
+            </p:custDataLst>
+          </p:nvPr>
+        </p:nvSpPr>
+        <p:spPr/>
+        <p:txBody>
+          <a:bodyPr>
+            <a:noAutofit/>
+          </a:bodyPr>
+          <a:p>
+            <a:pPr marL="0" indent="0" algn="ctr">
+              <a:buNone/>
+            </a:pPr>
+            <a:r>
+              <a:rPr lang="en-US" sz="16600">
+                <a:solidFill>
+                  <a:schemeClr val="bg1"/>
+                </a:solidFill>
+              </a:rPr>
+              <a:t>102</a:t>
+            </a:r>
+            <a:endParaRPr lang="en-US" sz="16600">
+              <a:solidFill>
+                <a:schemeClr val="bg1"/>
+              </a:solidFill>
+            </a:endParaRPr>
+          </a:p>
+        </p:txBody>
+      </p:sp>
+    </p:spTree>
+    <p:custDataLst>
+      <p:tags r:id="rId3"/>
+    </p:custDataLst>
+  </p:cSld>
+  <p:clrMapOvr>
+    <a:masterClrMapping/>
+  </p:clrMapOvr>
+  <p:timing>
+    <p:tnLst>
+      <p:par>
+        <p:cTn id="1" dur="indefinite" restart="never" nodeType="tmRoot">
+          <p:childTnLst>
+            <p:seq concurrent="1" nextAc="seek">
+              <p:cTn id="2" dur="indefinite" nodeType="mainSeq">
+                <p:childTnLst>
+                  <p:par>
+                    <p:cTn id="3" fill="hold">
+                      <p:stCondLst>
+                        <p:cond delay="indefinite"/>
+                      </p:stCondLst>
+                      <p:childTnLst>
+                        <p:par>
+                          <p:cTn id="4" fill="hold">
+                            <p:stCondLst>
+                              <p:cond delay="0"/>
+                            </p:stCondLst>
+                            <p:childTnLst>
+                              <p:par>
+                                <p:cTn id="5" presetID="3" presetClass="emph" presetSubtype="2" fill="hold" nodeType="clickEffect">
+                                  <p:stCondLst>
+                                    <p:cond delay="0"/>
+                                  </p:stCondLst>
+                                  <p:childTnLst>
+                                    <p:animClr clrSpc="rgb" dir="cw">
+                                      <p:cBhvr override="childStyle">
+                                        <p:cTn id="6" dur="2000" fill="hold"/>
+                                        <p:tgtEl>
+                                          <p:spTgt spid="3">
+                                            <p:txEl>
+                                              <p:pRg st="0" end="0"/>
+                                            </p:txEl>
+                                          </p:spTgt>
+                                        </p:tgtEl>
+                                        <p:attrNameLst>
+                                          <p:attrName>style.color</p:attrName>
+                                        </p:attrNameLst>
+                                      </p:cBhvr>
+                                      <p:to>
+                                        <a:schemeClr val="accent2"/>
+                                      </p:to>
+                                    </p:animClr>
+                                  </p:childTnLst>
+                                </p:cTn>
+                              </p:par>
+                            </p:childTnLst>
+                          </p:cTn>
+                        </p:par>
+                      </p:childTnLst>
+                    </p:cTn>
+                  </p:par>
+                </p:childTnLst>
+              </p:cTn>
+              <p:prevCondLst>
+                <p:cond evt="onPrev" delay="0">
+                  <p:tgtEl>
+                    <p:sldTgt/>
+                  </p:tgtEl>
+                </p:cond>
+              </p:prevCondLst>
+              <p:nextCondLst>
+                <p:cond evt="onNext" delay="0">
+                  <p:tgtEl>
+                    <p:sldTgt/>
+                  </p:tgtEl>
+                </p:cond>
+              </p:nextCondLst>
+            </p:seq>
+          </p:childTnLst>
+        </p:cTn>
+      </p:par>
+    </p:tnLst>
+  </p:timing>
+</p:sld>
+</file>
+
+<file path=ppt/slides/slide5.xml><?xml version="1.0" encoding="utf-8"?>
+<p:sld xmlns:a="http://schemas.openxmlformats.org/drawingml/2006/main" xmlns:r="http://schemas.openxmlformats.org/officeDocument/2006/relationships" xmlns:p="http://schemas.openxmlformats.org/presentationml/2006/main">
+  <p:cSld>
+    <p:spTree>
+      <p:nvGrpSpPr>
+        <p:cNvPr id="1" name=""/>
+        <p:cNvGrpSpPr/>
+        <p:nvPr/>
+      </p:nvGrpSpPr>
+      <p:grpSpPr/>
+      <p:sp>
+        <p:nvSpPr>
+          <p:cNvPr id="2" name="Title 1"/>
+          <p:cNvSpPr>
+            <a:spLocks noGrp="1"/>
+          </p:cNvSpPr>
+          <p:nvPr>
+            <p:ph type="title"/>
+            <p:custDataLst>
+              <p:tags r:id="rId1"/>
+            </p:custDataLst>
+          </p:nvPr>
+        </p:nvSpPr>
+        <p:spPr/>
+        <p:txBody>
+          <a:bodyPr/>
+          <a:p>
+            <a:endParaRPr lang="en-US"/>
+          </a:p>
+        </p:txBody>
+      </p:sp>
+      <p:sp>
+        <p:nvSpPr>
+          <p:cNvPr id="3" name="Content Placeholder 2"/>
+          <p:cNvSpPr>
+            <a:spLocks noGrp="1"/>
+          </p:cNvSpPr>
+          <p:nvPr>
+            <p:ph idx="1"/>
+            <p:custDataLst>
+              <p:tags r:id="rId2"/>
+            </p:custDataLst>
+          </p:nvPr>
+        </p:nvSpPr>
+        <p:spPr/>
+        <p:txBody>
+          <a:bodyPr/>
+          <a:p>
+            <a:endParaRPr lang="en-US"/>
+          </a:p>
+        </p:txBody>
+      </p:sp>
+    </p:spTree>
+    <p:custDataLst>
+      <p:tags r:id="rId3"/>
+    </p:custDataLst>
+  </p:cSld>
+  <p:clrMapOvr>
+    <a:masterClrMapping/>
+  </p:clrMapOvr>
+</p:sld>
+</file>
+
 <file path=ppt/tags/tag1.xml><?xml version="1.0" encoding="utf-8"?>
 <p:tagLst xmlns:p="http://schemas.openxmlformats.org/presentationml/2006/main">
   <p:tag name="KSO_WM_UNIT_HIGHLIGHT" val="0"/>
@@ -4006,6 +4369,32 @@
   <p:tag name="KSO_WM_UNIT_COMPATIBLE" val="0"/>
   <p:tag name="KSO_WM_UNIT_DIAGRAM_ISNUMVISUAL" val="0"/>
   <p:tag name="KSO_WM_UNIT_DIAGRAM_ISREFERUNIT" val="0"/>
+  <p:tag name="KSO_WM_UNIT_ID" val="_1**"/>
+  <p:tag name="KSO_WM_UNIT_LAYERLEVEL" val="1"/>
+  <p:tag name="KSO_WM_TAG_VERSION" val="1.0"/>
+  <p:tag name="KSO_WM_BEAUTIFY_FLAG" val="#wm#"/>
+</p:tagLst>
+</file>
+
+<file path=ppt/tags/tag64.xml><?xml version="1.0" encoding="utf-8"?>
+<p:tagLst xmlns:p="http://schemas.openxmlformats.org/presentationml/2006/main">
+  <p:tag name="KSO_WM_UNIT_HIGHLIGHT" val="0"/>
+  <p:tag name="KSO_WM_UNIT_COMPATIBLE" val="0"/>
+  <p:tag name="KSO_WM_UNIT_DIAGRAM_ISNUMVISUAL" val="0"/>
+  <p:tag name="KSO_WM_UNIT_DIAGRAM_ISREFERUNIT" val="0"/>
+  <p:tag name="KSO_WM_UNIT_ID" val="_1**"/>
+  <p:tag name="KSO_WM_UNIT_LAYERLEVEL" val="1"/>
+  <p:tag name="KSO_WM_TAG_VERSION" val="1.0"/>
+  <p:tag name="KSO_WM_BEAUTIFY_FLAG" val="#wm#"/>
+</p:tagLst>
+</file>
+
+<file path=ppt/tags/tag65.xml><?xml version="1.0" encoding="utf-8"?>
+<p:tagLst xmlns:p="http://schemas.openxmlformats.org/presentationml/2006/main">
+  <p:tag name="KSO_WM_UNIT_HIGHLIGHT" val="0"/>
+  <p:tag name="KSO_WM_UNIT_COMPATIBLE" val="0"/>
+  <p:tag name="KSO_WM_UNIT_DIAGRAM_ISNUMVISUAL" val="0"/>
+  <p:tag name="KSO_WM_UNIT_DIAGRAM_ISREFERUNIT" val="0"/>
   <p:tag name="KSO_WM_UNIT_ID" val="_2**"/>
   <p:tag name="KSO_WM_UNIT_LAYERLEVEL" val="1"/>
   <p:tag name="KSO_WM_TAG_VERSION" val="1.0"/>
@@ -4013,7 +4402,33 @@
 </p:tagLst>
 </file>
 
-<file path=ppt/tags/tag64.xml><?xml version="1.0" encoding="utf-8"?>
+<file path=ppt/tags/tag66.xml><?xml version="1.0" encoding="utf-8"?>
+<p:tagLst xmlns:p="http://schemas.openxmlformats.org/presentationml/2006/main">
+  <p:tag name="KSO_WM_UNIT_HIGHLIGHT" val="0"/>
+  <p:tag name="KSO_WM_UNIT_COMPATIBLE" val="0"/>
+  <p:tag name="KSO_WM_UNIT_DIAGRAM_ISNUMVISUAL" val="0"/>
+  <p:tag name="KSO_WM_UNIT_DIAGRAM_ISREFERUNIT" val="0"/>
+  <p:tag name="KSO_WM_UNIT_ID" val="_2**"/>
+  <p:tag name="KSO_WM_UNIT_LAYERLEVEL" val="1"/>
+  <p:tag name="KSO_WM_TAG_VERSION" val="1.0"/>
+  <p:tag name="KSO_WM_BEAUTIFY_FLAG" val="#wm#"/>
+</p:tagLst>
+</file>
+
+<file path=ppt/tags/tag67.xml><?xml version="1.0" encoding="utf-8"?>
+<p:tagLst xmlns:p="http://schemas.openxmlformats.org/presentationml/2006/main">
+  <p:tag name="KSO_WM_UNIT_HIGHLIGHT" val="0"/>
+  <p:tag name="KSO_WM_UNIT_COMPATIBLE" val="0"/>
+  <p:tag name="KSO_WM_UNIT_DIAGRAM_ISNUMVISUAL" val="0"/>
+  <p:tag name="KSO_WM_UNIT_DIAGRAM_ISREFERUNIT" val="0"/>
+  <p:tag name="KSO_WM_UNIT_ID" val="_2**"/>
+  <p:tag name="KSO_WM_UNIT_LAYERLEVEL" val="1"/>
+  <p:tag name="KSO_WM_TAG_VERSION" val="1.0"/>
+  <p:tag name="KSO_WM_BEAUTIFY_FLAG" val="#wm#"/>
+</p:tagLst>
+</file>
+
+<file path=ppt/tags/tag68.xml><?xml version="1.0" encoding="utf-8"?>
 <p:tagLst xmlns:p="http://schemas.openxmlformats.org/presentationml/2006/main">
   <p:tag name="KSO_WM_BEAUTIFY_FLAG" val="#wm#"/>
   <p:tag name="KSO_WM_TEMPLATE_CATEGORY" val="custom"/>
@@ -4021,6 +4436,19 @@
 </p:tagLst>
 </file>
 
+<file path=ppt/tags/tag69.xml><?xml version="1.0" encoding="utf-8"?>
+<p:tagLst xmlns:p="http://schemas.openxmlformats.org/presentationml/2006/main">
+  <p:tag name="KSO_WM_UNIT_HIGHLIGHT" val="0"/>
+  <p:tag name="KSO_WM_UNIT_COMPATIBLE" val="0"/>
+  <p:tag name="KSO_WM_UNIT_DIAGRAM_ISNUMVISUAL" val="0"/>
+  <p:tag name="KSO_WM_UNIT_DIAGRAM_ISREFERUNIT" val="0"/>
+  <p:tag name="KSO_WM_UNIT_ID" val="_2**"/>
+  <p:tag name="KSO_WM_UNIT_LAYERLEVEL" val="1"/>
+  <p:tag name="KSO_WM_TAG_VERSION" val="1.0"/>
+  <p:tag name="KSO_WM_BEAUTIFY_FLAG" val="#wm#"/>
+</p:tagLst>
+</file>
+
 <file path=ppt/tags/tag7.xml><?xml version="1.0" encoding="utf-8"?>
 <p:tagLst xmlns:p="http://schemas.openxmlformats.org/presentationml/2006/main">
   <p:tag name="KSO_WM_UNIT_HIGHLIGHT" val="0"/>
@@ -4031,6 +4459,60 @@
   <p:tag name="KSO_WM_UNIT_LAYERLEVEL" val="1"/>
   <p:tag name="KSO_WM_TAG_VERSION" val="1.0"/>
   <p:tag name="KSO_WM_BEAUTIFY_FLAG" val="#wm#"/>
+</p:tagLst>
+</file>
+
+<file path=ppt/tags/tag70.xml><?xml version="1.0" encoding="utf-8"?>
+<p:tagLst xmlns:p="http://schemas.openxmlformats.org/presentationml/2006/main">
+  <p:tag name="KSO_WM_UNIT_HIGHLIGHT" val="0"/>
+  <p:tag name="KSO_WM_UNIT_COMPATIBLE" val="0"/>
+  <p:tag name="KSO_WM_UNIT_DIAGRAM_ISNUMVISUAL" val="0"/>
+  <p:tag name="KSO_WM_UNIT_DIAGRAM_ISREFERUNIT" val="0"/>
+  <p:tag name="KSO_WM_UNIT_ID" val="_2**"/>
+  <p:tag name="KSO_WM_UNIT_LAYERLEVEL" val="1"/>
+  <p:tag name="KSO_WM_TAG_VERSION" val="1.0"/>
+</p:tagLst>
+</file>
+
+<file path=ppt/tags/tag71.xml><?xml version="1.0" encoding="utf-8"?>
+<p:tagLst xmlns:p="http://schemas.openxmlformats.org/presentationml/2006/main">
+  <p:tag name="KSO_WM_BEAUTIFY_FLAG" val="#wm#"/>
+  <p:tag name="KSO_WM_TEMPLATE_CATEGORY" val="custom"/>
+  <p:tag name="KSO_WM_TEMPLATE_INDEX" val="20205081"/>
+</p:tagLst>
+</file>
+
+<file path=ppt/tags/tag72.xml><?xml version="1.0" encoding="utf-8"?>
+<p:tagLst xmlns:p="http://schemas.openxmlformats.org/presentationml/2006/main">
+  <p:tag name="KSO_WM_UNIT_HIGHLIGHT" val="0"/>
+  <p:tag name="KSO_WM_UNIT_COMPATIBLE" val="0"/>
+  <p:tag name="KSO_WM_UNIT_DIAGRAM_ISNUMVISUAL" val="0"/>
+  <p:tag name="KSO_WM_UNIT_DIAGRAM_ISREFERUNIT" val="0"/>
+  <p:tag name="KSO_WM_UNIT_ID" val="_2**"/>
+  <p:tag name="KSO_WM_UNIT_LAYERLEVEL" val="1"/>
+  <p:tag name="KSO_WM_TAG_VERSION" val="1.0"/>
+  <p:tag name="KSO_WM_BEAUTIFY_FLAG" val="#wm#"/>
+</p:tagLst>
+</file>
+
+<file path=ppt/tags/tag73.xml><?xml version="1.0" encoding="utf-8"?>
+<p:tagLst xmlns:p="http://schemas.openxmlformats.org/presentationml/2006/main">
+  <p:tag name="KSO_WM_UNIT_HIGHLIGHT" val="0"/>
+  <p:tag name="KSO_WM_UNIT_COMPATIBLE" val="0"/>
+  <p:tag name="KSO_WM_UNIT_DIAGRAM_ISNUMVISUAL" val="0"/>
+  <p:tag name="KSO_WM_UNIT_DIAGRAM_ISREFERUNIT" val="0"/>
+  <p:tag name="KSO_WM_UNIT_ID" val="_2**"/>
+  <p:tag name="KSO_WM_UNIT_LAYERLEVEL" val="1"/>
+  <p:tag name="KSO_WM_TAG_VERSION" val="1.0"/>
+  <p:tag name="KSO_WM_BEAUTIFY_FLAG" val="#wm#"/>
+</p:tagLst>
+</file>
+
+<file path=ppt/tags/tag74.xml><?xml version="1.0" encoding="utf-8"?>
+<p:tagLst xmlns:p="http://schemas.openxmlformats.org/presentationml/2006/main">
+  <p:tag name="KSO_WM_BEAUTIFY_FLAG" val="#wm#"/>
+  <p:tag name="KSO_WM_TEMPLATE_CATEGORY" val="custom"/>
+  <p:tag name="KSO_WM_TEMPLATE_INDEX" val="20205081"/>
 </p:tagLst>
 </file>
 

--- a/Day1/gumballs/gumballs.pptx
+++ b/Day1/gumballs/gumballs.pptx
@@ -5,11 +5,10 @@
     <p:sldMasterId id="2147483648" r:id="rId1"/>
   </p:sldMasterIdLst>
   <p:sldIdLst>
-    <p:sldId id="263" r:id="rId3"/>
-    <p:sldId id="264" r:id="rId4"/>
-    <p:sldId id="257" r:id="rId5"/>
-    <p:sldId id="261" r:id="rId6"/>
-    <p:sldId id="262" r:id="rId7"/>
+    <p:sldId id="263" r:id="rId2"/>
+    <p:sldId id="264" r:id="rId3"/>
+    <p:sldId id="257" r:id="rId4"/>
+    <p:sldId id="261" r:id="rId5"/>
   </p:sldIdLst>
   <p:sldSz cx="12192000" cy="6858000"/>
   <p:notesSz cx="6858000" cy="9144000"/>
@@ -123,6 +122,9 @@
         </p15:guide>
       </p15:sldGuideLst>
     </p:ext>
+    <p:ext uri="{2D200454-40CA-4A62-9FC3-DE9A4176ACB9}">
+      <p15:notesGuideLst xmlns:p15="http://schemas.microsoft.com/office/powerpoint/2012/main"/>
+    </p:ext>
   </p:extLst>
 </p:presentation>
 </file>
@@ -153,7 +155,7 @@
           <p:nvPr>
             <p:ph type="ctrTitle"/>
             <p:custDataLst>
-              <p:tags r:id="rId2"/>
+              <p:tags r:id="rId1"/>
             </p:custDataLst>
           </p:nvPr>
         </p:nvSpPr>
@@ -177,7 +179,6 @@
               <a:rPr lang="en-US" dirty="0"/>
               <a:t>Click to edit Master title style</a:t>
             </a:r>
-            <a:endParaRPr lang="en-US" dirty="0"/>
           </a:p>
         </p:txBody>
       </p:sp>
@@ -190,7 +191,7 @@
           <p:nvPr>
             <p:ph type="subTitle" idx="1"/>
             <p:custDataLst>
-              <p:tags r:id="rId3"/>
+              <p:tags r:id="rId2"/>
             </p:custDataLst>
           </p:nvPr>
         </p:nvSpPr>
@@ -250,7 +251,6 @@
               <a:rPr lang="en-US" dirty="0"/>
               <a:t>Click to edit Master subtitle style</a:t>
             </a:r>
-            <a:endParaRPr lang="en-US" dirty="0"/>
           </a:p>
         </p:txBody>
       </p:sp>
@@ -263,7 +263,7 @@
           <p:nvPr>
             <p:ph type="dt" sz="half" idx="10"/>
             <p:custDataLst>
-              <p:tags r:id="rId4"/>
+              <p:tags r:id="rId3"/>
             </p:custDataLst>
           </p:nvPr>
         </p:nvSpPr>
@@ -274,6 +274,7 @@
           <a:p>
             <a:fld id="{760FBDFE-C587-4B4C-A407-44438C67B59E}" type="datetimeFigureOut">
               <a:rPr lang="en-US" smtClean="0"/>
+              <a:t>25-Jul-26</a:t>
             </a:fld>
             <a:endParaRPr lang="en-US"/>
           </a:p>
@@ -288,29 +289,29 @@
           <p:nvPr>
             <p:ph type="ftr" sz="quarter" idx="11"/>
             <p:custDataLst>
+              <p:tags r:id="rId4"/>
+            </p:custDataLst>
+          </p:nvPr>
+        </p:nvSpPr>
+        <p:spPr/>
+        <p:txBody>
+          <a:bodyPr/>
+          <a:lstStyle/>
+          <a:p>
+            <a:endParaRPr lang="en-US" dirty="0"/>
+          </a:p>
+        </p:txBody>
+      </p:sp>
+      <p:sp>
+        <p:nvSpPr>
+          <p:cNvPr id="18" name="Slide Number Placeholder 17"/>
+          <p:cNvSpPr>
+            <a:spLocks noGrp="1"/>
+          </p:cNvSpPr>
+          <p:nvPr>
+            <p:ph type="sldNum" sz="quarter" idx="12"/>
+            <p:custDataLst>
               <p:tags r:id="rId5"/>
-            </p:custDataLst>
-          </p:nvPr>
-        </p:nvSpPr>
-        <p:spPr/>
-        <p:txBody>
-          <a:bodyPr/>
-          <a:lstStyle/>
-          <a:p>
-            <a:endParaRPr lang="en-US" dirty="0"/>
-          </a:p>
-        </p:txBody>
-      </p:sp>
-      <p:sp>
-        <p:nvSpPr>
-          <p:cNvPr id="18" name="Slide Number Placeholder 17"/>
-          <p:cNvSpPr>
-            <a:spLocks noGrp="1"/>
-          </p:cNvSpPr>
-          <p:nvPr>
-            <p:ph type="sldNum" sz="quarter" idx="12"/>
-            <p:custDataLst>
-              <p:tags r:id="rId6"/>
             </p:custDataLst>
           </p:nvPr>
         </p:nvSpPr>
@@ -321,6 +322,7 @@
           <a:p>
             <a:fld id="{49AE70B2-8BF9-45C0-BB95-33D1B9D3A854}" type="slidenum">
               <a:rPr lang="en-US" smtClean="0"/>
+              <a:t>‹#›</a:t>
             </a:fld>
             <a:endParaRPr lang="en-US" dirty="0"/>
           </a:p>
@@ -360,7 +362,7 @@
           <p:nvPr>
             <p:ph type="dt" sz="half" idx="10"/>
             <p:custDataLst>
-              <p:tags r:id="rId2"/>
+              <p:tags r:id="rId1"/>
             </p:custDataLst>
           </p:nvPr>
         </p:nvSpPr>
@@ -371,6 +373,7 @@
           <a:p>
             <a:fld id="{760FBDFE-C587-4B4C-A407-44438C67B59E}" type="datetimeFigureOut">
               <a:rPr lang="en-US" smtClean="0"/>
+              <a:t>25-Jul-26</a:t>
             </a:fld>
             <a:endParaRPr lang="en-US"/>
           </a:p>
@@ -385,29 +388,29 @@
           <p:nvPr>
             <p:ph type="ftr" sz="quarter" idx="11"/>
             <p:custDataLst>
+              <p:tags r:id="rId2"/>
+            </p:custDataLst>
+          </p:nvPr>
+        </p:nvSpPr>
+        <p:spPr/>
+        <p:txBody>
+          <a:bodyPr/>
+          <a:lstStyle/>
+          <a:p>
+            <a:endParaRPr lang="en-US"/>
+          </a:p>
+        </p:txBody>
+      </p:sp>
+      <p:sp>
+        <p:nvSpPr>
+          <p:cNvPr id="5" name="Slide Number Placeholder 4"/>
+          <p:cNvSpPr>
+            <a:spLocks noGrp="1"/>
+          </p:cNvSpPr>
+          <p:nvPr>
+            <p:ph type="sldNum" sz="quarter" idx="12"/>
+            <p:custDataLst>
               <p:tags r:id="rId3"/>
-            </p:custDataLst>
-          </p:nvPr>
-        </p:nvSpPr>
-        <p:spPr/>
-        <p:txBody>
-          <a:bodyPr/>
-          <a:lstStyle/>
-          <a:p>
-            <a:endParaRPr lang="en-US"/>
-          </a:p>
-        </p:txBody>
-      </p:sp>
-      <p:sp>
-        <p:nvSpPr>
-          <p:cNvPr id="5" name="Slide Number Placeholder 4"/>
-          <p:cNvSpPr>
-            <a:spLocks noGrp="1"/>
-          </p:cNvSpPr>
-          <p:nvPr>
-            <p:ph type="sldNum" sz="quarter" idx="12"/>
-            <p:custDataLst>
-              <p:tags r:id="rId4"/>
             </p:custDataLst>
           </p:nvPr>
         </p:nvSpPr>
@@ -418,6 +421,7 @@
           <a:p>
             <a:fld id="{49AE70B2-8BF9-45C0-BB95-33D1B9D3A854}" type="slidenum">
               <a:rPr lang="en-US" smtClean="0"/>
+              <a:t>‹#›</a:t>
             </a:fld>
             <a:endParaRPr lang="en-US"/>
           </a:p>
@@ -432,7 +436,7 @@
           <p:nvPr>
             <p:ph sz="quarter" idx="13"/>
             <p:custDataLst>
-              <p:tags r:id="rId5"/>
+              <p:tags r:id="rId4"/>
             </p:custDataLst>
           </p:nvPr>
         </p:nvSpPr>
@@ -451,7 +455,6 @@
               <a:rPr lang="en-US" dirty="0"/>
               <a:t>Click to edit Master text styles</a:t>
             </a:r>
-            <a:endParaRPr lang="en-US" dirty="0"/>
           </a:p>
           <a:p>
             <a:pPr lvl="1"/>
@@ -459,7 +462,6 @@
               <a:rPr lang="en-US" dirty="0"/>
               <a:t>Second level</a:t>
             </a:r>
-            <a:endParaRPr lang="en-US" dirty="0"/>
           </a:p>
           <a:p>
             <a:pPr lvl="2"/>
@@ -467,7 +469,6 @@
               <a:rPr lang="en-US" dirty="0"/>
               <a:t>Third level</a:t>
             </a:r>
-            <a:endParaRPr lang="en-US" dirty="0"/>
           </a:p>
           <a:p>
             <a:pPr lvl="3"/>
@@ -475,7 +476,6 @@
               <a:rPr lang="en-US" dirty="0"/>
               <a:t>Fourth level</a:t>
             </a:r>
-            <a:endParaRPr lang="en-US" dirty="0"/>
           </a:p>
           <a:p>
             <a:pPr lvl="4"/>
@@ -483,7 +483,6 @@
               <a:rPr lang="en-US" dirty="0"/>
               <a:t>Fifth level</a:t>
             </a:r>
-            <a:endParaRPr lang="en-US" dirty="0"/>
           </a:p>
         </p:txBody>
       </p:sp>
@@ -521,7 +520,7 @@
           <p:nvPr>
             <p:ph type="dt" sz="half" idx="10"/>
             <p:custDataLst>
-              <p:tags r:id="rId2"/>
+              <p:tags r:id="rId1"/>
             </p:custDataLst>
           </p:nvPr>
         </p:nvSpPr>
@@ -532,6 +531,7 @@
           <a:p>
             <a:fld id="{760FBDFE-C587-4B4C-A407-44438C67B59E}" type="datetimeFigureOut">
               <a:rPr lang="en-US" smtClean="0"/>
+              <a:t>25-Jul-26</a:t>
             </a:fld>
             <a:endParaRPr lang="en-US"/>
           </a:p>
@@ -546,29 +546,29 @@
           <p:nvPr>
             <p:ph type="ftr" sz="quarter" idx="11"/>
             <p:custDataLst>
+              <p:tags r:id="rId2"/>
+            </p:custDataLst>
+          </p:nvPr>
+        </p:nvSpPr>
+        <p:spPr/>
+        <p:txBody>
+          <a:bodyPr/>
+          <a:lstStyle/>
+          <a:p>
+            <a:endParaRPr lang="en-US"/>
+          </a:p>
+        </p:txBody>
+      </p:sp>
+      <p:sp>
+        <p:nvSpPr>
+          <p:cNvPr id="5" name="Slide Number Placeholder 4"/>
+          <p:cNvSpPr>
+            <a:spLocks noGrp="1"/>
+          </p:cNvSpPr>
+          <p:nvPr>
+            <p:ph type="sldNum" sz="quarter" idx="12"/>
+            <p:custDataLst>
               <p:tags r:id="rId3"/>
-            </p:custDataLst>
-          </p:nvPr>
-        </p:nvSpPr>
-        <p:spPr/>
-        <p:txBody>
-          <a:bodyPr/>
-          <a:lstStyle/>
-          <a:p>
-            <a:endParaRPr lang="en-US"/>
-          </a:p>
-        </p:txBody>
-      </p:sp>
-      <p:sp>
-        <p:nvSpPr>
-          <p:cNvPr id="5" name="Slide Number Placeholder 4"/>
-          <p:cNvSpPr>
-            <a:spLocks noGrp="1"/>
-          </p:cNvSpPr>
-          <p:nvPr>
-            <p:ph type="sldNum" sz="quarter" idx="12"/>
-            <p:custDataLst>
-              <p:tags r:id="rId4"/>
             </p:custDataLst>
           </p:nvPr>
         </p:nvSpPr>
@@ -579,6 +579,7 @@
           <a:p>
             <a:fld id="{49AE70B2-8BF9-45C0-BB95-33D1B9D3A854}" type="slidenum">
               <a:rPr lang="en-US" smtClean="0"/>
+              <a:t>‹#›</a:t>
             </a:fld>
             <a:endParaRPr lang="en-US"/>
           </a:p>
@@ -593,7 +594,7 @@
           <p:nvPr>
             <p:ph type="title" hasCustomPrompt="1"/>
             <p:custDataLst>
-              <p:tags r:id="rId5"/>
+              <p:tags r:id="rId4"/>
             </p:custDataLst>
           </p:nvPr>
         </p:nvSpPr>
@@ -615,10 +616,9 @@
           <a:p>
             <a:pPr lvl="0"/>
             <a:r>
-              <a:rPr lang="en-US" smtClean="0"/>
+              <a:rPr lang="en-US"/>
               <a:t>Click to edit title</a:t>
             </a:r>
-            <a:endParaRPr lang="en-US"/>
           </a:p>
         </p:txBody>
       </p:sp>
@@ -631,7 +631,7 @@
           <p:nvPr>
             <p:ph type="body" sz="quarter" idx="13"/>
             <p:custDataLst>
-              <p:tags r:id="rId6"/>
+              <p:tags r:id="rId5"/>
             </p:custDataLst>
           </p:nvPr>
         </p:nvSpPr>
@@ -660,7 +660,6 @@
               <a:rPr lang="en-US" dirty="0"/>
               <a:t>Click to edit Master text styles</a:t>
             </a:r>
-            <a:endParaRPr lang="en-US" dirty="0"/>
           </a:p>
         </p:txBody>
       </p:sp>
@@ -698,7 +697,7 @@
           <p:nvPr>
             <p:ph type="title"/>
             <p:custDataLst>
-              <p:tags r:id="rId2"/>
+              <p:tags r:id="rId1"/>
             </p:custDataLst>
           </p:nvPr>
         </p:nvSpPr>
@@ -716,10 +715,9 @@
           <a:p>
             <a:pPr lvl="0"/>
             <a:r>
-              <a:rPr lang="en-US" smtClean="0"/>
+              <a:rPr lang="en-US"/>
               <a:t>Click to edit Master title style</a:t>
             </a:r>
-            <a:endParaRPr lang="en-US"/>
           </a:p>
         </p:txBody>
       </p:sp>
@@ -732,7 +730,7 @@
           <p:nvPr>
             <p:ph idx="1"/>
             <p:custDataLst>
-              <p:tags r:id="rId3"/>
+              <p:tags r:id="rId2"/>
             </p:custDataLst>
           </p:nvPr>
         </p:nvSpPr>
@@ -750,42 +748,37 @@
           <a:p>
             <a:pPr lvl="0"/>
             <a:r>
-              <a:rPr lang="en-US" smtClean="0"/>
+              <a:rPr lang="en-US"/>
               <a:t>Click to edit Master text styles</a:t>
             </a:r>
-            <a:endParaRPr lang="en-US" smtClean="0"/>
           </a:p>
           <a:p>
             <a:pPr lvl="1"/>
             <a:r>
-              <a:rPr lang="en-US" smtClean="0"/>
+              <a:rPr lang="en-US"/>
               <a:t>Second level</a:t>
             </a:r>
-            <a:endParaRPr lang="en-US" smtClean="0"/>
           </a:p>
           <a:p>
             <a:pPr lvl="2"/>
             <a:r>
-              <a:rPr lang="en-US" smtClean="0"/>
+              <a:rPr lang="en-US"/>
               <a:t>Third level</a:t>
             </a:r>
-            <a:endParaRPr lang="en-US" smtClean="0"/>
           </a:p>
           <a:p>
             <a:pPr lvl="3"/>
             <a:r>
-              <a:rPr lang="en-US" smtClean="0"/>
+              <a:rPr lang="en-US"/>
               <a:t>Fourth level</a:t>
             </a:r>
-            <a:endParaRPr lang="en-US" smtClean="0"/>
           </a:p>
           <a:p>
             <a:pPr lvl="4"/>
             <a:r>
-              <a:rPr lang="en-US" smtClean="0"/>
+              <a:rPr lang="en-US"/>
               <a:t>Fifth level</a:t>
             </a:r>
-            <a:endParaRPr lang="en-US"/>
           </a:p>
         </p:txBody>
       </p:sp>
@@ -798,7 +791,7 @@
           <p:nvPr>
             <p:ph type="dt" sz="half" idx="10"/>
             <p:custDataLst>
-              <p:tags r:id="rId4"/>
+              <p:tags r:id="rId3"/>
             </p:custDataLst>
           </p:nvPr>
         </p:nvSpPr>
@@ -809,6 +802,7 @@
           <a:p>
             <a:fld id="{760FBDFE-C587-4B4C-A407-44438C67B59E}" type="datetimeFigureOut">
               <a:rPr lang="en-US" smtClean="0"/>
+              <a:t>25-Jul-26</a:t>
             </a:fld>
             <a:endParaRPr lang="en-US"/>
           </a:p>
@@ -823,29 +817,29 @@
           <p:nvPr>
             <p:ph type="ftr" sz="quarter" idx="11"/>
             <p:custDataLst>
+              <p:tags r:id="rId4"/>
+            </p:custDataLst>
+          </p:nvPr>
+        </p:nvSpPr>
+        <p:spPr/>
+        <p:txBody>
+          <a:bodyPr/>
+          <a:lstStyle/>
+          <a:p>
+            <a:endParaRPr lang="en-US"/>
+          </a:p>
+        </p:txBody>
+      </p:sp>
+      <p:sp>
+        <p:nvSpPr>
+          <p:cNvPr id="6" name="Slide Number Placeholder 5"/>
+          <p:cNvSpPr>
+            <a:spLocks noGrp="1"/>
+          </p:cNvSpPr>
+          <p:nvPr>
+            <p:ph type="sldNum" sz="quarter" idx="12"/>
+            <p:custDataLst>
               <p:tags r:id="rId5"/>
-            </p:custDataLst>
-          </p:nvPr>
-        </p:nvSpPr>
-        <p:spPr/>
-        <p:txBody>
-          <a:bodyPr/>
-          <a:lstStyle/>
-          <a:p>
-            <a:endParaRPr lang="en-US"/>
-          </a:p>
-        </p:txBody>
-      </p:sp>
-      <p:sp>
-        <p:nvSpPr>
-          <p:cNvPr id="6" name="Slide Number Placeholder 5"/>
-          <p:cNvSpPr>
-            <a:spLocks noGrp="1"/>
-          </p:cNvSpPr>
-          <p:nvPr>
-            <p:ph type="sldNum" sz="quarter" idx="12"/>
-            <p:custDataLst>
-              <p:tags r:id="rId6"/>
             </p:custDataLst>
           </p:nvPr>
         </p:nvSpPr>
@@ -856,6 +850,7 @@
           <a:p>
             <a:fld id="{49AE70B2-8BF9-45C0-BB95-33D1B9D3A854}" type="slidenum">
               <a:rPr lang="en-US" smtClean="0"/>
+              <a:t>‹#›</a:t>
             </a:fld>
             <a:endParaRPr lang="en-US"/>
           </a:p>
@@ -895,7 +890,7 @@
           <p:nvPr>
             <p:ph type="title" hasCustomPrompt="1"/>
             <p:custDataLst>
-              <p:tags r:id="rId2"/>
+              <p:tags r:id="rId1"/>
             </p:custDataLst>
           </p:nvPr>
         </p:nvSpPr>
@@ -919,7 +914,6 @@
               <a:rPr lang="en-US" dirty="0"/>
               <a:t>Click to edit title</a:t>
             </a:r>
-            <a:endParaRPr lang="en-US" dirty="0"/>
           </a:p>
         </p:txBody>
       </p:sp>
@@ -932,7 +926,7 @@
           <p:nvPr>
             <p:ph type="body" idx="1" hasCustomPrompt="1"/>
             <p:custDataLst>
-              <p:tags r:id="rId3"/>
+              <p:tags r:id="rId2"/>
             </p:custDataLst>
           </p:nvPr>
         </p:nvSpPr>
@@ -1045,7 +1039,6 @@
               <a:rPr lang="en-US" dirty="0"/>
               <a:t>Click to edit text</a:t>
             </a:r>
-            <a:endParaRPr lang="en-US" dirty="0"/>
           </a:p>
         </p:txBody>
       </p:sp>
@@ -1058,7 +1051,7 @@
           <p:nvPr>
             <p:ph type="dt" sz="half" idx="10"/>
             <p:custDataLst>
-              <p:tags r:id="rId4"/>
+              <p:tags r:id="rId3"/>
             </p:custDataLst>
           </p:nvPr>
         </p:nvSpPr>
@@ -1069,6 +1062,7 @@
           <a:p>
             <a:fld id="{760FBDFE-C587-4B4C-A407-44438C67B59E}" type="datetimeFigureOut">
               <a:rPr lang="en-US" smtClean="0"/>
+              <a:t>25-Jul-26</a:t>
             </a:fld>
             <a:endParaRPr lang="en-US"/>
           </a:p>
@@ -1083,29 +1077,29 @@
           <p:nvPr>
             <p:ph type="ftr" sz="quarter" idx="11"/>
             <p:custDataLst>
+              <p:tags r:id="rId4"/>
+            </p:custDataLst>
+          </p:nvPr>
+        </p:nvSpPr>
+        <p:spPr/>
+        <p:txBody>
+          <a:bodyPr/>
+          <a:lstStyle/>
+          <a:p>
+            <a:endParaRPr lang="en-US"/>
+          </a:p>
+        </p:txBody>
+      </p:sp>
+      <p:sp>
+        <p:nvSpPr>
+          <p:cNvPr id="6" name="Slide Number Placeholder 5"/>
+          <p:cNvSpPr>
+            <a:spLocks noGrp="1"/>
+          </p:cNvSpPr>
+          <p:nvPr>
+            <p:ph type="sldNum" sz="quarter" idx="12"/>
+            <p:custDataLst>
               <p:tags r:id="rId5"/>
-            </p:custDataLst>
-          </p:nvPr>
-        </p:nvSpPr>
-        <p:spPr/>
-        <p:txBody>
-          <a:bodyPr/>
-          <a:lstStyle/>
-          <a:p>
-            <a:endParaRPr lang="en-US"/>
-          </a:p>
-        </p:txBody>
-      </p:sp>
-      <p:sp>
-        <p:nvSpPr>
-          <p:cNvPr id="6" name="Slide Number Placeholder 5"/>
-          <p:cNvSpPr>
-            <a:spLocks noGrp="1"/>
-          </p:cNvSpPr>
-          <p:nvPr>
-            <p:ph type="sldNum" sz="quarter" idx="12"/>
-            <p:custDataLst>
-              <p:tags r:id="rId6"/>
             </p:custDataLst>
           </p:nvPr>
         </p:nvSpPr>
@@ -1116,6 +1110,7 @@
           <a:p>
             <a:fld id="{49AE70B2-8BF9-45C0-BB95-33D1B9D3A854}" type="slidenum">
               <a:rPr lang="en-US" smtClean="0"/>
+              <a:t>‹#›</a:t>
             </a:fld>
             <a:endParaRPr lang="en-US"/>
           </a:p>
@@ -1155,7 +1150,7 @@
           <p:nvPr>
             <p:ph type="title"/>
             <p:custDataLst>
-              <p:tags r:id="rId2"/>
+              <p:tags r:id="rId1"/>
             </p:custDataLst>
           </p:nvPr>
         </p:nvSpPr>
@@ -1173,10 +1168,9 @@
           <a:p>
             <a:pPr lvl="0"/>
             <a:r>
-              <a:rPr lang="en-US" smtClean="0"/>
+              <a:rPr lang="en-US"/>
               <a:t>Click to edit Master title style</a:t>
             </a:r>
-            <a:endParaRPr lang="en-US"/>
           </a:p>
         </p:txBody>
       </p:sp>
@@ -1189,7 +1183,7 @@
           <p:nvPr>
             <p:ph sz="half" idx="1"/>
             <p:custDataLst>
-              <p:tags r:id="rId3"/>
+              <p:tags r:id="rId2"/>
             </p:custDataLst>
           </p:nvPr>
         </p:nvSpPr>
@@ -1207,42 +1201,37 @@
           <a:p>
             <a:pPr lvl="0"/>
             <a:r>
-              <a:rPr lang="en-US" smtClean="0"/>
+              <a:rPr lang="en-US"/>
               <a:t>Click to edit Master text styles</a:t>
             </a:r>
-            <a:endParaRPr lang="en-US" smtClean="0"/>
           </a:p>
           <a:p>
             <a:pPr lvl="1"/>
             <a:r>
-              <a:rPr lang="en-US" smtClean="0"/>
+              <a:rPr lang="en-US"/>
               <a:t>Second level</a:t>
             </a:r>
-            <a:endParaRPr lang="en-US" smtClean="0"/>
           </a:p>
           <a:p>
             <a:pPr lvl="2"/>
             <a:r>
-              <a:rPr lang="en-US" smtClean="0"/>
+              <a:rPr lang="en-US"/>
               <a:t>Third level</a:t>
             </a:r>
-            <a:endParaRPr lang="en-US" smtClean="0"/>
           </a:p>
           <a:p>
             <a:pPr lvl="3"/>
             <a:r>
-              <a:rPr lang="en-US" smtClean="0"/>
+              <a:rPr lang="en-US"/>
               <a:t>Fourth level</a:t>
             </a:r>
-            <a:endParaRPr lang="en-US" smtClean="0"/>
           </a:p>
           <a:p>
             <a:pPr lvl="4"/>
             <a:r>
-              <a:rPr lang="en-US" smtClean="0"/>
+              <a:rPr lang="en-US"/>
               <a:t>Fifth level</a:t>
             </a:r>
-            <a:endParaRPr lang="en-US"/>
           </a:p>
         </p:txBody>
       </p:sp>
@@ -1255,7 +1244,7 @@
           <p:nvPr>
             <p:ph sz="half" idx="2"/>
             <p:custDataLst>
-              <p:tags r:id="rId4"/>
+              <p:tags r:id="rId3"/>
             </p:custDataLst>
           </p:nvPr>
         </p:nvSpPr>
@@ -1276,7 +1265,6 @@
               <a:rPr lang="en-US" dirty="0"/>
               <a:t>Click to edit Master text styles</a:t>
             </a:r>
-            <a:endParaRPr lang="en-US" dirty="0"/>
           </a:p>
           <a:p>
             <a:pPr lvl="1"/>
@@ -1284,7 +1272,6 @@
               <a:rPr lang="en-US" dirty="0"/>
               <a:t>Second level</a:t>
             </a:r>
-            <a:endParaRPr lang="en-US" dirty="0"/>
           </a:p>
           <a:p>
             <a:pPr lvl="2"/>
@@ -1292,7 +1279,6 @@
               <a:rPr lang="en-US" dirty="0"/>
               <a:t>Third level</a:t>
             </a:r>
-            <a:endParaRPr lang="en-US" dirty="0"/>
           </a:p>
           <a:p>
             <a:pPr lvl="3"/>
@@ -1300,7 +1286,6 @@
               <a:rPr lang="en-US" dirty="0"/>
               <a:t>Fourth level</a:t>
             </a:r>
-            <a:endParaRPr lang="en-US" dirty="0"/>
           </a:p>
           <a:p>
             <a:pPr lvl="4"/>
@@ -1308,7 +1293,6 @@
               <a:rPr lang="en-US" dirty="0"/>
               <a:t>Fifth level</a:t>
             </a:r>
-            <a:endParaRPr lang="en-US" dirty="0"/>
           </a:p>
         </p:txBody>
       </p:sp>
@@ -1321,7 +1305,7 @@
           <p:nvPr>
             <p:ph type="dt" sz="half" idx="10"/>
             <p:custDataLst>
-              <p:tags r:id="rId5"/>
+              <p:tags r:id="rId4"/>
             </p:custDataLst>
           </p:nvPr>
         </p:nvSpPr>
@@ -1332,6 +1316,7 @@
           <a:p>
             <a:fld id="{760FBDFE-C587-4B4C-A407-44438C67B59E}" type="datetimeFigureOut">
               <a:rPr lang="en-US" smtClean="0"/>
+              <a:t>25-Jul-26</a:t>
             </a:fld>
             <a:endParaRPr lang="en-US"/>
           </a:p>
@@ -1346,29 +1331,29 @@
           <p:nvPr>
             <p:ph type="ftr" sz="quarter" idx="11"/>
             <p:custDataLst>
+              <p:tags r:id="rId5"/>
+            </p:custDataLst>
+          </p:nvPr>
+        </p:nvSpPr>
+        <p:spPr/>
+        <p:txBody>
+          <a:bodyPr/>
+          <a:lstStyle/>
+          <a:p>
+            <a:endParaRPr lang="en-US"/>
+          </a:p>
+        </p:txBody>
+      </p:sp>
+      <p:sp>
+        <p:nvSpPr>
+          <p:cNvPr id="7" name="Slide Number Placeholder 6"/>
+          <p:cNvSpPr>
+            <a:spLocks noGrp="1"/>
+          </p:cNvSpPr>
+          <p:nvPr>
+            <p:ph type="sldNum" sz="quarter" idx="12"/>
+            <p:custDataLst>
               <p:tags r:id="rId6"/>
-            </p:custDataLst>
-          </p:nvPr>
-        </p:nvSpPr>
-        <p:spPr/>
-        <p:txBody>
-          <a:bodyPr/>
-          <a:lstStyle/>
-          <a:p>
-            <a:endParaRPr lang="en-US"/>
-          </a:p>
-        </p:txBody>
-      </p:sp>
-      <p:sp>
-        <p:nvSpPr>
-          <p:cNvPr id="7" name="Slide Number Placeholder 6"/>
-          <p:cNvSpPr>
-            <a:spLocks noGrp="1"/>
-          </p:cNvSpPr>
-          <p:nvPr>
-            <p:ph type="sldNum" sz="quarter" idx="12"/>
-            <p:custDataLst>
-              <p:tags r:id="rId7"/>
             </p:custDataLst>
           </p:nvPr>
         </p:nvSpPr>
@@ -1379,6 +1364,7 @@
           <a:p>
             <a:fld id="{49AE70B2-8BF9-45C0-BB95-33D1B9D3A854}" type="slidenum">
               <a:rPr lang="en-US" smtClean="0"/>
+              <a:t>‹#›</a:t>
             </a:fld>
             <a:endParaRPr lang="en-US"/>
           </a:p>
@@ -1418,7 +1404,7 @@
           <p:nvPr>
             <p:ph type="title"/>
             <p:custDataLst>
-              <p:tags r:id="rId2"/>
+              <p:tags r:id="rId1"/>
             </p:custDataLst>
           </p:nvPr>
         </p:nvSpPr>
@@ -1436,10 +1422,9 @@
           <a:p>
             <a:pPr lvl="0"/>
             <a:r>
-              <a:rPr lang="en-US" smtClean="0"/>
+              <a:rPr lang="en-US"/>
               <a:t>Click to edit Master title style</a:t>
             </a:r>
-            <a:endParaRPr lang="en-US"/>
           </a:p>
         </p:txBody>
       </p:sp>
@@ -1452,7 +1437,7 @@
           <p:nvPr>
             <p:ph type="body" idx="1" hasCustomPrompt="1"/>
             <p:custDataLst>
-              <p:tags r:id="rId3"/>
+              <p:tags r:id="rId2"/>
             </p:custDataLst>
           </p:nvPr>
         </p:nvSpPr>
@@ -1520,7 +1505,6 @@
               <a:rPr lang="en-US" dirty="0"/>
               <a:t>Click to edit text</a:t>
             </a:r>
-            <a:endParaRPr lang="en-US" dirty="0"/>
           </a:p>
         </p:txBody>
       </p:sp>
@@ -1533,7 +1517,7 @@
           <p:nvPr>
             <p:ph sz="half" idx="2"/>
             <p:custDataLst>
-              <p:tags r:id="rId4"/>
+              <p:tags r:id="rId3"/>
             </p:custDataLst>
           </p:nvPr>
         </p:nvSpPr>
@@ -1551,42 +1535,37 @@
           <a:p>
             <a:pPr lvl="0"/>
             <a:r>
-              <a:rPr lang="en-US" smtClean="0"/>
+              <a:rPr lang="en-US"/>
               <a:t>Click to edit Master text styles</a:t>
             </a:r>
-            <a:endParaRPr lang="en-US" smtClean="0"/>
           </a:p>
           <a:p>
             <a:pPr lvl="1"/>
             <a:r>
-              <a:rPr lang="en-US" smtClean="0"/>
+              <a:rPr lang="en-US"/>
               <a:t>Second level</a:t>
             </a:r>
-            <a:endParaRPr lang="en-US" smtClean="0"/>
           </a:p>
           <a:p>
             <a:pPr lvl="2"/>
             <a:r>
-              <a:rPr lang="en-US" smtClean="0"/>
+              <a:rPr lang="en-US"/>
               <a:t>Third level</a:t>
             </a:r>
-            <a:endParaRPr lang="en-US" smtClean="0"/>
           </a:p>
           <a:p>
             <a:pPr lvl="3"/>
             <a:r>
-              <a:rPr lang="en-US" smtClean="0"/>
+              <a:rPr lang="en-US"/>
               <a:t>Fourth level</a:t>
             </a:r>
-            <a:endParaRPr lang="en-US" smtClean="0"/>
           </a:p>
           <a:p>
             <a:pPr lvl="4"/>
             <a:r>
-              <a:rPr lang="en-US" smtClean="0"/>
+              <a:rPr lang="en-US"/>
               <a:t>Fifth level</a:t>
             </a:r>
-            <a:endParaRPr lang="en-US"/>
           </a:p>
         </p:txBody>
       </p:sp>
@@ -1599,7 +1578,7 @@
           <p:nvPr>
             <p:ph type="body" sz="quarter" idx="3" hasCustomPrompt="1"/>
             <p:custDataLst>
-              <p:tags r:id="rId5"/>
+              <p:tags r:id="rId4"/>
             </p:custDataLst>
           </p:nvPr>
         </p:nvSpPr>
@@ -1664,10 +1643,9 @@
           <a:p>
             <a:pPr lvl="0"/>
             <a:r>
-              <a:rPr lang="en-US" smtClean="0"/>
+              <a:rPr lang="en-US"/>
               <a:t>Click to edit text</a:t>
             </a:r>
-            <a:endParaRPr lang="en-US"/>
           </a:p>
         </p:txBody>
       </p:sp>
@@ -1680,7 +1658,7 @@
           <p:nvPr>
             <p:ph sz="quarter" idx="4"/>
             <p:custDataLst>
-              <p:tags r:id="rId6"/>
+              <p:tags r:id="rId5"/>
             </p:custDataLst>
           </p:nvPr>
         </p:nvSpPr>
@@ -1698,42 +1676,37 @@
           <a:p>
             <a:pPr lvl="0"/>
             <a:r>
-              <a:rPr lang="en-US" smtClean="0"/>
+              <a:rPr lang="en-US"/>
               <a:t>Click to edit Master text styles</a:t>
             </a:r>
-            <a:endParaRPr lang="en-US" smtClean="0"/>
           </a:p>
           <a:p>
             <a:pPr lvl="1"/>
             <a:r>
-              <a:rPr lang="en-US" smtClean="0"/>
+              <a:rPr lang="en-US"/>
               <a:t>Second level</a:t>
             </a:r>
-            <a:endParaRPr lang="en-US" smtClean="0"/>
           </a:p>
           <a:p>
             <a:pPr lvl="2"/>
             <a:r>
-              <a:rPr lang="en-US" smtClean="0"/>
+              <a:rPr lang="en-US"/>
               <a:t>Third level</a:t>
             </a:r>
-            <a:endParaRPr lang="en-US" smtClean="0"/>
           </a:p>
           <a:p>
             <a:pPr lvl="3"/>
             <a:r>
-              <a:rPr lang="en-US" smtClean="0"/>
+              <a:rPr lang="en-US"/>
               <a:t>Fourth level</a:t>
             </a:r>
-            <a:endParaRPr lang="en-US" smtClean="0"/>
           </a:p>
           <a:p>
             <a:pPr lvl="4"/>
             <a:r>
-              <a:rPr lang="en-US" smtClean="0"/>
+              <a:rPr lang="en-US"/>
               <a:t>Fifth level</a:t>
             </a:r>
-            <a:endParaRPr lang="en-US"/>
           </a:p>
         </p:txBody>
       </p:sp>
@@ -1746,7 +1719,7 @@
           <p:nvPr>
             <p:ph type="dt" sz="half" idx="10"/>
             <p:custDataLst>
-              <p:tags r:id="rId7"/>
+              <p:tags r:id="rId6"/>
             </p:custDataLst>
           </p:nvPr>
         </p:nvSpPr>
@@ -1757,6 +1730,7 @@
           <a:p>
             <a:fld id="{760FBDFE-C587-4B4C-A407-44438C67B59E}" type="datetimeFigureOut">
               <a:rPr lang="en-US" smtClean="0"/>
+              <a:t>25-Jul-26</a:t>
             </a:fld>
             <a:endParaRPr lang="en-US"/>
           </a:p>
@@ -1771,29 +1745,29 @@
           <p:nvPr>
             <p:ph type="ftr" sz="quarter" idx="11"/>
             <p:custDataLst>
+              <p:tags r:id="rId7"/>
+            </p:custDataLst>
+          </p:nvPr>
+        </p:nvSpPr>
+        <p:spPr/>
+        <p:txBody>
+          <a:bodyPr/>
+          <a:lstStyle/>
+          <a:p>
+            <a:endParaRPr lang="en-US"/>
+          </a:p>
+        </p:txBody>
+      </p:sp>
+      <p:sp>
+        <p:nvSpPr>
+          <p:cNvPr id="9" name="Slide Number Placeholder 8"/>
+          <p:cNvSpPr>
+            <a:spLocks noGrp="1"/>
+          </p:cNvSpPr>
+          <p:nvPr>
+            <p:ph type="sldNum" sz="quarter" idx="12"/>
+            <p:custDataLst>
               <p:tags r:id="rId8"/>
-            </p:custDataLst>
-          </p:nvPr>
-        </p:nvSpPr>
-        <p:spPr/>
-        <p:txBody>
-          <a:bodyPr/>
-          <a:lstStyle/>
-          <a:p>
-            <a:endParaRPr lang="en-US"/>
-          </a:p>
-        </p:txBody>
-      </p:sp>
-      <p:sp>
-        <p:nvSpPr>
-          <p:cNvPr id="9" name="Slide Number Placeholder 8"/>
-          <p:cNvSpPr>
-            <a:spLocks noGrp="1"/>
-          </p:cNvSpPr>
-          <p:nvPr>
-            <p:ph type="sldNum" sz="quarter" idx="12"/>
-            <p:custDataLst>
-              <p:tags r:id="rId9"/>
             </p:custDataLst>
           </p:nvPr>
         </p:nvSpPr>
@@ -1804,6 +1778,7 @@
           <a:p>
             <a:fld id="{49AE70B2-8BF9-45C0-BB95-33D1B9D3A854}" type="slidenum">
               <a:rPr lang="en-US" smtClean="0"/>
+              <a:t>‹#›</a:t>
             </a:fld>
             <a:endParaRPr lang="en-US"/>
           </a:p>
@@ -1843,7 +1818,7 @@
           <p:nvPr>
             <p:ph type="title"/>
             <p:custDataLst>
-              <p:tags r:id="rId2"/>
+              <p:tags r:id="rId1"/>
             </p:custDataLst>
           </p:nvPr>
         </p:nvSpPr>
@@ -1861,10 +1836,9 @@
           <a:p>
             <a:pPr lvl="0"/>
             <a:r>
-              <a:rPr lang="en-US" smtClean="0"/>
+              <a:rPr lang="en-US"/>
               <a:t>Click to edit Master title style</a:t>
             </a:r>
-            <a:endParaRPr lang="en-US"/>
           </a:p>
         </p:txBody>
       </p:sp>
@@ -1877,7 +1851,7 @@
           <p:nvPr>
             <p:ph type="dt" sz="half" idx="10"/>
             <p:custDataLst>
-              <p:tags r:id="rId3"/>
+              <p:tags r:id="rId2"/>
             </p:custDataLst>
           </p:nvPr>
         </p:nvSpPr>
@@ -1888,6 +1862,7 @@
           <a:p>
             <a:fld id="{760FBDFE-C587-4B4C-A407-44438C67B59E}" type="datetimeFigureOut">
               <a:rPr lang="en-US" smtClean="0"/>
+              <a:t>25-Jul-26</a:t>
             </a:fld>
             <a:endParaRPr lang="en-US"/>
           </a:p>
@@ -1902,29 +1877,29 @@
           <p:nvPr>
             <p:ph type="ftr" sz="quarter" idx="11"/>
             <p:custDataLst>
+              <p:tags r:id="rId3"/>
+            </p:custDataLst>
+          </p:nvPr>
+        </p:nvSpPr>
+        <p:spPr/>
+        <p:txBody>
+          <a:bodyPr/>
+          <a:lstStyle/>
+          <a:p>
+            <a:endParaRPr lang="en-US"/>
+          </a:p>
+        </p:txBody>
+      </p:sp>
+      <p:sp>
+        <p:nvSpPr>
+          <p:cNvPr id="5" name="Slide Number Placeholder 4"/>
+          <p:cNvSpPr>
+            <a:spLocks noGrp="1"/>
+          </p:cNvSpPr>
+          <p:nvPr>
+            <p:ph type="sldNum" sz="quarter" idx="12"/>
+            <p:custDataLst>
               <p:tags r:id="rId4"/>
-            </p:custDataLst>
-          </p:nvPr>
-        </p:nvSpPr>
-        <p:spPr/>
-        <p:txBody>
-          <a:bodyPr/>
-          <a:lstStyle/>
-          <a:p>
-            <a:endParaRPr lang="en-US"/>
-          </a:p>
-        </p:txBody>
-      </p:sp>
-      <p:sp>
-        <p:nvSpPr>
-          <p:cNvPr id="5" name="Slide Number Placeholder 4"/>
-          <p:cNvSpPr>
-            <a:spLocks noGrp="1"/>
-          </p:cNvSpPr>
-          <p:nvPr>
-            <p:ph type="sldNum" sz="quarter" idx="12"/>
-            <p:custDataLst>
-              <p:tags r:id="rId5"/>
             </p:custDataLst>
           </p:nvPr>
         </p:nvSpPr>
@@ -1935,6 +1910,7 @@
           <a:p>
             <a:fld id="{49AE70B2-8BF9-45C0-BB95-33D1B9D3A854}" type="slidenum">
               <a:rPr lang="en-US" smtClean="0"/>
+              <a:t>‹#›</a:t>
             </a:fld>
             <a:endParaRPr lang="en-US"/>
           </a:p>
@@ -1974,7 +1950,7 @@
           <p:nvPr>
             <p:ph type="dt" sz="half" idx="10"/>
             <p:custDataLst>
-              <p:tags r:id="rId2"/>
+              <p:tags r:id="rId1"/>
             </p:custDataLst>
           </p:nvPr>
         </p:nvSpPr>
@@ -1985,6 +1961,7 @@
           <a:p>
             <a:fld id="{760FBDFE-C587-4B4C-A407-44438C67B59E}" type="datetimeFigureOut">
               <a:rPr lang="en-US" smtClean="0"/>
+              <a:t>25-Jul-26</a:t>
             </a:fld>
             <a:endParaRPr lang="en-US"/>
           </a:p>
@@ -1999,29 +1976,29 @@
           <p:nvPr>
             <p:ph type="ftr" sz="quarter" idx="11"/>
             <p:custDataLst>
+              <p:tags r:id="rId2"/>
+            </p:custDataLst>
+          </p:nvPr>
+        </p:nvSpPr>
+        <p:spPr/>
+        <p:txBody>
+          <a:bodyPr/>
+          <a:lstStyle/>
+          <a:p>
+            <a:endParaRPr lang="en-US"/>
+          </a:p>
+        </p:txBody>
+      </p:sp>
+      <p:sp>
+        <p:nvSpPr>
+          <p:cNvPr id="4" name="Slide Number Placeholder 3"/>
+          <p:cNvSpPr>
+            <a:spLocks noGrp="1"/>
+          </p:cNvSpPr>
+          <p:nvPr>
+            <p:ph type="sldNum" sz="quarter" idx="12"/>
+            <p:custDataLst>
               <p:tags r:id="rId3"/>
-            </p:custDataLst>
-          </p:nvPr>
-        </p:nvSpPr>
-        <p:spPr/>
-        <p:txBody>
-          <a:bodyPr/>
-          <a:lstStyle/>
-          <a:p>
-            <a:endParaRPr lang="en-US"/>
-          </a:p>
-        </p:txBody>
-      </p:sp>
-      <p:sp>
-        <p:nvSpPr>
-          <p:cNvPr id="4" name="Slide Number Placeholder 3"/>
-          <p:cNvSpPr>
-            <a:spLocks noGrp="1"/>
-          </p:cNvSpPr>
-          <p:nvPr>
-            <p:ph type="sldNum" sz="quarter" idx="12"/>
-            <p:custDataLst>
-              <p:tags r:id="rId4"/>
             </p:custDataLst>
           </p:nvPr>
         </p:nvSpPr>
@@ -2032,6 +2009,7 @@
           <a:p>
             <a:fld id="{49AE70B2-8BF9-45C0-BB95-33D1B9D3A854}" type="slidenum">
               <a:rPr lang="en-US" smtClean="0"/>
+              <a:t>‹#›</a:t>
             </a:fld>
             <a:endParaRPr lang="en-US"/>
           </a:p>
@@ -2071,7 +2049,7 @@
           <p:nvPr>
             <p:ph type="pic" idx="1"/>
             <p:custDataLst>
-              <p:tags r:id="rId2"/>
+              <p:tags r:id="rId1"/>
             </p:custDataLst>
           </p:nvPr>
         </p:nvSpPr>
@@ -2106,7 +2084,7 @@
           <p:nvPr>
             <p:ph type="body" sz="half" idx="2"/>
             <p:custDataLst>
-              <p:tags r:id="rId3"/>
+              <p:tags r:id="rId2"/>
             </p:custDataLst>
           </p:nvPr>
         </p:nvSpPr>
@@ -2129,10 +2107,9 @@
           <a:p>
             <a:pPr lvl="0"/>
             <a:r>
-              <a:rPr lang="en-US" smtClean="0"/>
+              <a:rPr lang="en-US"/>
               <a:t>Click to edit Master text styles</a:t>
             </a:r>
-            <a:endParaRPr lang="en-US"/>
           </a:p>
         </p:txBody>
       </p:sp>
@@ -2145,7 +2122,7 @@
           <p:nvPr>
             <p:ph type="dt" sz="half" idx="10"/>
             <p:custDataLst>
-              <p:tags r:id="rId4"/>
+              <p:tags r:id="rId3"/>
             </p:custDataLst>
           </p:nvPr>
         </p:nvSpPr>
@@ -2156,6 +2133,7 @@
           <a:p>
             <a:fld id="{9EFD9D74-47D9-4702-A33C-335B63B48DBF}" type="datetimeFigureOut">
               <a:rPr lang="en-US" smtClean="0"/>
+              <a:t>25-Jul-26</a:t>
             </a:fld>
             <a:endParaRPr lang="en-US" dirty="0"/>
           </a:p>
@@ -2170,29 +2148,29 @@
           <p:nvPr>
             <p:ph type="ftr" sz="quarter" idx="11"/>
             <p:custDataLst>
+              <p:tags r:id="rId4"/>
+            </p:custDataLst>
+          </p:nvPr>
+        </p:nvSpPr>
+        <p:spPr/>
+        <p:txBody>
+          <a:bodyPr/>
+          <a:lstStyle/>
+          <a:p>
+            <a:endParaRPr lang="en-US" dirty="0"/>
+          </a:p>
+        </p:txBody>
+      </p:sp>
+      <p:sp>
+        <p:nvSpPr>
+          <p:cNvPr id="7" name="Slide Number Placeholder 6"/>
+          <p:cNvSpPr>
+            <a:spLocks noGrp="1"/>
+          </p:cNvSpPr>
+          <p:nvPr>
+            <p:ph type="sldNum" sz="quarter" idx="12"/>
+            <p:custDataLst>
               <p:tags r:id="rId5"/>
-            </p:custDataLst>
-          </p:nvPr>
-        </p:nvSpPr>
-        <p:spPr/>
-        <p:txBody>
-          <a:bodyPr/>
-          <a:lstStyle/>
-          <a:p>
-            <a:endParaRPr lang="en-US" dirty="0"/>
-          </a:p>
-        </p:txBody>
-      </p:sp>
-      <p:sp>
-        <p:nvSpPr>
-          <p:cNvPr id="7" name="Slide Number Placeholder 6"/>
-          <p:cNvSpPr>
-            <a:spLocks noGrp="1"/>
-          </p:cNvSpPr>
-          <p:nvPr>
-            <p:ph type="sldNum" sz="quarter" idx="12"/>
-            <p:custDataLst>
-              <p:tags r:id="rId6"/>
             </p:custDataLst>
           </p:nvPr>
         </p:nvSpPr>
@@ -2203,6 +2181,7 @@
           <a:p>
             <a:fld id="{FABC47A4-756D-490B-A52F-7D9E2C9FC05F}" type="slidenum">
               <a:rPr lang="en-US" smtClean="0"/>
+              <a:t>‹#›</a:t>
             </a:fld>
             <a:endParaRPr lang="en-US"/>
           </a:p>
@@ -2217,19 +2196,19 @@
           <p:nvPr>
             <p:ph type="title"/>
             <p:custDataLst>
-              <p:tags r:id="rId7"/>
+              <p:tags r:id="rId6"/>
             </p:custDataLst>
           </p:nvPr>
         </p:nvSpPr>
         <p:spPr/>
         <p:txBody>
           <a:bodyPr/>
+          <a:lstStyle/>
           <a:p>
             <a:r>
               <a:rPr lang="en-US"/>
               <a:t>Click to edit Master title style</a:t>
             </a:r>
-            <a:endParaRPr lang="en-US"/>
           </a:p>
         </p:txBody>
       </p:sp>
@@ -2267,7 +2246,7 @@
           <p:nvPr>
             <p:ph type="title" orient="vert" hasCustomPrompt="1"/>
             <p:custDataLst>
-              <p:tags r:id="rId2"/>
+              <p:tags r:id="rId1"/>
             </p:custDataLst>
           </p:nvPr>
         </p:nvSpPr>
@@ -2290,10 +2269,9 @@
           <a:p>
             <a:pPr lvl="0"/>
             <a:r>
-              <a:rPr lang="en-US" smtClean="0"/>
+              <a:rPr lang="en-US"/>
               <a:t>Click to edit title</a:t>
             </a:r>
-            <a:endParaRPr lang="en-US"/>
           </a:p>
         </p:txBody>
       </p:sp>
@@ -2306,7 +2284,7 @@
           <p:nvPr>
             <p:ph type="body" orient="vert" idx="1"/>
             <p:custDataLst>
-              <p:tags r:id="rId3"/>
+              <p:tags r:id="rId2"/>
             </p:custDataLst>
           </p:nvPr>
         </p:nvSpPr>
@@ -2344,7 +2322,6 @@
               <a:rPr lang="en-US" dirty="0"/>
               <a:t>Click to edit Master text styles</a:t>
             </a:r>
-            <a:endParaRPr lang="en-US" dirty="0"/>
           </a:p>
           <a:p>
             <a:pPr lvl="1"/>
@@ -2352,7 +2329,6 @@
               <a:rPr lang="en-US" dirty="0"/>
               <a:t>Second level</a:t>
             </a:r>
-            <a:endParaRPr lang="en-US" dirty="0"/>
           </a:p>
           <a:p>
             <a:pPr lvl="2"/>
@@ -2360,7 +2336,6 @@
               <a:rPr lang="en-US" dirty="0"/>
               <a:t>Third level</a:t>
             </a:r>
-            <a:endParaRPr lang="en-US" dirty="0"/>
           </a:p>
           <a:p>
             <a:pPr lvl="3"/>
@@ -2368,7 +2343,6 @@
               <a:rPr lang="en-US" dirty="0"/>
               <a:t>Fourth level</a:t>
             </a:r>
-            <a:endParaRPr lang="en-US" dirty="0"/>
           </a:p>
           <a:p>
             <a:pPr lvl="4"/>
@@ -2376,7 +2350,6 @@
               <a:rPr lang="en-US" dirty="0"/>
               <a:t>Fifth level</a:t>
             </a:r>
-            <a:endParaRPr lang="en-US" dirty="0"/>
           </a:p>
         </p:txBody>
       </p:sp>
@@ -2389,7 +2362,7 @@
           <p:nvPr>
             <p:ph type="dt" sz="half" idx="10"/>
             <p:custDataLst>
-              <p:tags r:id="rId4"/>
+              <p:tags r:id="rId3"/>
             </p:custDataLst>
           </p:nvPr>
         </p:nvSpPr>
@@ -2400,6 +2373,7 @@
           <a:p>
             <a:fld id="{760FBDFE-C587-4B4C-A407-44438C67B59E}" type="datetimeFigureOut">
               <a:rPr lang="en-US" smtClean="0"/>
+              <a:t>25-Jul-26</a:t>
             </a:fld>
             <a:endParaRPr lang="en-US"/>
           </a:p>
@@ -2414,29 +2388,29 @@
           <p:nvPr>
             <p:ph type="ftr" sz="quarter" idx="11"/>
             <p:custDataLst>
+              <p:tags r:id="rId4"/>
+            </p:custDataLst>
+          </p:nvPr>
+        </p:nvSpPr>
+        <p:spPr/>
+        <p:txBody>
+          <a:bodyPr/>
+          <a:lstStyle/>
+          <a:p>
+            <a:endParaRPr lang="en-US"/>
+          </a:p>
+        </p:txBody>
+      </p:sp>
+      <p:sp>
+        <p:nvSpPr>
+          <p:cNvPr id="6" name="Slide Number Placeholder 5"/>
+          <p:cNvSpPr>
+            <a:spLocks noGrp="1"/>
+          </p:cNvSpPr>
+          <p:nvPr>
+            <p:ph type="sldNum" sz="quarter" idx="12"/>
+            <p:custDataLst>
               <p:tags r:id="rId5"/>
-            </p:custDataLst>
-          </p:nvPr>
-        </p:nvSpPr>
-        <p:spPr/>
-        <p:txBody>
-          <a:bodyPr/>
-          <a:lstStyle/>
-          <a:p>
-            <a:endParaRPr lang="en-US"/>
-          </a:p>
-        </p:txBody>
-      </p:sp>
-      <p:sp>
-        <p:nvSpPr>
-          <p:cNvPr id="6" name="Slide Number Placeholder 5"/>
-          <p:cNvSpPr>
-            <a:spLocks noGrp="1"/>
-          </p:cNvSpPr>
-          <p:nvPr>
-            <p:ph type="sldNum" sz="quarter" idx="12"/>
-            <p:custDataLst>
-              <p:tags r:id="rId6"/>
             </p:custDataLst>
           </p:nvPr>
         </p:nvSpPr>
@@ -2447,6 +2421,7 @@
           <a:p>
             <a:fld id="{49AE70B2-8BF9-45C0-BB95-33D1B9D3A854}" type="slidenum">
               <a:rPr lang="en-US" smtClean="0"/>
+              <a:t>‹#›</a:t>
             </a:fld>
             <a:endParaRPr lang="en-US"/>
           </a:p>
@@ -2491,7 +2466,7 @@
           <p:nvPr>
             <p:ph type="title"/>
             <p:custDataLst>
-              <p:tags r:id="rId12"/>
+              <p:tags r:id="rId14"/>
             </p:custDataLst>
           </p:nvPr>
         </p:nvSpPr>
@@ -2514,7 +2489,6 @@
               <a:rPr lang="en-US" dirty="0"/>
               <a:t>Click to edit Master title style</a:t>
             </a:r>
-            <a:endParaRPr lang="en-US" dirty="0"/>
           </a:p>
         </p:txBody>
       </p:sp>
@@ -2527,7 +2501,7 @@
           <p:nvPr>
             <p:ph type="body" idx="1"/>
             <p:custDataLst>
-              <p:tags r:id="rId13"/>
+              <p:tags r:id="rId15"/>
             </p:custDataLst>
           </p:nvPr>
         </p:nvSpPr>
@@ -2551,7 +2525,6 @@
               <a:rPr lang="en-US" dirty="0"/>
               <a:t>Click to edit Master text styles</a:t>
             </a:r>
-            <a:endParaRPr lang="en-US" dirty="0"/>
           </a:p>
           <a:p>
             <a:pPr lvl="1"/>
@@ -2559,7 +2532,6 @@
               <a:rPr lang="en-US" dirty="0"/>
               <a:t>Second level</a:t>
             </a:r>
-            <a:endParaRPr lang="en-US" dirty="0"/>
           </a:p>
           <a:p>
             <a:pPr lvl="2"/>
@@ -2567,7 +2539,6 @@
               <a:rPr lang="en-US" dirty="0"/>
               <a:t>Third level</a:t>
             </a:r>
-            <a:endParaRPr lang="en-US" dirty="0"/>
           </a:p>
           <a:p>
             <a:pPr lvl="3"/>
@@ -2575,7 +2546,6 @@
               <a:rPr lang="en-US" dirty="0"/>
               <a:t>Fourth level</a:t>
             </a:r>
-            <a:endParaRPr lang="en-US" dirty="0"/>
           </a:p>
           <a:p>
             <a:pPr lvl="4"/>
@@ -2583,7 +2553,6 @@
               <a:rPr lang="en-US" dirty="0"/>
               <a:t>Fifth level</a:t>
             </a:r>
-            <a:endParaRPr lang="en-US" dirty="0"/>
           </a:p>
         </p:txBody>
       </p:sp>
@@ -2596,7 +2565,7 @@
           <p:nvPr>
             <p:ph type="dt" sz="half" idx="2"/>
             <p:custDataLst>
-              <p:tags r:id="rId14"/>
+              <p:tags r:id="rId16"/>
             </p:custDataLst>
           </p:nvPr>
         </p:nvSpPr>
@@ -2627,6 +2596,7 @@
           <a:p>
             <a:fld id="{760FBDFE-C587-4B4C-A407-44438C67B59E}" type="datetimeFigureOut">
               <a:rPr lang="en-US" smtClean="0"/>
+              <a:t>25-Jul-26</a:t>
             </a:fld>
             <a:endParaRPr lang="en-US"/>
           </a:p>
@@ -2641,7 +2611,7 @@
           <p:nvPr>
             <p:ph type="ftr" sz="quarter" idx="3"/>
             <p:custDataLst>
-              <p:tags r:id="rId15"/>
+              <p:tags r:id="rId17"/>
             </p:custDataLst>
           </p:nvPr>
         </p:nvSpPr>
@@ -2683,7 +2653,7 @@
           <p:nvPr>
             <p:ph type="sldNum" sz="quarter" idx="4"/>
             <p:custDataLst>
-              <p:tags r:id="rId16"/>
+              <p:tags r:id="rId18"/>
             </p:custDataLst>
           </p:nvPr>
         </p:nvSpPr>
@@ -2714,6 +2684,7 @@
           <a:p>
             <a:fld id="{49AE70B2-8BF9-45C0-BB95-33D1B9D3A854}" type="slidenum">
               <a:rPr lang="en-US" smtClean="0"/>
+              <a:t>‹#›</a:t>
             </a:fld>
             <a:endParaRPr lang="en-US" dirty="0"/>
           </a:p>
@@ -2721,7 +2692,7 @@
       </p:sp>
     </p:spTree>
     <p:custDataLst>
-      <p:tags r:id="rId17"/>
+      <p:tags r:id="rId13"/>
     </p:custDataLst>
   </p:cSld>
   <p:clrMap bg1="lt1" tx1="dk1" bg2="lt2" tx2="dk2" accent1="accent1" accent2="accent2" accent3="accent3" accent4="accent4" accent5="accent5" accent6="accent6" hlink="hlink" folHlink="folHlink"/>
@@ -3075,7 +3046,14 @@
         <p:cNvGrpSpPr/>
         <p:nvPr/>
       </p:nvGrpSpPr>
-      <p:grpSpPr/>
+      <p:grpSpPr>
+        <a:xfrm>
+          <a:off x="0" y="0"/>
+          <a:ext cx="0" cy="0"/>
+          <a:chOff x="0" y="0"/>
+          <a:chExt cx="0" cy="0"/>
+        </a:xfrm>
+      </p:grpSpPr>
       <p:sp>
         <p:nvSpPr>
           <p:cNvPr id="2" name="Title 1"/>
@@ -3092,12 +3070,12 @@
         <p:spPr/>
         <p:txBody>
           <a:bodyPr/>
+          <a:lstStyle/>
           <a:p>
             <a:r>
               <a:rPr lang="en-US"/>
               <a:t>The Gumball Experiment</a:t>
             </a:r>
-            <a:endParaRPr lang="en-US"/>
           </a:p>
         </p:txBody>
       </p:sp>
@@ -3117,12 +3095,12 @@
         <p:spPr/>
         <p:txBody>
           <a:bodyPr/>
+          <a:lstStyle/>
           <a:p>
             <a:r>
               <a:rPr lang="en-US"/>
               <a:t>An Exercise in Estimation</a:t>
             </a:r>
-            <a:endParaRPr lang="en-US"/>
           </a:p>
         </p:txBody>
       </p:sp>
@@ -3143,7 +3121,14 @@
         <p:cNvGrpSpPr/>
         <p:nvPr/>
       </p:nvGrpSpPr>
-      <p:grpSpPr/>
+      <p:grpSpPr>
+        <a:xfrm>
+          <a:off x="0" y="0"/>
+          <a:ext cx="0" cy="0"/>
+          <a:chOff x="0" y="0"/>
+          <a:chExt cx="0" cy="0"/>
+        </a:xfrm>
+      </p:grpSpPr>
       <p:sp>
         <p:nvSpPr>
           <p:cNvPr id="2" name="Title 1"/>
@@ -3160,6 +3145,7 @@
         <p:spPr/>
         <p:txBody>
           <a:bodyPr/>
+          <a:lstStyle/>
           <a:p>
             <a:r>
               <a:rPr lang="en-US">
@@ -3187,6 +3173,7 @@
         <p:spPr/>
         <p:txBody>
           <a:bodyPr/>
+          <a:lstStyle/>
           <a:p>
             <a:endParaRPr lang="en-US"/>
           </a:p>
@@ -3209,7 +3196,14 @@
         <p:cNvGrpSpPr/>
         <p:nvPr/>
       </p:nvGrpSpPr>
-      <p:grpSpPr/>
+      <p:grpSpPr>
+        <a:xfrm>
+          <a:off x="0" y="0"/>
+          <a:ext cx="0" cy="0"/>
+          <a:chOff x="0" y="0"/>
+          <a:chExt cx="0" cy="0"/>
+        </a:xfrm>
+      </p:grpSpPr>
       <p:sp>
         <p:nvSpPr>
           <p:cNvPr id="2" name="Title 1"/>
@@ -3219,19 +3213,19 @@
           <p:nvPr>
             <p:ph type="title"/>
             <p:custDataLst>
-              <p:tags r:id="rId1"/>
+              <p:tags r:id="rId2"/>
             </p:custDataLst>
           </p:nvPr>
         </p:nvSpPr>
         <p:spPr/>
         <p:txBody>
           <a:bodyPr/>
+          <a:lstStyle/>
           <a:p>
             <a:r>
               <a:rPr lang="en-US"/>
               <a:t>How many gumballs do you see ?</a:t>
             </a:r>
-            <a:endParaRPr lang="en-US"/>
           </a:p>
         </p:txBody>
       </p:sp>
@@ -3244,7 +3238,7 @@
           <p:nvPr/>
         </p:nvPicPr>
         <p:blipFill>
-          <a:blip r:embed="rId2"/>
+          <a:blip r:embed="rId4"/>
           <a:stretch>
             <a:fillRect/>
           </a:stretch>
@@ -3266,17 +3260,17 @@
       </p:pic>
     </p:spTree>
     <p:custDataLst>
-      <p:tags r:id="rId3"/>
+      <p:tags r:id="rId1"/>
     </p:custDataLst>
   </p:cSld>
   <p:clrMapOvr>
     <a:masterClrMapping/>
   </p:clrMapOvr>
-  <mc:AlternateContent xmlns:mc="http://schemas.openxmlformats.org/markup-compatibility/2006">
-    <mc:Choice xmlns:p14="http://schemas.microsoft.com/office/powerpoint/2010/main" Requires="p14">
+  <mc:AlternateContent xmlns:mc="http://schemas.openxmlformats.org/markup-compatibility/2006" xmlns:p14="http://schemas.microsoft.com/office/powerpoint/2010/main">
+    <mc:Choice Requires="p14">
       <p:transition spd="slow" p14:dur="1200"/>
     </mc:Choice>
-    <mc:Fallback>
+    <mc:Fallback xmlns="">
       <p:transition spd="slow"/>
     </mc:Fallback>
   </mc:AlternateContent>
@@ -3378,7 +3372,14 @@
         <p:cNvGrpSpPr/>
         <p:nvPr/>
       </p:nvGrpSpPr>
-      <p:grpSpPr/>
+      <p:grpSpPr>
+        <a:xfrm>
+          <a:off x="0" y="0"/>
+          <a:ext cx="0" cy="0"/>
+          <a:chOff x="0" y="0"/>
+          <a:chExt cx="0" cy="0"/>
+        </a:xfrm>
+      </p:grpSpPr>
       <p:sp>
         <p:nvSpPr>
           <p:cNvPr id="2" name="Title 1"/>
@@ -3388,19 +3389,19 @@
           <p:nvPr>
             <p:ph type="title"/>
             <p:custDataLst>
-              <p:tags r:id="rId1"/>
+              <p:tags r:id="rId2"/>
             </p:custDataLst>
           </p:nvPr>
         </p:nvSpPr>
         <p:spPr/>
         <p:txBody>
           <a:bodyPr/>
+          <a:lstStyle/>
           <a:p>
             <a:r>
               <a:rPr lang="en-US"/>
               <a:t>And the correct answer is ...</a:t>
             </a:r>
-            <a:endParaRPr lang="en-US"/>
           </a:p>
         </p:txBody>
       </p:sp>
@@ -3413,7 +3414,7 @@
           <p:nvPr>
             <p:ph idx="1"/>
             <p:custDataLst>
-              <p:tags r:id="rId2"/>
+              <p:tags r:id="rId3"/>
             </p:custDataLst>
           </p:nvPr>
         </p:nvSpPr>
@@ -3422,29 +3423,25 @@
           <a:bodyPr>
             <a:noAutofit/>
           </a:bodyPr>
+          <a:lstStyle/>
           <a:p>
             <a:pPr marL="0" indent="0" algn="ctr">
               <a:buNone/>
             </a:pPr>
             <a:r>
-              <a:rPr lang="en-US" sz="16600">
+              <a:rPr lang="en-US" sz="16600" dirty="0">
                 <a:solidFill>
                   <a:schemeClr val="bg1"/>
                 </a:solidFill>
               </a:rPr>
-              <a:t>102</a:t>
-            </a:r>
-            <a:endParaRPr lang="en-US" sz="16600">
-              <a:solidFill>
-                <a:schemeClr val="bg1"/>
-              </a:solidFill>
-            </a:endParaRPr>
+              <a:t>122</a:t>
+            </a:r>
           </a:p>
         </p:txBody>
       </p:sp>
     </p:spTree>
     <p:custDataLst>
-      <p:tags r:id="rId3"/>
+      <p:tags r:id="rId1"/>
     </p:custDataLst>
   </p:cSld>
   <p:clrMapOvr>
@@ -3528,829 +3525,8 @@
 </p:sld>
 </file>
 
-<file path=ppt/slides/slide5.xml><?xml version="1.0" encoding="utf-8"?>
-<p:sld xmlns:a="http://schemas.openxmlformats.org/drawingml/2006/main" xmlns:r="http://schemas.openxmlformats.org/officeDocument/2006/relationships" xmlns:p="http://schemas.openxmlformats.org/presentationml/2006/main">
-  <p:cSld>
-    <p:spTree>
-      <p:nvGrpSpPr>
-        <p:cNvPr id="1" name=""/>
-        <p:cNvGrpSpPr/>
-        <p:nvPr/>
-      </p:nvGrpSpPr>
-      <p:grpSpPr/>
-      <p:sp>
-        <p:nvSpPr>
-          <p:cNvPr id="2" name="Title 1"/>
-          <p:cNvSpPr>
-            <a:spLocks noGrp="1"/>
-          </p:cNvSpPr>
-          <p:nvPr>
-            <p:ph type="title"/>
-            <p:custDataLst>
-              <p:tags r:id="rId1"/>
-            </p:custDataLst>
-          </p:nvPr>
-        </p:nvSpPr>
-        <p:spPr/>
-        <p:txBody>
-          <a:bodyPr/>
-          <a:p>
-            <a:endParaRPr lang="en-US"/>
-          </a:p>
-        </p:txBody>
-      </p:sp>
-      <p:sp>
-        <p:nvSpPr>
-          <p:cNvPr id="3" name="Content Placeholder 2"/>
-          <p:cNvSpPr>
-            <a:spLocks noGrp="1"/>
-          </p:cNvSpPr>
-          <p:nvPr>
-            <p:ph idx="1"/>
-            <p:custDataLst>
-              <p:tags r:id="rId2"/>
-            </p:custDataLst>
-          </p:nvPr>
-        </p:nvSpPr>
-        <p:spPr/>
-        <p:txBody>
-          <a:bodyPr/>
-          <a:p>
-            <a:endParaRPr lang="en-US"/>
-          </a:p>
-        </p:txBody>
-      </p:sp>
-    </p:spTree>
-    <p:custDataLst>
-      <p:tags r:id="rId3"/>
-    </p:custDataLst>
-  </p:cSld>
-  <p:clrMapOvr>
-    <a:masterClrMapping/>
-  </p:clrMapOvr>
-</p:sld>
-</file>
-
 <file path=ppt/tags/tag1.xml><?xml version="1.0" encoding="utf-8"?>
-<p:tagLst xmlns:p="http://schemas.openxmlformats.org/presentationml/2006/main">
-  <p:tag name="KSO_WM_UNIT_HIGHLIGHT" val="0"/>
-  <p:tag name="KSO_WM_UNIT_COMPATIBLE" val="0"/>
-  <p:tag name="KSO_WM_UNIT_DIAGRAM_ISNUMVISUAL" val="0"/>
-  <p:tag name="KSO_WM_UNIT_DIAGRAM_ISREFERUNIT" val="0"/>
-  <p:tag name="KSO_WM_UNIT_ID" val="_1**"/>
-  <p:tag name="KSO_WM_UNIT_LAYERLEVEL" val="1"/>
-  <p:tag name="KSO_WM_TAG_VERSION" val="1.0"/>
-  <p:tag name="KSO_WM_BEAUTIFY_FLAG" val="#wm#"/>
-</p:tagLst>
-</file>
-
-<file path=ppt/tags/tag10.xml><?xml version="1.0" encoding="utf-8"?>
-<p:tagLst xmlns:p="http://schemas.openxmlformats.org/presentationml/2006/main">
-  <p:tag name="KSO_WM_UNIT_HIGHLIGHT" val="0"/>
-  <p:tag name="KSO_WM_UNIT_COMPATIBLE" val="0"/>
-  <p:tag name="KSO_WM_UNIT_DIAGRAM_ISNUMVISUAL" val="0"/>
-  <p:tag name="KSO_WM_UNIT_DIAGRAM_ISREFERUNIT" val="0"/>
-  <p:tag name="KSO_WM_UNIT_ID" val="_2**"/>
-  <p:tag name="KSO_WM_UNIT_LAYERLEVEL" val="1"/>
-  <p:tag name="KSO_WM_TAG_VERSION" val="1.0"/>
-  <p:tag name="KSO_WM_BEAUTIFY_FLAG" val="#wm#"/>
-</p:tagLst>
-</file>
-
-<file path=ppt/tags/tag11.xml><?xml version="1.0" encoding="utf-8"?>
-<p:tagLst xmlns:p="http://schemas.openxmlformats.org/presentationml/2006/main">
-  <p:tag name="KSO_WM_UNIT_HIGHLIGHT" val="0"/>
-  <p:tag name="KSO_WM_UNIT_COMPATIBLE" val="0"/>
-  <p:tag name="KSO_WM_UNIT_DIAGRAM_ISNUMVISUAL" val="0"/>
-  <p:tag name="KSO_WM_UNIT_DIAGRAM_ISREFERUNIT" val="0"/>
-  <p:tag name="KSO_WM_UNIT_ID" val="_3**"/>
-  <p:tag name="KSO_WM_UNIT_LAYERLEVEL" val="1"/>
-  <p:tag name="KSO_WM_TAG_VERSION" val="1.0"/>
-  <p:tag name="KSO_WM_BEAUTIFY_FLAG" val="#wm#"/>
-</p:tagLst>
-</file>
-
-<file path=ppt/tags/tag12.xml><?xml version="1.0" encoding="utf-8"?>
-<p:tagLst xmlns:p="http://schemas.openxmlformats.org/presentationml/2006/main">
-  <p:tag name="KSO_WM_UNIT_HIGHLIGHT" val="0"/>
-  <p:tag name="KSO_WM_UNIT_COMPATIBLE" val="0"/>
-  <p:tag name="KSO_WM_UNIT_DIAGRAM_ISNUMVISUAL" val="0"/>
-  <p:tag name="KSO_WM_UNIT_DIAGRAM_ISREFERUNIT" val="0"/>
-  <p:tag name="KSO_WM_UNIT_ID" val="_3**"/>
-  <p:tag name="KSO_WM_UNIT_LAYERLEVEL" val="1"/>
-  <p:tag name="KSO_WM_TAG_VERSION" val="1.0"/>
-  <p:tag name="KSO_WM_BEAUTIFY_FLAG" val="#wm#"/>
-</p:tagLst>
-</file>
-
-<file path=ppt/tags/tag13.xml><?xml version="1.0" encoding="utf-8"?>
-<p:tagLst xmlns:p="http://schemas.openxmlformats.org/presentationml/2006/main">
-  <p:tag name="KSO_WM_UNIT_HIGHLIGHT" val="0"/>
-  <p:tag name="KSO_WM_UNIT_COMPATIBLE" val="0"/>
-  <p:tag name="KSO_WM_UNIT_DIAGRAM_ISNUMVISUAL" val="0"/>
-  <p:tag name="KSO_WM_UNIT_DIAGRAM_ISREFERUNIT" val="0"/>
-  <p:tag name="KSO_WM_UNIT_ID" val="_3**"/>
-  <p:tag name="KSO_WM_UNIT_LAYERLEVEL" val="1"/>
-  <p:tag name="KSO_WM_TAG_VERSION" val="1.0"/>
-  <p:tag name="KSO_WM_BEAUTIFY_FLAG" val="#wm#"/>
-</p:tagLst>
-</file>
-
-<file path=ppt/tags/tag14.xml><?xml version="1.0" encoding="utf-8"?>
-<p:tagLst xmlns:p="http://schemas.openxmlformats.org/presentationml/2006/main">
-  <p:tag name="KSO_WM_UNIT_HIGHLIGHT" val="0"/>
-  <p:tag name="KSO_WM_UNIT_COMPATIBLE" val="0"/>
-  <p:tag name="KSO_WM_UNIT_DIAGRAM_ISNUMVISUAL" val="0"/>
-  <p:tag name="KSO_WM_UNIT_DIAGRAM_ISREFERUNIT" val="0"/>
-  <p:tag name="KSO_WM_UNIT_ID" val="_3**"/>
-  <p:tag name="KSO_WM_UNIT_LAYERLEVEL" val="1"/>
-  <p:tag name="KSO_WM_TAG_VERSION" val="1.0"/>
-  <p:tag name="KSO_WM_BEAUTIFY_FLAG" val="#wm#"/>
-</p:tagLst>
-</file>
-
-<file path=ppt/tags/tag15.xml><?xml version="1.0" encoding="utf-8"?>
-<p:tagLst xmlns:p="http://schemas.openxmlformats.org/presentationml/2006/main">
-  <p:tag name="KSO_WM_UNIT_HIGHLIGHT" val="0"/>
-  <p:tag name="KSO_WM_UNIT_COMPATIBLE" val="0"/>
-  <p:tag name="KSO_WM_UNIT_DIAGRAM_ISNUMVISUAL" val="0"/>
-  <p:tag name="KSO_WM_UNIT_DIAGRAM_ISREFERUNIT" val="0"/>
-  <p:tag name="KSO_WM_UNIT_ID" val="_3**"/>
-  <p:tag name="KSO_WM_UNIT_LAYERLEVEL" val="1"/>
-  <p:tag name="KSO_WM_TAG_VERSION" val="1.0"/>
-  <p:tag name="KSO_WM_BEAUTIFY_FLAG" val="#wm#"/>
-</p:tagLst>
-</file>
-
-<file path=ppt/tags/tag16.xml><?xml version="1.0" encoding="utf-8"?>
-<p:tagLst xmlns:p="http://schemas.openxmlformats.org/presentationml/2006/main">
-  <p:tag name="KSO_WM_UNIT_HIGHLIGHT" val="0"/>
-  <p:tag name="KSO_WM_UNIT_COMPATIBLE" val="0"/>
-  <p:tag name="KSO_WM_UNIT_DIAGRAM_ISNUMVISUAL" val="0"/>
-  <p:tag name="KSO_WM_UNIT_DIAGRAM_ISREFERUNIT" val="0"/>
-  <p:tag name="KSO_WM_UNIT_ID" val="_4**"/>
-  <p:tag name="KSO_WM_UNIT_LAYERLEVEL" val="1"/>
-  <p:tag name="KSO_WM_TAG_VERSION" val="1.0"/>
-  <p:tag name="KSO_WM_BEAUTIFY_FLAG" val="#wm#"/>
-</p:tagLst>
-</file>
-
-<file path=ppt/tags/tag17.xml><?xml version="1.0" encoding="utf-8"?>
-<p:tagLst xmlns:p="http://schemas.openxmlformats.org/presentationml/2006/main">
-  <p:tag name="KSO_WM_UNIT_HIGHLIGHT" val="0"/>
-  <p:tag name="KSO_WM_UNIT_COMPATIBLE" val="0"/>
-  <p:tag name="KSO_WM_UNIT_DIAGRAM_ISNUMVISUAL" val="0"/>
-  <p:tag name="KSO_WM_UNIT_DIAGRAM_ISREFERUNIT" val="0"/>
-  <p:tag name="KSO_WM_UNIT_ID" val="_4**"/>
-  <p:tag name="KSO_WM_UNIT_LAYERLEVEL" val="1"/>
-  <p:tag name="KSO_WM_TAG_VERSION" val="1.0"/>
-  <p:tag name="KSO_WM_BEAUTIFY_FLAG" val="#wm#"/>
-</p:tagLst>
-</file>
-
-<file path=ppt/tags/tag18.xml><?xml version="1.0" encoding="utf-8"?>
-<p:tagLst xmlns:p="http://schemas.openxmlformats.org/presentationml/2006/main">
-  <p:tag name="KSO_WM_UNIT_HIGHLIGHT" val="0"/>
-  <p:tag name="KSO_WM_UNIT_COMPATIBLE" val="0"/>
-  <p:tag name="KSO_WM_UNIT_DIAGRAM_ISNUMVISUAL" val="0"/>
-  <p:tag name="KSO_WM_UNIT_DIAGRAM_ISREFERUNIT" val="0"/>
-  <p:tag name="KSO_WM_UNIT_ID" val="_4**"/>
-  <p:tag name="KSO_WM_UNIT_LAYERLEVEL" val="1"/>
-  <p:tag name="KSO_WM_TAG_VERSION" val="1.0"/>
-  <p:tag name="KSO_WM_BEAUTIFY_FLAG" val="#wm#"/>
-</p:tagLst>
-</file>
-
-<file path=ppt/tags/tag19.xml><?xml version="1.0" encoding="utf-8"?>
-<p:tagLst xmlns:p="http://schemas.openxmlformats.org/presentationml/2006/main">
-  <p:tag name="KSO_WM_UNIT_HIGHLIGHT" val="0"/>
-  <p:tag name="KSO_WM_UNIT_COMPATIBLE" val="0"/>
-  <p:tag name="KSO_WM_UNIT_DIAGRAM_ISNUMVISUAL" val="0"/>
-  <p:tag name="KSO_WM_UNIT_DIAGRAM_ISREFERUNIT" val="0"/>
-  <p:tag name="KSO_WM_UNIT_ID" val="_4**"/>
-  <p:tag name="KSO_WM_UNIT_LAYERLEVEL" val="1"/>
-  <p:tag name="KSO_WM_TAG_VERSION" val="1.0"/>
-  <p:tag name="KSO_WM_BEAUTIFY_FLAG" val="#wm#"/>
-</p:tagLst>
-</file>
-
-<file path=ppt/tags/tag2.xml><?xml version="1.0" encoding="utf-8"?>
-<p:tagLst xmlns:p="http://schemas.openxmlformats.org/presentationml/2006/main">
-  <p:tag name="KSO_WM_UNIT_HIGHLIGHT" val="0"/>
-  <p:tag name="KSO_WM_UNIT_COMPATIBLE" val="0"/>
-  <p:tag name="KSO_WM_UNIT_DIAGRAM_ISNUMVISUAL" val="0"/>
-  <p:tag name="KSO_WM_UNIT_DIAGRAM_ISREFERUNIT" val="0"/>
-  <p:tag name="KSO_WM_UNIT_ID" val="_1**"/>
-  <p:tag name="KSO_WM_UNIT_LAYERLEVEL" val="1"/>
-  <p:tag name="KSO_WM_TAG_VERSION" val="1.0"/>
-  <p:tag name="KSO_WM_BEAUTIFY_FLAG" val="#wm#"/>
-</p:tagLst>
-</file>
-
-<file path=ppt/tags/tag20.xml><?xml version="1.0" encoding="utf-8"?>
-<p:tagLst xmlns:p="http://schemas.openxmlformats.org/presentationml/2006/main">
-  <p:tag name="KSO_WM_UNIT_HIGHLIGHT" val="0"/>
-  <p:tag name="KSO_WM_UNIT_COMPATIBLE" val="0"/>
-  <p:tag name="KSO_WM_UNIT_DIAGRAM_ISNUMVISUAL" val="0"/>
-  <p:tag name="KSO_WM_UNIT_DIAGRAM_ISREFERUNIT" val="0"/>
-  <p:tag name="KSO_WM_UNIT_ID" val="_4**"/>
-  <p:tag name="KSO_WM_UNIT_LAYERLEVEL" val="1"/>
-  <p:tag name="KSO_WM_TAG_VERSION" val="1.0"/>
-  <p:tag name="KSO_WM_BEAUTIFY_FLAG" val="#wm#"/>
-</p:tagLst>
-</file>
-
-<file path=ppt/tags/tag21.xml><?xml version="1.0" encoding="utf-8"?>
-<p:tagLst xmlns:p="http://schemas.openxmlformats.org/presentationml/2006/main">
-  <p:tag name="KSO_WM_UNIT_HIGHLIGHT" val="0"/>
-  <p:tag name="KSO_WM_UNIT_COMPATIBLE" val="0"/>
-  <p:tag name="KSO_WM_UNIT_DIAGRAM_ISNUMVISUAL" val="0"/>
-  <p:tag name="KSO_WM_UNIT_DIAGRAM_ISREFERUNIT" val="0"/>
-  <p:tag name="KSO_WM_UNIT_ID" val="_4**"/>
-  <p:tag name="KSO_WM_UNIT_LAYERLEVEL" val="1"/>
-  <p:tag name="KSO_WM_TAG_VERSION" val="1.0"/>
-  <p:tag name="KSO_WM_BEAUTIFY_FLAG" val="#wm#"/>
-</p:tagLst>
-</file>
-
-<file path=ppt/tags/tag22.xml><?xml version="1.0" encoding="utf-8"?>
-<p:tagLst xmlns:p="http://schemas.openxmlformats.org/presentationml/2006/main">
-  <p:tag name="KSO_WM_UNIT_HIGHLIGHT" val="0"/>
-  <p:tag name="KSO_WM_UNIT_COMPATIBLE" val="0"/>
-  <p:tag name="KSO_WM_UNIT_DIAGRAM_ISNUMVISUAL" val="0"/>
-  <p:tag name="KSO_WM_UNIT_DIAGRAM_ISREFERUNIT" val="0"/>
-  <p:tag name="KSO_WM_UNIT_ID" val="_5**"/>
-  <p:tag name="KSO_WM_UNIT_LAYERLEVEL" val="1"/>
-  <p:tag name="KSO_WM_TAG_VERSION" val="1.0"/>
-  <p:tag name="KSO_WM_BEAUTIFY_FLAG" val="#wm#"/>
-</p:tagLst>
-</file>
-
-<file path=ppt/tags/tag23.xml><?xml version="1.0" encoding="utf-8"?>
-<p:tagLst xmlns:p="http://schemas.openxmlformats.org/presentationml/2006/main">
-  <p:tag name="KSO_WM_UNIT_HIGHLIGHT" val="0"/>
-  <p:tag name="KSO_WM_UNIT_COMPATIBLE" val="0"/>
-  <p:tag name="KSO_WM_UNIT_DIAGRAM_ISNUMVISUAL" val="0"/>
-  <p:tag name="KSO_WM_UNIT_DIAGRAM_ISREFERUNIT" val="0"/>
-  <p:tag name="KSO_WM_UNIT_ID" val="_5**"/>
-  <p:tag name="KSO_WM_UNIT_LAYERLEVEL" val="1"/>
-  <p:tag name="KSO_WM_TAG_VERSION" val="1.0"/>
-  <p:tag name="KSO_WM_BEAUTIFY_FLAG" val="#wm#"/>
-</p:tagLst>
-</file>
-
-<file path=ppt/tags/tag24.xml><?xml version="1.0" encoding="utf-8"?>
-<p:tagLst xmlns:p="http://schemas.openxmlformats.org/presentationml/2006/main">
-  <p:tag name="KSO_WM_UNIT_HIGHLIGHT" val="0"/>
-  <p:tag name="KSO_WM_UNIT_COMPATIBLE" val="0"/>
-  <p:tag name="KSO_WM_UNIT_DIAGRAM_ISNUMVISUAL" val="0"/>
-  <p:tag name="KSO_WM_UNIT_DIAGRAM_ISREFERUNIT" val="0"/>
-  <p:tag name="KSO_WM_UNIT_ID" val="_5**"/>
-  <p:tag name="KSO_WM_UNIT_LAYERLEVEL" val="1"/>
-  <p:tag name="KSO_WM_TAG_VERSION" val="1.0"/>
-  <p:tag name="KSO_WM_BEAUTIFY_FLAG" val="#wm#"/>
-</p:tagLst>
-</file>
-
-<file path=ppt/tags/tag25.xml><?xml version="1.0" encoding="utf-8"?>
-<p:tagLst xmlns:p="http://schemas.openxmlformats.org/presentationml/2006/main">
-  <p:tag name="KSO_WM_UNIT_HIGHLIGHT" val="0"/>
-  <p:tag name="KSO_WM_UNIT_COMPATIBLE" val="0"/>
-  <p:tag name="KSO_WM_UNIT_DIAGRAM_ISNUMVISUAL" val="0"/>
-  <p:tag name="KSO_WM_UNIT_DIAGRAM_ISREFERUNIT" val="0"/>
-  <p:tag name="KSO_WM_UNIT_ID" val="_5**"/>
-  <p:tag name="KSO_WM_UNIT_LAYERLEVEL" val="1"/>
-  <p:tag name="KSO_WM_TAG_VERSION" val="1.0"/>
-  <p:tag name="KSO_WM_BEAUTIFY_FLAG" val="#wm#"/>
-</p:tagLst>
-</file>
-
-<file path=ppt/tags/tag26.xml><?xml version="1.0" encoding="utf-8"?>
-<p:tagLst xmlns:p="http://schemas.openxmlformats.org/presentationml/2006/main">
-  <p:tag name="KSO_WM_UNIT_HIGHLIGHT" val="0"/>
-  <p:tag name="KSO_WM_UNIT_COMPATIBLE" val="0"/>
-  <p:tag name="KSO_WM_UNIT_DIAGRAM_ISNUMVISUAL" val="0"/>
-  <p:tag name="KSO_WM_UNIT_DIAGRAM_ISREFERUNIT" val="0"/>
-  <p:tag name="KSO_WM_UNIT_ID" val="_5**"/>
-  <p:tag name="KSO_WM_UNIT_LAYERLEVEL" val="1"/>
-  <p:tag name="KSO_WM_TAG_VERSION" val="1.0"/>
-  <p:tag name="KSO_WM_BEAUTIFY_FLAG" val="#wm#"/>
-</p:tagLst>
-</file>
-
-<file path=ppt/tags/tag27.xml><?xml version="1.0" encoding="utf-8"?>
-<p:tagLst xmlns:p="http://schemas.openxmlformats.org/presentationml/2006/main">
-  <p:tag name="KSO_WM_UNIT_HIGHLIGHT" val="0"/>
-  <p:tag name="KSO_WM_UNIT_COMPATIBLE" val="0"/>
-  <p:tag name="KSO_WM_UNIT_DIAGRAM_ISNUMVISUAL" val="0"/>
-  <p:tag name="KSO_WM_UNIT_DIAGRAM_ISREFERUNIT" val="0"/>
-  <p:tag name="KSO_WM_UNIT_ID" val="_5**"/>
-  <p:tag name="KSO_WM_UNIT_LAYERLEVEL" val="1"/>
-  <p:tag name="KSO_WM_TAG_VERSION" val="1.0"/>
-  <p:tag name="KSO_WM_BEAUTIFY_FLAG" val="#wm#"/>
-</p:tagLst>
-</file>
-
-<file path=ppt/tags/tag28.xml><?xml version="1.0" encoding="utf-8"?>
-<p:tagLst xmlns:p="http://schemas.openxmlformats.org/presentationml/2006/main">
-  <p:tag name="KSO_WM_UNIT_HIGHLIGHT" val="0"/>
-  <p:tag name="KSO_WM_UNIT_COMPATIBLE" val="0"/>
-  <p:tag name="KSO_WM_UNIT_DIAGRAM_ISNUMVISUAL" val="0"/>
-  <p:tag name="KSO_WM_UNIT_DIAGRAM_ISREFERUNIT" val="0"/>
-  <p:tag name="KSO_WM_UNIT_ID" val="_5**"/>
-  <p:tag name="KSO_WM_UNIT_LAYERLEVEL" val="1"/>
-  <p:tag name="KSO_WM_TAG_VERSION" val="1.0"/>
-  <p:tag name="KSO_WM_BEAUTIFY_FLAG" val="#wm#"/>
-</p:tagLst>
-</file>
-
-<file path=ppt/tags/tag29.xml><?xml version="1.0" encoding="utf-8"?>
-<p:tagLst xmlns:p="http://schemas.openxmlformats.org/presentationml/2006/main">
-  <p:tag name="KSO_WM_UNIT_HIGHLIGHT" val="0"/>
-  <p:tag name="KSO_WM_UNIT_COMPATIBLE" val="0"/>
-  <p:tag name="KSO_WM_UNIT_DIAGRAM_ISNUMVISUAL" val="0"/>
-  <p:tag name="KSO_WM_UNIT_DIAGRAM_ISREFERUNIT" val="0"/>
-  <p:tag name="KSO_WM_UNIT_ID" val="_5**"/>
-  <p:tag name="KSO_WM_UNIT_LAYERLEVEL" val="1"/>
-  <p:tag name="KSO_WM_TAG_VERSION" val="1.0"/>
-  <p:tag name="KSO_WM_BEAUTIFY_FLAG" val="#wm#"/>
-</p:tagLst>
-</file>
-
-<file path=ppt/tags/tag3.xml><?xml version="1.0" encoding="utf-8"?>
-<p:tagLst xmlns:p="http://schemas.openxmlformats.org/presentationml/2006/main">
-  <p:tag name="KSO_WM_UNIT_HIGHLIGHT" val="0"/>
-  <p:tag name="KSO_WM_UNIT_COMPATIBLE" val="0"/>
-  <p:tag name="KSO_WM_UNIT_DIAGRAM_ISNUMVISUAL" val="0"/>
-  <p:tag name="KSO_WM_UNIT_DIAGRAM_ISREFERUNIT" val="0"/>
-  <p:tag name="KSO_WM_UNIT_ID" val="_1**"/>
-  <p:tag name="KSO_WM_UNIT_LAYERLEVEL" val="1"/>
-  <p:tag name="KSO_WM_TAG_VERSION" val="1.0"/>
-  <p:tag name="KSO_WM_BEAUTIFY_FLAG" val="#wm#"/>
-</p:tagLst>
-</file>
-
-<file path=ppt/tags/tag30.xml><?xml version="1.0" encoding="utf-8"?>
-<p:tagLst xmlns:p="http://schemas.openxmlformats.org/presentationml/2006/main">
-  <p:tag name="KSO_WM_UNIT_HIGHLIGHT" val="0"/>
-  <p:tag name="KSO_WM_UNIT_COMPATIBLE" val="0"/>
-  <p:tag name="KSO_WM_UNIT_DIAGRAM_ISNUMVISUAL" val="0"/>
-  <p:tag name="KSO_WM_UNIT_DIAGRAM_ISREFERUNIT" val="0"/>
-  <p:tag name="KSO_WM_UNIT_ID" val="_6**"/>
-  <p:tag name="KSO_WM_UNIT_LAYERLEVEL" val="1"/>
-  <p:tag name="KSO_WM_TAG_VERSION" val="1.0"/>
-  <p:tag name="KSO_WM_BEAUTIFY_FLAG" val="#wm#"/>
-</p:tagLst>
-</file>
-
-<file path=ppt/tags/tag31.xml><?xml version="1.0" encoding="utf-8"?>
-<p:tagLst xmlns:p="http://schemas.openxmlformats.org/presentationml/2006/main">
-  <p:tag name="KSO_WM_UNIT_HIGHLIGHT" val="0"/>
-  <p:tag name="KSO_WM_UNIT_COMPATIBLE" val="0"/>
-  <p:tag name="KSO_WM_UNIT_DIAGRAM_ISNUMVISUAL" val="0"/>
-  <p:tag name="KSO_WM_UNIT_DIAGRAM_ISREFERUNIT" val="0"/>
-  <p:tag name="KSO_WM_UNIT_ID" val="_6**"/>
-  <p:tag name="KSO_WM_UNIT_LAYERLEVEL" val="1"/>
-  <p:tag name="KSO_WM_TAG_VERSION" val="1.0"/>
-  <p:tag name="KSO_WM_BEAUTIFY_FLAG" val="#wm#"/>
-</p:tagLst>
-</file>
-
-<file path=ppt/tags/tag32.xml><?xml version="1.0" encoding="utf-8"?>
-<p:tagLst xmlns:p="http://schemas.openxmlformats.org/presentationml/2006/main">
-  <p:tag name="KSO_WM_UNIT_HIGHLIGHT" val="0"/>
-  <p:tag name="KSO_WM_UNIT_COMPATIBLE" val="0"/>
-  <p:tag name="KSO_WM_UNIT_DIAGRAM_ISNUMVISUAL" val="0"/>
-  <p:tag name="KSO_WM_UNIT_DIAGRAM_ISREFERUNIT" val="0"/>
-  <p:tag name="KSO_WM_UNIT_ID" val="_6**"/>
-  <p:tag name="KSO_WM_UNIT_LAYERLEVEL" val="1"/>
-  <p:tag name="KSO_WM_TAG_VERSION" val="1.0"/>
-  <p:tag name="KSO_WM_BEAUTIFY_FLAG" val="#wm#"/>
-</p:tagLst>
-</file>
-
-<file path=ppt/tags/tag33.xml><?xml version="1.0" encoding="utf-8"?>
-<p:tagLst xmlns:p="http://schemas.openxmlformats.org/presentationml/2006/main">
-  <p:tag name="KSO_WM_UNIT_HIGHLIGHT" val="0"/>
-  <p:tag name="KSO_WM_UNIT_COMPATIBLE" val="0"/>
-  <p:tag name="KSO_WM_UNIT_DIAGRAM_ISNUMVISUAL" val="0"/>
-  <p:tag name="KSO_WM_UNIT_DIAGRAM_ISREFERUNIT" val="0"/>
-  <p:tag name="KSO_WM_UNIT_ID" val="_6**"/>
-  <p:tag name="KSO_WM_UNIT_LAYERLEVEL" val="1"/>
-  <p:tag name="KSO_WM_TAG_VERSION" val="1.0"/>
-  <p:tag name="KSO_WM_BEAUTIFY_FLAG" val="#wm#"/>
-</p:tagLst>
-</file>
-
-<file path=ppt/tags/tag34.xml><?xml version="1.0" encoding="utf-8"?>
-<p:tagLst xmlns:p="http://schemas.openxmlformats.org/presentationml/2006/main">
-  <p:tag name="KSO_WM_UNIT_HIGHLIGHT" val="0"/>
-  <p:tag name="KSO_WM_UNIT_COMPATIBLE" val="0"/>
-  <p:tag name="KSO_WM_UNIT_DIAGRAM_ISNUMVISUAL" val="0"/>
-  <p:tag name="KSO_WM_UNIT_DIAGRAM_ISREFERUNIT" val="0"/>
-  <p:tag name="KSO_WM_UNIT_ID" val="_7**"/>
-  <p:tag name="KSO_WM_UNIT_LAYERLEVEL" val="1"/>
-  <p:tag name="KSO_WM_TAG_VERSION" val="1.0"/>
-  <p:tag name="KSO_WM_BEAUTIFY_FLAG" val="#wm#"/>
-</p:tagLst>
-</file>
-
-<file path=ppt/tags/tag35.xml><?xml version="1.0" encoding="utf-8"?>
-<p:tagLst xmlns:p="http://schemas.openxmlformats.org/presentationml/2006/main">
-  <p:tag name="KSO_WM_UNIT_HIGHLIGHT" val="0"/>
-  <p:tag name="KSO_WM_UNIT_COMPATIBLE" val="0"/>
-  <p:tag name="KSO_WM_UNIT_DIAGRAM_ISNUMVISUAL" val="0"/>
-  <p:tag name="KSO_WM_UNIT_DIAGRAM_ISREFERUNIT" val="0"/>
-  <p:tag name="KSO_WM_UNIT_ID" val="_7**"/>
-  <p:tag name="KSO_WM_UNIT_LAYERLEVEL" val="1"/>
-  <p:tag name="KSO_WM_TAG_VERSION" val="1.0"/>
-  <p:tag name="KSO_WM_BEAUTIFY_FLAG" val="#wm#"/>
-</p:tagLst>
-</file>
-
-<file path=ppt/tags/tag36.xml><?xml version="1.0" encoding="utf-8"?>
-<p:tagLst xmlns:p="http://schemas.openxmlformats.org/presentationml/2006/main">
-  <p:tag name="KSO_WM_UNIT_HIGHLIGHT" val="0"/>
-  <p:tag name="KSO_WM_UNIT_COMPATIBLE" val="0"/>
-  <p:tag name="KSO_WM_UNIT_DIAGRAM_ISNUMVISUAL" val="0"/>
-  <p:tag name="KSO_WM_UNIT_DIAGRAM_ISREFERUNIT" val="0"/>
-  <p:tag name="KSO_WM_UNIT_ID" val="_7**"/>
-  <p:tag name="KSO_WM_UNIT_LAYERLEVEL" val="1"/>
-  <p:tag name="KSO_WM_TAG_VERSION" val="1.0"/>
-  <p:tag name="KSO_WM_BEAUTIFY_FLAG" val="#wm#"/>
-</p:tagLst>
-</file>
-
-<file path=ppt/tags/tag37.xml><?xml version="1.0" encoding="utf-8"?>
-<p:tagLst xmlns:p="http://schemas.openxmlformats.org/presentationml/2006/main">
-  <p:tag name="KSO_WM_UNIT_HIGHLIGHT" val="0"/>
-  <p:tag name="KSO_WM_UNIT_COMPATIBLE" val="0"/>
-  <p:tag name="KSO_WM_UNIT_DIAGRAM_ISNUMVISUAL" val="0"/>
-  <p:tag name="KSO_WM_UNIT_DIAGRAM_ISREFERUNIT" val="0"/>
-  <p:tag name="KSO_WM_UNIT_ID" val="_8**"/>
-  <p:tag name="KSO_WM_UNIT_LAYERLEVEL" val="1"/>
-  <p:tag name="KSO_WM_TAG_VERSION" val="1.0"/>
-  <p:tag name="KSO_WM_BEAUTIFY_FLAG" val="#wm#"/>
-</p:tagLst>
-</file>
-
-<file path=ppt/tags/tag38.xml><?xml version="1.0" encoding="utf-8"?>
-<p:tagLst xmlns:p="http://schemas.openxmlformats.org/presentationml/2006/main">
-  <p:tag name="KSO_WM_UNIT_HIGHLIGHT" val="0"/>
-  <p:tag name="KSO_WM_UNIT_COMPATIBLE" val="0"/>
-  <p:tag name="KSO_WM_UNIT_DIAGRAM_ISNUMVISUAL" val="0"/>
-  <p:tag name="KSO_WM_UNIT_DIAGRAM_ISREFERUNIT" val="0"/>
-  <p:tag name="KSO_WM_UNIT_ID" val="_8**"/>
-  <p:tag name="KSO_WM_UNIT_LAYERLEVEL" val="1"/>
-  <p:tag name="KSO_WM_TAG_VERSION" val="1.0"/>
-  <p:tag name="KSO_WM_BEAUTIFY_FLAG" val="#wm#"/>
-</p:tagLst>
-</file>
-
-<file path=ppt/tags/tag39.xml><?xml version="1.0" encoding="utf-8"?>
-<p:tagLst xmlns:p="http://schemas.openxmlformats.org/presentationml/2006/main">
-  <p:tag name="KSO_WM_UNIT_HIGHLIGHT" val="0"/>
-  <p:tag name="KSO_WM_UNIT_COMPATIBLE" val="0"/>
-  <p:tag name="KSO_WM_UNIT_DIAGRAM_ISNUMVISUAL" val="0"/>
-  <p:tag name="KSO_WM_UNIT_DIAGRAM_ISREFERUNIT" val="0"/>
-  <p:tag name="KSO_WM_UNIT_ID" val="_8**"/>
-  <p:tag name="KSO_WM_UNIT_LAYERLEVEL" val="1"/>
-  <p:tag name="KSO_WM_TAG_VERSION" val="1.0"/>
-  <p:tag name="KSO_WM_BEAUTIFY_FLAG" val="#wm#"/>
-</p:tagLst>
-</file>
-
-<file path=ppt/tags/tag4.xml><?xml version="1.0" encoding="utf-8"?>
-<p:tagLst xmlns:p="http://schemas.openxmlformats.org/presentationml/2006/main">
-  <p:tag name="KSO_WM_UNIT_HIGHLIGHT" val="0"/>
-  <p:tag name="KSO_WM_UNIT_COMPATIBLE" val="0"/>
-  <p:tag name="KSO_WM_UNIT_DIAGRAM_ISNUMVISUAL" val="0"/>
-  <p:tag name="KSO_WM_UNIT_DIAGRAM_ISREFERUNIT" val="0"/>
-  <p:tag name="KSO_WM_UNIT_ID" val="_1**"/>
-  <p:tag name="KSO_WM_UNIT_LAYERLEVEL" val="1"/>
-  <p:tag name="KSO_WM_TAG_VERSION" val="1.0"/>
-  <p:tag name="KSO_WM_BEAUTIFY_FLAG" val="#wm#"/>
-</p:tagLst>
-</file>
-
-<file path=ppt/tags/tag40.xml><?xml version="1.0" encoding="utf-8"?>
-<p:tagLst xmlns:p="http://schemas.openxmlformats.org/presentationml/2006/main">
-  <p:tag name="KSO_WM_UNIT_HIGHLIGHT" val="0"/>
-  <p:tag name="KSO_WM_UNIT_COMPATIBLE" val="0"/>
-  <p:tag name="KSO_WM_UNIT_DIAGRAM_ISNUMVISUAL" val="0"/>
-  <p:tag name="KSO_WM_UNIT_DIAGRAM_ISREFERUNIT" val="0"/>
-  <p:tag name="KSO_WM_UNIT_ID" val="_8**"/>
-  <p:tag name="KSO_WM_UNIT_LAYERLEVEL" val="1"/>
-  <p:tag name="KSO_WM_TAG_VERSION" val="1.0"/>
-  <p:tag name="KSO_WM_BEAUTIFY_FLAG" val="#wm#"/>
-</p:tagLst>
-</file>
-
-<file path=ppt/tags/tag41.xml><?xml version="1.0" encoding="utf-8"?>
-<p:tagLst xmlns:p="http://schemas.openxmlformats.org/presentationml/2006/main">
-  <p:tag name="KSO_WM_UNIT_HIGHLIGHT" val="0"/>
-  <p:tag name="KSO_WM_UNIT_COMPATIBLE" val="0"/>
-  <p:tag name="KSO_WM_UNIT_DIAGRAM_ISNUMVISUAL" val="0"/>
-  <p:tag name="KSO_WM_UNIT_DIAGRAM_ISREFERUNIT" val="0"/>
-  <p:tag name="KSO_WM_UNIT_ID" val="_8**"/>
-  <p:tag name="KSO_WM_UNIT_LAYERLEVEL" val="1"/>
-  <p:tag name="KSO_WM_TAG_VERSION" val="1.0"/>
-  <p:tag name="KSO_WM_BEAUTIFY_FLAG" val="#wm#"/>
-</p:tagLst>
-</file>
-
-<file path=ppt/tags/tag42.xml><?xml version="1.0" encoding="utf-8"?>
-<p:tagLst xmlns:p="http://schemas.openxmlformats.org/presentationml/2006/main">
-  <p:tag name="KSO_WM_UNIT_HIGHLIGHT" val="0"/>
-  <p:tag name="KSO_WM_UNIT_COMPATIBLE" val="0"/>
-  <p:tag name="KSO_WM_UNIT_DIAGRAM_ISNUMVISUAL" val="0"/>
-  <p:tag name="KSO_WM_UNIT_DIAGRAM_ISREFERUNIT" val="0"/>
-  <p:tag name="KSO_WM_UNIT_ID" val="_8**"/>
-  <p:tag name="KSO_WM_UNIT_LAYERLEVEL" val="1"/>
-  <p:tag name="KSO_WM_TAG_VERSION" val="1.0"/>
-  <p:tag name="KSO_WM_BEAUTIFY_FLAG" val="#wm#"/>
-</p:tagLst>
-</file>
-
-<file path=ppt/tags/tag43.xml><?xml version="1.0" encoding="utf-8"?>
-<p:tagLst xmlns:p="http://schemas.openxmlformats.org/presentationml/2006/main">
-  <p:tag name="KSO_WM_UNIT_HIGHLIGHT" val="0"/>
-  <p:tag name="KSO_WM_UNIT_COMPATIBLE" val="0"/>
-  <p:tag name="KSO_WM_UNIT_DIAGRAM_ISNUMVISUAL" val="0"/>
-  <p:tag name="KSO_WM_UNIT_DIAGRAM_ISREFERUNIT" val="0"/>
-  <p:tag name="KSO_WM_UNIT_ID" val="_9**"/>
-  <p:tag name="KSO_WM_UNIT_LAYERLEVEL" val="1"/>
-  <p:tag name="KSO_WM_TAG_VERSION" val="1.0"/>
-  <p:tag name="KSO_WM_BEAUTIFY_FLAG" val="#wm#"/>
-</p:tagLst>
-</file>
-
-<file path=ppt/tags/tag44.xml><?xml version="1.0" encoding="utf-8"?>
-<p:tagLst xmlns:p="http://schemas.openxmlformats.org/presentationml/2006/main">
-  <p:tag name="KSO_WM_UNIT_HIGHLIGHT" val="0"/>
-  <p:tag name="KSO_WM_UNIT_COMPATIBLE" val="0"/>
-  <p:tag name="KSO_WM_UNIT_DIAGRAM_ISNUMVISUAL" val="0"/>
-  <p:tag name="KSO_WM_UNIT_DIAGRAM_ISREFERUNIT" val="0"/>
-  <p:tag name="KSO_WM_UNIT_ID" val="_9**"/>
-  <p:tag name="KSO_WM_UNIT_LAYERLEVEL" val="1"/>
-  <p:tag name="KSO_WM_TAG_VERSION" val="1.0"/>
-  <p:tag name="KSO_WM_BEAUTIFY_FLAG" val="#wm#"/>
-</p:tagLst>
-</file>
-
-<file path=ppt/tags/tag45.xml><?xml version="1.0" encoding="utf-8"?>
-<p:tagLst xmlns:p="http://schemas.openxmlformats.org/presentationml/2006/main">
-  <p:tag name="KSO_WM_UNIT_HIGHLIGHT" val="0"/>
-  <p:tag name="KSO_WM_UNIT_COMPATIBLE" val="0"/>
-  <p:tag name="KSO_WM_UNIT_DIAGRAM_ISNUMVISUAL" val="0"/>
-  <p:tag name="KSO_WM_UNIT_DIAGRAM_ISREFERUNIT" val="0"/>
-  <p:tag name="KSO_WM_UNIT_ID" val="_9**"/>
-  <p:tag name="KSO_WM_UNIT_LAYERLEVEL" val="1"/>
-  <p:tag name="KSO_WM_TAG_VERSION" val="1.0"/>
-  <p:tag name="KSO_WM_BEAUTIFY_FLAG" val="#wm#"/>
-</p:tagLst>
-</file>
-
-<file path=ppt/tags/tag46.xml><?xml version="1.0" encoding="utf-8"?>
-<p:tagLst xmlns:p="http://schemas.openxmlformats.org/presentationml/2006/main">
-  <p:tag name="KSO_WM_UNIT_HIGHLIGHT" val="0"/>
-  <p:tag name="KSO_WM_UNIT_COMPATIBLE" val="0"/>
-  <p:tag name="KSO_WM_UNIT_DIAGRAM_ISNUMVISUAL" val="0"/>
-  <p:tag name="KSO_WM_UNIT_DIAGRAM_ISREFERUNIT" val="0"/>
-  <p:tag name="KSO_WM_UNIT_ID" val="_9**"/>
-  <p:tag name="KSO_WM_UNIT_LAYERLEVEL" val="1"/>
-  <p:tag name="KSO_WM_TAG_VERSION" val="1.0"/>
-  <p:tag name="KSO_WM_BEAUTIFY_FLAG" val="#wm#"/>
-</p:tagLst>
-</file>
-
-<file path=ppt/tags/tag47.xml><?xml version="1.0" encoding="utf-8"?>
-<p:tagLst xmlns:p="http://schemas.openxmlformats.org/presentationml/2006/main">
-  <p:tag name="KSO_WM_UNIT_HIGHLIGHT" val="0"/>
-  <p:tag name="KSO_WM_UNIT_COMPATIBLE" val="0"/>
-  <p:tag name="KSO_WM_UNIT_DIAGRAM_ISNUMVISUAL" val="0"/>
-  <p:tag name="KSO_WM_UNIT_DIAGRAM_ISREFERUNIT" val="0"/>
-  <p:tag name="KSO_WM_UNIT_ID" val="_9**"/>
-  <p:tag name="KSO_WM_UNIT_LAYERLEVEL" val="1"/>
-  <p:tag name="KSO_WM_TAG_VERSION" val="1.0"/>
-  <p:tag name="KSO_WM_BEAUTIFY_FLAG" val="#wm#"/>
-</p:tagLst>
-</file>
-
-<file path=ppt/tags/tag48.xml><?xml version="1.0" encoding="utf-8"?>
-<p:tagLst xmlns:p="http://schemas.openxmlformats.org/presentationml/2006/main">
-  <p:tag name="KSO_WM_UNIT_HIGHLIGHT" val="0"/>
-  <p:tag name="KSO_WM_UNIT_COMPATIBLE" val="0"/>
-  <p:tag name="KSO_WM_UNIT_DIAGRAM_ISNUMVISUAL" val="0"/>
-  <p:tag name="KSO_WM_UNIT_DIAGRAM_ISREFERUNIT" val="0"/>
-  <p:tag name="KSO_WM_UNIT_ID" val="_10**"/>
-  <p:tag name="KSO_WM_UNIT_LAYERLEVEL" val="1"/>
-  <p:tag name="KSO_WM_TAG_VERSION" val="1.0"/>
-  <p:tag name="KSO_WM_BEAUTIFY_FLAG" val="#wm#"/>
-</p:tagLst>
-</file>
-
-<file path=ppt/tags/tag49.xml><?xml version="1.0" encoding="utf-8"?>
-<p:tagLst xmlns:p="http://schemas.openxmlformats.org/presentationml/2006/main">
-  <p:tag name="KSO_WM_UNIT_HIGHLIGHT" val="0"/>
-  <p:tag name="KSO_WM_UNIT_COMPATIBLE" val="0"/>
-  <p:tag name="KSO_WM_UNIT_DIAGRAM_ISNUMVISUAL" val="0"/>
-  <p:tag name="KSO_WM_UNIT_DIAGRAM_ISREFERUNIT" val="0"/>
-  <p:tag name="KSO_WM_UNIT_ID" val="_10**"/>
-  <p:tag name="KSO_WM_UNIT_LAYERLEVEL" val="1"/>
-  <p:tag name="KSO_WM_TAG_VERSION" val="1.0"/>
-  <p:tag name="KSO_WM_BEAUTIFY_FLAG" val="#wm#"/>
-</p:tagLst>
-</file>
-
-<file path=ppt/tags/tag5.xml><?xml version="1.0" encoding="utf-8"?>
-<p:tagLst xmlns:p="http://schemas.openxmlformats.org/presentationml/2006/main">
-  <p:tag name="KSO_WM_UNIT_HIGHLIGHT" val="0"/>
-  <p:tag name="KSO_WM_UNIT_COMPATIBLE" val="0"/>
-  <p:tag name="KSO_WM_UNIT_DIAGRAM_ISNUMVISUAL" val="0"/>
-  <p:tag name="KSO_WM_UNIT_DIAGRAM_ISREFERUNIT" val="0"/>
-  <p:tag name="KSO_WM_UNIT_ID" val="_1**"/>
-  <p:tag name="KSO_WM_UNIT_LAYERLEVEL" val="1"/>
-  <p:tag name="KSO_WM_TAG_VERSION" val="1.0"/>
-  <p:tag name="KSO_WM_BEAUTIFY_FLAG" val="#wm#"/>
-</p:tagLst>
-</file>
-
-<file path=ppt/tags/tag50.xml><?xml version="1.0" encoding="utf-8"?>
-<p:tagLst xmlns:p="http://schemas.openxmlformats.org/presentationml/2006/main">
-  <p:tag name="KSO_WM_UNIT_HIGHLIGHT" val="0"/>
-  <p:tag name="KSO_WM_UNIT_COMPATIBLE" val="0"/>
-  <p:tag name="KSO_WM_UNIT_DIAGRAM_ISNUMVISUAL" val="0"/>
-  <p:tag name="KSO_WM_UNIT_DIAGRAM_ISREFERUNIT" val="0"/>
-  <p:tag name="KSO_WM_UNIT_ID" val="_10**"/>
-  <p:tag name="KSO_WM_UNIT_LAYERLEVEL" val="1"/>
-  <p:tag name="KSO_WM_TAG_VERSION" val="1.0"/>
-  <p:tag name="KSO_WM_BEAUTIFY_FLAG" val="#wm#"/>
-</p:tagLst>
-</file>
-
-<file path=ppt/tags/tag51.xml><?xml version="1.0" encoding="utf-8"?>
-<p:tagLst xmlns:p="http://schemas.openxmlformats.org/presentationml/2006/main">
-  <p:tag name="KSO_WM_UNIT_HIGHLIGHT" val="0"/>
-  <p:tag name="KSO_WM_UNIT_COMPATIBLE" val="0"/>
-  <p:tag name="KSO_WM_UNIT_DIAGRAM_ISNUMVISUAL" val="0"/>
-  <p:tag name="KSO_WM_UNIT_DIAGRAM_ISREFERUNIT" val="0"/>
-  <p:tag name="KSO_WM_UNIT_ID" val="_10**"/>
-  <p:tag name="KSO_WM_UNIT_LAYERLEVEL" val="1"/>
-  <p:tag name="KSO_WM_TAG_VERSION" val="1.0"/>
-  <p:tag name="KSO_WM_BEAUTIFY_FLAG" val="#wm#"/>
-</p:tagLst>
-</file>
-
-<file path=ppt/tags/tag52.xml><?xml version="1.0" encoding="utf-8"?>
-<p:tagLst xmlns:p="http://schemas.openxmlformats.org/presentationml/2006/main">
-  <p:tag name="KSO_WM_UNIT_HIGHLIGHT" val="0"/>
-  <p:tag name="KSO_WM_UNIT_COMPATIBLE" val="0"/>
-  <p:tag name="KSO_WM_UNIT_DIAGRAM_ISNUMVISUAL" val="0"/>
-  <p:tag name="KSO_WM_UNIT_DIAGRAM_ISREFERUNIT" val="0"/>
-  <p:tag name="KSO_WM_UNIT_ID" val="_11**"/>
-  <p:tag name="KSO_WM_UNIT_LAYERLEVEL" val="1"/>
-  <p:tag name="KSO_WM_TAG_VERSION" val="1.0"/>
-  <p:tag name="KSO_WM_BEAUTIFY_FLAG" val="#wm#"/>
-</p:tagLst>
-</file>
-
-<file path=ppt/tags/tag53.xml><?xml version="1.0" encoding="utf-8"?>
-<p:tagLst xmlns:p="http://schemas.openxmlformats.org/presentationml/2006/main">
-  <p:tag name="KSO_WM_UNIT_HIGHLIGHT" val="0"/>
-  <p:tag name="KSO_WM_UNIT_COMPATIBLE" val="0"/>
-  <p:tag name="KSO_WM_UNIT_DIAGRAM_ISNUMVISUAL" val="0"/>
-  <p:tag name="KSO_WM_UNIT_DIAGRAM_ISREFERUNIT" val="0"/>
-  <p:tag name="KSO_WM_UNIT_ID" val="_11**"/>
-  <p:tag name="KSO_WM_UNIT_LAYERLEVEL" val="1"/>
-  <p:tag name="KSO_WM_TAG_VERSION" val="1.0"/>
-  <p:tag name="KSO_WM_BEAUTIFY_FLAG" val="#wm#"/>
-</p:tagLst>
-</file>
-
-<file path=ppt/tags/tag54.xml><?xml version="1.0" encoding="utf-8"?>
-<p:tagLst xmlns:p="http://schemas.openxmlformats.org/presentationml/2006/main">
-  <p:tag name="KSO_WM_UNIT_HIGHLIGHT" val="0"/>
-  <p:tag name="KSO_WM_UNIT_COMPATIBLE" val="0"/>
-  <p:tag name="KSO_WM_UNIT_DIAGRAM_ISNUMVISUAL" val="0"/>
-  <p:tag name="KSO_WM_UNIT_DIAGRAM_ISREFERUNIT" val="0"/>
-  <p:tag name="KSO_WM_UNIT_ID" val="_11**"/>
-  <p:tag name="KSO_WM_UNIT_LAYERLEVEL" val="1"/>
-  <p:tag name="KSO_WM_TAG_VERSION" val="1.0"/>
-  <p:tag name="KSO_WM_BEAUTIFY_FLAG" val="#wm#"/>
-</p:tagLst>
-</file>
-
-<file path=ppt/tags/tag55.xml><?xml version="1.0" encoding="utf-8"?>
-<p:tagLst xmlns:p="http://schemas.openxmlformats.org/presentationml/2006/main">
-  <p:tag name="KSO_WM_UNIT_HIGHLIGHT" val="0"/>
-  <p:tag name="KSO_WM_UNIT_COMPATIBLE" val="0"/>
-  <p:tag name="KSO_WM_UNIT_DIAGRAM_ISNUMVISUAL" val="0"/>
-  <p:tag name="KSO_WM_UNIT_DIAGRAM_ISREFERUNIT" val="0"/>
-  <p:tag name="KSO_WM_UNIT_ID" val="_11**"/>
-  <p:tag name="KSO_WM_UNIT_LAYERLEVEL" val="1"/>
-  <p:tag name="KSO_WM_TAG_VERSION" val="1.0"/>
-  <p:tag name="KSO_WM_BEAUTIFY_FLAG" val="#wm#"/>
-</p:tagLst>
-</file>
-
-<file path=ppt/tags/tag56.xml><?xml version="1.0" encoding="utf-8"?>
-<p:tagLst xmlns:p="http://schemas.openxmlformats.org/presentationml/2006/main">
-  <p:tag name="KSO_WM_UNIT_HIGHLIGHT" val="0"/>
-  <p:tag name="KSO_WM_UNIT_COMPATIBLE" val="0"/>
-  <p:tag name="KSO_WM_UNIT_DIAGRAM_ISNUMVISUAL" val="0"/>
-  <p:tag name="KSO_WM_UNIT_DIAGRAM_ISREFERUNIT" val="0"/>
-  <p:tag name="KSO_WM_UNIT_ID" val="_11**"/>
-  <p:tag name="KSO_WM_UNIT_LAYERLEVEL" val="1"/>
-  <p:tag name="KSO_WM_TAG_VERSION" val="1.0"/>
-  <p:tag name="KSO_WM_BEAUTIFY_FLAG" val="#wm#"/>
-</p:tagLst>
-</file>
-
-<file path=ppt/tags/tag57.xml><?xml version="1.0" encoding="utf-8"?>
-<p:tagLst xmlns:p="http://schemas.openxmlformats.org/presentationml/2006/main">
-  <p:tag name="KSO_WM_UNIT_HIGHLIGHT" val="0"/>
-  <p:tag name="KSO_WM_UNIT_COMPATIBLE" val="0"/>
-  <p:tag name="KSO_WM_UNIT_DIAGRAM_ISNUMVISUAL" val="0"/>
-  <p:tag name="KSO_WM_UNIT_DIAGRAM_ISREFERUNIT" val="0"/>
-  <p:tag name="KSO_WM_UNIT_ID" val="_0**"/>
-  <p:tag name="KSO_WM_UNIT_LAYERLEVEL" val="1"/>
-  <p:tag name="KSO_WM_TAG_VERSION" val="1.0"/>
-  <p:tag name="KSO_WM_BEAUTIFY_FLAG" val="#wm#"/>
-  <p:tag name="KSO_WM_TEMPLATE_CATEGORY" val="custom"/>
-  <p:tag name="KSO_WM_TEMPLATE_INDEX" val="20205081"/>
-</p:tagLst>
-</file>
-
-<file path=ppt/tags/tag58.xml><?xml version="1.0" encoding="utf-8"?>
-<p:tagLst xmlns:p="http://schemas.openxmlformats.org/presentationml/2006/main">
-  <p:tag name="KSO_WM_UNIT_HIGHLIGHT" val="0"/>
-  <p:tag name="KSO_WM_UNIT_COMPATIBLE" val="0"/>
-  <p:tag name="KSO_WM_UNIT_DIAGRAM_ISNUMVISUAL" val="0"/>
-  <p:tag name="KSO_WM_UNIT_DIAGRAM_ISREFERUNIT" val="0"/>
-  <p:tag name="KSO_WM_UNIT_ID" val="_0**"/>
-  <p:tag name="KSO_WM_UNIT_LAYERLEVEL" val="1"/>
-  <p:tag name="KSO_WM_TAG_VERSION" val="1.0"/>
-  <p:tag name="KSO_WM_BEAUTIFY_FLAG" val="#wm#"/>
-  <p:tag name="KSO_WM_TEMPLATE_CATEGORY" val="custom"/>
-  <p:tag name="KSO_WM_TEMPLATE_INDEX" val="20205081"/>
-</p:tagLst>
-</file>
-
-<file path=ppt/tags/tag59.xml><?xml version="1.0" encoding="utf-8"?>
-<p:tagLst xmlns:p="http://schemas.openxmlformats.org/presentationml/2006/main">
-  <p:tag name="KSO_WM_UNIT_HIGHLIGHT" val="0"/>
-  <p:tag name="KSO_WM_UNIT_COMPATIBLE" val="0"/>
-  <p:tag name="KSO_WM_UNIT_DIAGRAM_ISNUMVISUAL" val="0"/>
-  <p:tag name="KSO_WM_UNIT_DIAGRAM_ISREFERUNIT" val="0"/>
-  <p:tag name="KSO_WM_UNIT_ID" val="_0**"/>
-  <p:tag name="KSO_WM_UNIT_LAYERLEVEL" val="1"/>
-  <p:tag name="KSO_WM_TAG_VERSION" val="1.0"/>
-  <p:tag name="KSO_WM_BEAUTIFY_FLAG" val="#wm#"/>
-</p:tagLst>
-</file>
-
-<file path=ppt/tags/tag6.xml><?xml version="1.0" encoding="utf-8"?>
-<p:tagLst xmlns:p="http://schemas.openxmlformats.org/presentationml/2006/main">
-  <p:tag name="KSO_WM_UNIT_HIGHLIGHT" val="0"/>
-  <p:tag name="KSO_WM_UNIT_COMPATIBLE" val="0"/>
-  <p:tag name="KSO_WM_UNIT_DIAGRAM_ISNUMVISUAL" val="0"/>
-  <p:tag name="KSO_WM_UNIT_DIAGRAM_ISREFERUNIT" val="0"/>
-  <p:tag name="KSO_WM_UNIT_ID" val="_2**"/>
-  <p:tag name="KSO_WM_UNIT_LAYERLEVEL" val="1"/>
-  <p:tag name="KSO_WM_TAG_VERSION" val="1.0"/>
-  <p:tag name="KSO_WM_BEAUTIFY_FLAG" val="#wm#"/>
-</p:tagLst>
-</file>
-
-<file path=ppt/tags/tag60.xml><?xml version="1.0" encoding="utf-8"?>
-<p:tagLst xmlns:p="http://schemas.openxmlformats.org/presentationml/2006/main">
-  <p:tag name="KSO_WM_UNIT_HIGHLIGHT" val="0"/>
-  <p:tag name="KSO_WM_UNIT_COMPATIBLE" val="0"/>
-  <p:tag name="KSO_WM_UNIT_DIAGRAM_ISNUMVISUAL" val="0"/>
-  <p:tag name="KSO_WM_UNIT_DIAGRAM_ISREFERUNIT" val="0"/>
-  <p:tag name="KSO_WM_UNIT_ID" val="_0**"/>
-  <p:tag name="KSO_WM_UNIT_LAYERLEVEL" val="1"/>
-  <p:tag name="KSO_WM_TAG_VERSION" val="1.0"/>
-  <p:tag name="KSO_WM_BEAUTIFY_FLAG" val="#wm#"/>
-</p:tagLst>
-</file>
-
-<file path=ppt/tags/tag61.xml><?xml version="1.0" encoding="utf-8"?>
-<p:tagLst xmlns:p="http://schemas.openxmlformats.org/presentationml/2006/main">
-  <p:tag name="KSO_WM_UNIT_HIGHLIGHT" val="0"/>
-  <p:tag name="KSO_WM_UNIT_COMPATIBLE" val="0"/>
-  <p:tag name="KSO_WM_UNIT_DIAGRAM_ISNUMVISUAL" val="0"/>
-  <p:tag name="KSO_WM_UNIT_DIAGRAM_ISREFERUNIT" val="0"/>
-  <p:tag name="KSO_WM_UNIT_ID" val="_0**"/>
-  <p:tag name="KSO_WM_UNIT_LAYERLEVEL" val="1"/>
-  <p:tag name="KSO_WM_TAG_VERSION" val="1.0"/>
-  <p:tag name="KSO_WM_BEAUTIFY_FLAG" val="#wm#"/>
-</p:tagLst>
-</file>
-
-<file path=ppt/tags/tag62.xml><?xml version="1.0" encoding="utf-8"?>
-<p:tagLst xmlns:p="http://schemas.openxmlformats.org/presentationml/2006/main">
+<p:tagLst xmlns:a="http://schemas.openxmlformats.org/drawingml/2006/main" xmlns:r="http://schemas.openxmlformats.org/officeDocument/2006/relationships" xmlns:p="http://schemas.openxmlformats.org/presentationml/2006/main">
   <p:tag name="KSO_WM_TEMPLATE_THUMBS_INDEX" val="1、4、7、12、13、14、15、16、17、18、20、24、25、28、33、36、40、43、44"/>
   <p:tag name="KSO_WM_TEMPLATE_SUBCATEGORY" val="19"/>
   <p:tag name="KSO_WM_TAG_VERSION" val="1.0"/>
@@ -4363,8 +3539,8 @@
 </p:tagLst>
 </file>
 
-<file path=ppt/tags/tag63.xml><?xml version="1.0" encoding="utf-8"?>
-<p:tagLst xmlns:p="http://schemas.openxmlformats.org/presentationml/2006/main">
+<file path=ppt/tags/tag10.xml><?xml version="1.0" encoding="utf-8"?>
+<p:tagLst xmlns:a="http://schemas.openxmlformats.org/drawingml/2006/main" xmlns:r="http://schemas.openxmlformats.org/officeDocument/2006/relationships" xmlns:p="http://schemas.openxmlformats.org/presentationml/2006/main">
   <p:tag name="KSO_WM_UNIT_HIGHLIGHT" val="0"/>
   <p:tag name="KSO_WM_UNIT_COMPATIBLE" val="0"/>
   <p:tag name="KSO_WM_UNIT_DIAGRAM_ISNUMVISUAL" val="0"/>
@@ -4376,8 +3552,8 @@
 </p:tagLst>
 </file>
 
-<file path=ppt/tags/tag64.xml><?xml version="1.0" encoding="utf-8"?>
-<p:tagLst xmlns:p="http://schemas.openxmlformats.org/presentationml/2006/main">
+<file path=ppt/tags/tag11.xml><?xml version="1.0" encoding="utf-8"?>
+<p:tagLst xmlns:a="http://schemas.openxmlformats.org/drawingml/2006/main" xmlns:r="http://schemas.openxmlformats.org/officeDocument/2006/relationships" xmlns:p="http://schemas.openxmlformats.org/presentationml/2006/main">
   <p:tag name="KSO_WM_UNIT_HIGHLIGHT" val="0"/>
   <p:tag name="KSO_WM_UNIT_COMPATIBLE" val="0"/>
   <p:tag name="KSO_WM_UNIT_DIAGRAM_ISNUMVISUAL" val="0"/>
@@ -4389,8 +3565,8 @@
 </p:tagLst>
 </file>
 
-<file path=ppt/tags/tag65.xml><?xml version="1.0" encoding="utf-8"?>
-<p:tagLst xmlns:p="http://schemas.openxmlformats.org/presentationml/2006/main">
+<file path=ppt/tags/tag12.xml><?xml version="1.0" encoding="utf-8"?>
+<p:tagLst xmlns:a="http://schemas.openxmlformats.org/drawingml/2006/main" xmlns:r="http://schemas.openxmlformats.org/officeDocument/2006/relationships" xmlns:p="http://schemas.openxmlformats.org/presentationml/2006/main">
   <p:tag name="KSO_WM_UNIT_HIGHLIGHT" val="0"/>
   <p:tag name="KSO_WM_UNIT_COMPATIBLE" val="0"/>
   <p:tag name="KSO_WM_UNIT_DIAGRAM_ISNUMVISUAL" val="0"/>
@@ -4402,8 +3578,8 @@
 </p:tagLst>
 </file>
 
-<file path=ppt/tags/tag66.xml><?xml version="1.0" encoding="utf-8"?>
-<p:tagLst xmlns:p="http://schemas.openxmlformats.org/presentationml/2006/main">
+<file path=ppt/tags/tag13.xml><?xml version="1.0" encoding="utf-8"?>
+<p:tagLst xmlns:a="http://schemas.openxmlformats.org/drawingml/2006/main" xmlns:r="http://schemas.openxmlformats.org/officeDocument/2006/relationships" xmlns:p="http://schemas.openxmlformats.org/presentationml/2006/main">
   <p:tag name="KSO_WM_UNIT_HIGHLIGHT" val="0"/>
   <p:tag name="KSO_WM_UNIT_COMPATIBLE" val="0"/>
   <p:tag name="KSO_WM_UNIT_DIAGRAM_ISNUMVISUAL" val="0"/>
@@ -4415,8 +3591,8 @@
 </p:tagLst>
 </file>
 
-<file path=ppt/tags/tag67.xml><?xml version="1.0" encoding="utf-8"?>
-<p:tagLst xmlns:p="http://schemas.openxmlformats.org/presentationml/2006/main">
+<file path=ppt/tags/tag14.xml><?xml version="1.0" encoding="utf-8"?>
+<p:tagLst xmlns:a="http://schemas.openxmlformats.org/drawingml/2006/main" xmlns:r="http://schemas.openxmlformats.org/officeDocument/2006/relationships" xmlns:p="http://schemas.openxmlformats.org/presentationml/2006/main">
   <p:tag name="KSO_WM_UNIT_HIGHLIGHT" val="0"/>
   <p:tag name="KSO_WM_UNIT_COMPATIBLE" val="0"/>
   <p:tag name="KSO_WM_UNIT_DIAGRAM_ISNUMVISUAL" val="0"/>
@@ -4428,62 +3604,727 @@
 </p:tagLst>
 </file>
 
-<file path=ppt/tags/tag68.xml><?xml version="1.0" encoding="utf-8"?>
-<p:tagLst xmlns:p="http://schemas.openxmlformats.org/presentationml/2006/main">
+<file path=ppt/tags/tag15.xml><?xml version="1.0" encoding="utf-8"?>
+<p:tagLst xmlns:a="http://schemas.openxmlformats.org/drawingml/2006/main" xmlns:r="http://schemas.openxmlformats.org/officeDocument/2006/relationships" xmlns:p="http://schemas.openxmlformats.org/presentationml/2006/main">
+  <p:tag name="KSO_WM_UNIT_HIGHLIGHT" val="0"/>
+  <p:tag name="KSO_WM_UNIT_COMPATIBLE" val="0"/>
+  <p:tag name="KSO_WM_UNIT_DIAGRAM_ISNUMVISUAL" val="0"/>
+  <p:tag name="KSO_WM_UNIT_DIAGRAM_ISREFERUNIT" val="0"/>
+  <p:tag name="KSO_WM_UNIT_ID" val="_2**"/>
+  <p:tag name="KSO_WM_UNIT_LAYERLEVEL" val="1"/>
+  <p:tag name="KSO_WM_TAG_VERSION" val="1.0"/>
+  <p:tag name="KSO_WM_BEAUTIFY_FLAG" val="#wm#"/>
+</p:tagLst>
+</file>
+
+<file path=ppt/tags/tag16.xml><?xml version="1.0" encoding="utf-8"?>
+<p:tagLst xmlns:a="http://schemas.openxmlformats.org/drawingml/2006/main" xmlns:r="http://schemas.openxmlformats.org/officeDocument/2006/relationships" xmlns:p="http://schemas.openxmlformats.org/presentationml/2006/main">
+  <p:tag name="KSO_WM_UNIT_HIGHLIGHT" val="0"/>
+  <p:tag name="KSO_WM_UNIT_COMPATIBLE" val="0"/>
+  <p:tag name="KSO_WM_UNIT_DIAGRAM_ISNUMVISUAL" val="0"/>
+  <p:tag name="KSO_WM_UNIT_DIAGRAM_ISREFERUNIT" val="0"/>
+  <p:tag name="KSO_WM_UNIT_ID" val="_2**"/>
+  <p:tag name="KSO_WM_UNIT_LAYERLEVEL" val="1"/>
+  <p:tag name="KSO_WM_TAG_VERSION" val="1.0"/>
+  <p:tag name="KSO_WM_BEAUTIFY_FLAG" val="#wm#"/>
+</p:tagLst>
+</file>
+
+<file path=ppt/tags/tag17.xml><?xml version="1.0" encoding="utf-8"?>
+<p:tagLst xmlns:a="http://schemas.openxmlformats.org/drawingml/2006/main" xmlns:r="http://schemas.openxmlformats.org/officeDocument/2006/relationships" xmlns:p="http://schemas.openxmlformats.org/presentationml/2006/main">
+  <p:tag name="KSO_WM_UNIT_HIGHLIGHT" val="0"/>
+  <p:tag name="KSO_WM_UNIT_COMPATIBLE" val="0"/>
+  <p:tag name="KSO_WM_UNIT_DIAGRAM_ISNUMVISUAL" val="0"/>
+  <p:tag name="KSO_WM_UNIT_DIAGRAM_ISREFERUNIT" val="0"/>
+  <p:tag name="KSO_WM_UNIT_ID" val="_3**"/>
+  <p:tag name="KSO_WM_UNIT_LAYERLEVEL" val="1"/>
+  <p:tag name="KSO_WM_TAG_VERSION" val="1.0"/>
+  <p:tag name="KSO_WM_BEAUTIFY_FLAG" val="#wm#"/>
+</p:tagLst>
+</file>
+
+<file path=ppt/tags/tag18.xml><?xml version="1.0" encoding="utf-8"?>
+<p:tagLst xmlns:a="http://schemas.openxmlformats.org/drawingml/2006/main" xmlns:r="http://schemas.openxmlformats.org/officeDocument/2006/relationships" xmlns:p="http://schemas.openxmlformats.org/presentationml/2006/main">
+  <p:tag name="KSO_WM_UNIT_HIGHLIGHT" val="0"/>
+  <p:tag name="KSO_WM_UNIT_COMPATIBLE" val="0"/>
+  <p:tag name="KSO_WM_UNIT_DIAGRAM_ISNUMVISUAL" val="0"/>
+  <p:tag name="KSO_WM_UNIT_DIAGRAM_ISREFERUNIT" val="0"/>
+  <p:tag name="KSO_WM_UNIT_ID" val="_3**"/>
+  <p:tag name="KSO_WM_UNIT_LAYERLEVEL" val="1"/>
+  <p:tag name="KSO_WM_TAG_VERSION" val="1.0"/>
+  <p:tag name="KSO_WM_BEAUTIFY_FLAG" val="#wm#"/>
+</p:tagLst>
+</file>
+
+<file path=ppt/tags/tag19.xml><?xml version="1.0" encoding="utf-8"?>
+<p:tagLst xmlns:a="http://schemas.openxmlformats.org/drawingml/2006/main" xmlns:r="http://schemas.openxmlformats.org/officeDocument/2006/relationships" xmlns:p="http://schemas.openxmlformats.org/presentationml/2006/main">
+  <p:tag name="KSO_WM_UNIT_HIGHLIGHT" val="0"/>
+  <p:tag name="KSO_WM_UNIT_COMPATIBLE" val="0"/>
+  <p:tag name="KSO_WM_UNIT_DIAGRAM_ISNUMVISUAL" val="0"/>
+  <p:tag name="KSO_WM_UNIT_DIAGRAM_ISREFERUNIT" val="0"/>
+  <p:tag name="KSO_WM_UNIT_ID" val="_3**"/>
+  <p:tag name="KSO_WM_UNIT_LAYERLEVEL" val="1"/>
+  <p:tag name="KSO_WM_TAG_VERSION" val="1.0"/>
+  <p:tag name="KSO_WM_BEAUTIFY_FLAG" val="#wm#"/>
+</p:tagLst>
+</file>
+
+<file path=ppt/tags/tag2.xml><?xml version="1.0" encoding="utf-8"?>
+<p:tagLst xmlns:a="http://schemas.openxmlformats.org/drawingml/2006/main" xmlns:r="http://schemas.openxmlformats.org/officeDocument/2006/relationships" xmlns:p="http://schemas.openxmlformats.org/presentationml/2006/main">
+  <p:tag name="KSO_WM_UNIT_HIGHLIGHT" val="0"/>
+  <p:tag name="KSO_WM_UNIT_COMPATIBLE" val="0"/>
+  <p:tag name="KSO_WM_UNIT_DIAGRAM_ISNUMVISUAL" val="0"/>
+  <p:tag name="KSO_WM_UNIT_DIAGRAM_ISREFERUNIT" val="0"/>
+  <p:tag name="KSO_WM_UNIT_ID" val="_0**"/>
+  <p:tag name="KSO_WM_UNIT_LAYERLEVEL" val="1"/>
+  <p:tag name="KSO_WM_TAG_VERSION" val="1.0"/>
   <p:tag name="KSO_WM_BEAUTIFY_FLAG" val="#wm#"/>
   <p:tag name="KSO_WM_TEMPLATE_CATEGORY" val="custom"/>
   <p:tag name="KSO_WM_TEMPLATE_INDEX" val="20205081"/>
 </p:tagLst>
 </file>
 
-<file path=ppt/tags/tag69.xml><?xml version="1.0" encoding="utf-8"?>
-<p:tagLst xmlns:p="http://schemas.openxmlformats.org/presentationml/2006/main">
-  <p:tag name="KSO_WM_UNIT_HIGHLIGHT" val="0"/>
-  <p:tag name="KSO_WM_UNIT_COMPATIBLE" val="0"/>
-  <p:tag name="KSO_WM_UNIT_DIAGRAM_ISNUMVISUAL" val="0"/>
-  <p:tag name="KSO_WM_UNIT_DIAGRAM_ISREFERUNIT" val="0"/>
-  <p:tag name="KSO_WM_UNIT_ID" val="_2**"/>
-  <p:tag name="KSO_WM_UNIT_LAYERLEVEL" val="1"/>
-  <p:tag name="KSO_WM_TAG_VERSION" val="1.0"/>
-  <p:tag name="KSO_WM_BEAUTIFY_FLAG" val="#wm#"/>
-</p:tagLst>
-</file>
-
-<file path=ppt/tags/tag7.xml><?xml version="1.0" encoding="utf-8"?>
-<p:tagLst xmlns:p="http://schemas.openxmlformats.org/presentationml/2006/main">
-  <p:tag name="KSO_WM_UNIT_HIGHLIGHT" val="0"/>
-  <p:tag name="KSO_WM_UNIT_COMPATIBLE" val="0"/>
-  <p:tag name="KSO_WM_UNIT_DIAGRAM_ISNUMVISUAL" val="0"/>
-  <p:tag name="KSO_WM_UNIT_DIAGRAM_ISREFERUNIT" val="0"/>
-  <p:tag name="KSO_WM_UNIT_ID" val="_2**"/>
-  <p:tag name="KSO_WM_UNIT_LAYERLEVEL" val="1"/>
-  <p:tag name="KSO_WM_TAG_VERSION" val="1.0"/>
-  <p:tag name="KSO_WM_BEAUTIFY_FLAG" val="#wm#"/>
-</p:tagLst>
-</file>
-
-<file path=ppt/tags/tag70.xml><?xml version="1.0" encoding="utf-8"?>
-<p:tagLst xmlns:p="http://schemas.openxmlformats.org/presentationml/2006/main">
-  <p:tag name="KSO_WM_UNIT_HIGHLIGHT" val="0"/>
-  <p:tag name="KSO_WM_UNIT_COMPATIBLE" val="0"/>
-  <p:tag name="KSO_WM_UNIT_DIAGRAM_ISNUMVISUAL" val="0"/>
-  <p:tag name="KSO_WM_UNIT_DIAGRAM_ISREFERUNIT" val="0"/>
-  <p:tag name="KSO_WM_UNIT_ID" val="_2**"/>
-  <p:tag name="KSO_WM_UNIT_LAYERLEVEL" val="1"/>
-  <p:tag name="KSO_WM_TAG_VERSION" val="1.0"/>
-</p:tagLst>
-</file>
-
-<file path=ppt/tags/tag71.xml><?xml version="1.0" encoding="utf-8"?>
-<p:tagLst xmlns:p="http://schemas.openxmlformats.org/presentationml/2006/main">
+<file path=ppt/tags/tag20.xml><?xml version="1.0" encoding="utf-8"?>
+<p:tagLst xmlns:a="http://schemas.openxmlformats.org/drawingml/2006/main" xmlns:r="http://schemas.openxmlformats.org/officeDocument/2006/relationships" xmlns:p="http://schemas.openxmlformats.org/presentationml/2006/main">
+  <p:tag name="KSO_WM_UNIT_HIGHLIGHT" val="0"/>
+  <p:tag name="KSO_WM_UNIT_COMPATIBLE" val="0"/>
+  <p:tag name="KSO_WM_UNIT_DIAGRAM_ISNUMVISUAL" val="0"/>
+  <p:tag name="KSO_WM_UNIT_DIAGRAM_ISREFERUNIT" val="0"/>
+  <p:tag name="KSO_WM_UNIT_ID" val="_3**"/>
+  <p:tag name="KSO_WM_UNIT_LAYERLEVEL" val="1"/>
+  <p:tag name="KSO_WM_TAG_VERSION" val="1.0"/>
+  <p:tag name="KSO_WM_BEAUTIFY_FLAG" val="#wm#"/>
+</p:tagLst>
+</file>
+
+<file path=ppt/tags/tag21.xml><?xml version="1.0" encoding="utf-8"?>
+<p:tagLst xmlns:a="http://schemas.openxmlformats.org/drawingml/2006/main" xmlns:r="http://schemas.openxmlformats.org/officeDocument/2006/relationships" xmlns:p="http://schemas.openxmlformats.org/presentationml/2006/main">
+  <p:tag name="KSO_WM_UNIT_HIGHLIGHT" val="0"/>
+  <p:tag name="KSO_WM_UNIT_COMPATIBLE" val="0"/>
+  <p:tag name="KSO_WM_UNIT_DIAGRAM_ISNUMVISUAL" val="0"/>
+  <p:tag name="KSO_WM_UNIT_DIAGRAM_ISREFERUNIT" val="0"/>
+  <p:tag name="KSO_WM_UNIT_ID" val="_3**"/>
+  <p:tag name="KSO_WM_UNIT_LAYERLEVEL" val="1"/>
+  <p:tag name="KSO_WM_TAG_VERSION" val="1.0"/>
+  <p:tag name="KSO_WM_BEAUTIFY_FLAG" val="#wm#"/>
+</p:tagLst>
+</file>
+
+<file path=ppt/tags/tag22.xml><?xml version="1.0" encoding="utf-8"?>
+<p:tagLst xmlns:a="http://schemas.openxmlformats.org/drawingml/2006/main" xmlns:r="http://schemas.openxmlformats.org/officeDocument/2006/relationships" xmlns:p="http://schemas.openxmlformats.org/presentationml/2006/main">
+  <p:tag name="KSO_WM_UNIT_HIGHLIGHT" val="0"/>
+  <p:tag name="KSO_WM_UNIT_COMPATIBLE" val="0"/>
+  <p:tag name="KSO_WM_UNIT_DIAGRAM_ISNUMVISUAL" val="0"/>
+  <p:tag name="KSO_WM_UNIT_DIAGRAM_ISREFERUNIT" val="0"/>
+  <p:tag name="KSO_WM_UNIT_ID" val="_4**"/>
+  <p:tag name="KSO_WM_UNIT_LAYERLEVEL" val="1"/>
+  <p:tag name="KSO_WM_TAG_VERSION" val="1.0"/>
+  <p:tag name="KSO_WM_BEAUTIFY_FLAG" val="#wm#"/>
+</p:tagLst>
+</file>
+
+<file path=ppt/tags/tag23.xml><?xml version="1.0" encoding="utf-8"?>
+<p:tagLst xmlns:a="http://schemas.openxmlformats.org/drawingml/2006/main" xmlns:r="http://schemas.openxmlformats.org/officeDocument/2006/relationships" xmlns:p="http://schemas.openxmlformats.org/presentationml/2006/main">
+  <p:tag name="KSO_WM_UNIT_HIGHLIGHT" val="0"/>
+  <p:tag name="KSO_WM_UNIT_COMPATIBLE" val="0"/>
+  <p:tag name="KSO_WM_UNIT_DIAGRAM_ISNUMVISUAL" val="0"/>
+  <p:tag name="KSO_WM_UNIT_DIAGRAM_ISREFERUNIT" val="0"/>
+  <p:tag name="KSO_WM_UNIT_ID" val="_4**"/>
+  <p:tag name="KSO_WM_UNIT_LAYERLEVEL" val="1"/>
+  <p:tag name="KSO_WM_TAG_VERSION" val="1.0"/>
+  <p:tag name="KSO_WM_BEAUTIFY_FLAG" val="#wm#"/>
+</p:tagLst>
+</file>
+
+<file path=ppt/tags/tag24.xml><?xml version="1.0" encoding="utf-8"?>
+<p:tagLst xmlns:a="http://schemas.openxmlformats.org/drawingml/2006/main" xmlns:r="http://schemas.openxmlformats.org/officeDocument/2006/relationships" xmlns:p="http://schemas.openxmlformats.org/presentationml/2006/main">
+  <p:tag name="KSO_WM_UNIT_HIGHLIGHT" val="0"/>
+  <p:tag name="KSO_WM_UNIT_COMPATIBLE" val="0"/>
+  <p:tag name="KSO_WM_UNIT_DIAGRAM_ISNUMVISUAL" val="0"/>
+  <p:tag name="KSO_WM_UNIT_DIAGRAM_ISREFERUNIT" val="0"/>
+  <p:tag name="KSO_WM_UNIT_ID" val="_4**"/>
+  <p:tag name="KSO_WM_UNIT_LAYERLEVEL" val="1"/>
+  <p:tag name="KSO_WM_TAG_VERSION" val="1.0"/>
+  <p:tag name="KSO_WM_BEAUTIFY_FLAG" val="#wm#"/>
+</p:tagLst>
+</file>
+
+<file path=ppt/tags/tag25.xml><?xml version="1.0" encoding="utf-8"?>
+<p:tagLst xmlns:a="http://schemas.openxmlformats.org/drawingml/2006/main" xmlns:r="http://schemas.openxmlformats.org/officeDocument/2006/relationships" xmlns:p="http://schemas.openxmlformats.org/presentationml/2006/main">
+  <p:tag name="KSO_WM_UNIT_HIGHLIGHT" val="0"/>
+  <p:tag name="KSO_WM_UNIT_COMPATIBLE" val="0"/>
+  <p:tag name="KSO_WM_UNIT_DIAGRAM_ISNUMVISUAL" val="0"/>
+  <p:tag name="KSO_WM_UNIT_DIAGRAM_ISREFERUNIT" val="0"/>
+  <p:tag name="KSO_WM_UNIT_ID" val="_4**"/>
+  <p:tag name="KSO_WM_UNIT_LAYERLEVEL" val="1"/>
+  <p:tag name="KSO_WM_TAG_VERSION" val="1.0"/>
+  <p:tag name="KSO_WM_BEAUTIFY_FLAG" val="#wm#"/>
+</p:tagLst>
+</file>
+
+<file path=ppt/tags/tag26.xml><?xml version="1.0" encoding="utf-8"?>
+<p:tagLst xmlns:a="http://schemas.openxmlformats.org/drawingml/2006/main" xmlns:r="http://schemas.openxmlformats.org/officeDocument/2006/relationships" xmlns:p="http://schemas.openxmlformats.org/presentationml/2006/main">
+  <p:tag name="KSO_WM_UNIT_HIGHLIGHT" val="0"/>
+  <p:tag name="KSO_WM_UNIT_COMPATIBLE" val="0"/>
+  <p:tag name="KSO_WM_UNIT_DIAGRAM_ISNUMVISUAL" val="0"/>
+  <p:tag name="KSO_WM_UNIT_DIAGRAM_ISREFERUNIT" val="0"/>
+  <p:tag name="KSO_WM_UNIT_ID" val="_4**"/>
+  <p:tag name="KSO_WM_UNIT_LAYERLEVEL" val="1"/>
+  <p:tag name="KSO_WM_TAG_VERSION" val="1.0"/>
+  <p:tag name="KSO_WM_BEAUTIFY_FLAG" val="#wm#"/>
+</p:tagLst>
+</file>
+
+<file path=ppt/tags/tag27.xml><?xml version="1.0" encoding="utf-8"?>
+<p:tagLst xmlns:a="http://schemas.openxmlformats.org/drawingml/2006/main" xmlns:r="http://schemas.openxmlformats.org/officeDocument/2006/relationships" xmlns:p="http://schemas.openxmlformats.org/presentationml/2006/main">
+  <p:tag name="KSO_WM_UNIT_HIGHLIGHT" val="0"/>
+  <p:tag name="KSO_WM_UNIT_COMPATIBLE" val="0"/>
+  <p:tag name="KSO_WM_UNIT_DIAGRAM_ISNUMVISUAL" val="0"/>
+  <p:tag name="KSO_WM_UNIT_DIAGRAM_ISREFERUNIT" val="0"/>
+  <p:tag name="KSO_WM_UNIT_ID" val="_4**"/>
+  <p:tag name="KSO_WM_UNIT_LAYERLEVEL" val="1"/>
+  <p:tag name="KSO_WM_TAG_VERSION" val="1.0"/>
+  <p:tag name="KSO_WM_BEAUTIFY_FLAG" val="#wm#"/>
+</p:tagLst>
+</file>
+
+<file path=ppt/tags/tag28.xml><?xml version="1.0" encoding="utf-8"?>
+<p:tagLst xmlns:a="http://schemas.openxmlformats.org/drawingml/2006/main" xmlns:r="http://schemas.openxmlformats.org/officeDocument/2006/relationships" xmlns:p="http://schemas.openxmlformats.org/presentationml/2006/main">
+  <p:tag name="KSO_WM_UNIT_HIGHLIGHT" val="0"/>
+  <p:tag name="KSO_WM_UNIT_COMPATIBLE" val="0"/>
+  <p:tag name="KSO_WM_UNIT_DIAGRAM_ISNUMVISUAL" val="0"/>
+  <p:tag name="KSO_WM_UNIT_DIAGRAM_ISREFERUNIT" val="0"/>
+  <p:tag name="KSO_WM_UNIT_ID" val="_5**"/>
+  <p:tag name="KSO_WM_UNIT_LAYERLEVEL" val="1"/>
+  <p:tag name="KSO_WM_TAG_VERSION" val="1.0"/>
+  <p:tag name="KSO_WM_BEAUTIFY_FLAG" val="#wm#"/>
+</p:tagLst>
+</file>
+
+<file path=ppt/tags/tag29.xml><?xml version="1.0" encoding="utf-8"?>
+<p:tagLst xmlns:a="http://schemas.openxmlformats.org/drawingml/2006/main" xmlns:r="http://schemas.openxmlformats.org/officeDocument/2006/relationships" xmlns:p="http://schemas.openxmlformats.org/presentationml/2006/main">
+  <p:tag name="KSO_WM_UNIT_HIGHLIGHT" val="0"/>
+  <p:tag name="KSO_WM_UNIT_COMPATIBLE" val="0"/>
+  <p:tag name="KSO_WM_UNIT_DIAGRAM_ISNUMVISUAL" val="0"/>
+  <p:tag name="KSO_WM_UNIT_DIAGRAM_ISREFERUNIT" val="0"/>
+  <p:tag name="KSO_WM_UNIT_ID" val="_5**"/>
+  <p:tag name="KSO_WM_UNIT_LAYERLEVEL" val="1"/>
+  <p:tag name="KSO_WM_TAG_VERSION" val="1.0"/>
+  <p:tag name="KSO_WM_BEAUTIFY_FLAG" val="#wm#"/>
+</p:tagLst>
+</file>
+
+<file path=ppt/tags/tag3.xml><?xml version="1.0" encoding="utf-8"?>
+<p:tagLst xmlns:a="http://schemas.openxmlformats.org/drawingml/2006/main" xmlns:r="http://schemas.openxmlformats.org/officeDocument/2006/relationships" xmlns:p="http://schemas.openxmlformats.org/presentationml/2006/main">
+  <p:tag name="KSO_WM_UNIT_HIGHLIGHT" val="0"/>
+  <p:tag name="KSO_WM_UNIT_COMPATIBLE" val="0"/>
+  <p:tag name="KSO_WM_UNIT_DIAGRAM_ISNUMVISUAL" val="0"/>
+  <p:tag name="KSO_WM_UNIT_DIAGRAM_ISREFERUNIT" val="0"/>
+  <p:tag name="KSO_WM_UNIT_ID" val="_0**"/>
+  <p:tag name="KSO_WM_UNIT_LAYERLEVEL" val="1"/>
+  <p:tag name="KSO_WM_TAG_VERSION" val="1.0"/>
   <p:tag name="KSO_WM_BEAUTIFY_FLAG" val="#wm#"/>
   <p:tag name="KSO_WM_TEMPLATE_CATEGORY" val="custom"/>
   <p:tag name="KSO_WM_TEMPLATE_INDEX" val="20205081"/>
 </p:tagLst>
 </file>
 
-<file path=ppt/tags/tag72.xml><?xml version="1.0" encoding="utf-8"?>
-<p:tagLst xmlns:p="http://schemas.openxmlformats.org/presentationml/2006/main">
+<file path=ppt/tags/tag30.xml><?xml version="1.0" encoding="utf-8"?>
+<p:tagLst xmlns:a="http://schemas.openxmlformats.org/drawingml/2006/main" xmlns:r="http://schemas.openxmlformats.org/officeDocument/2006/relationships" xmlns:p="http://schemas.openxmlformats.org/presentationml/2006/main">
+  <p:tag name="KSO_WM_UNIT_HIGHLIGHT" val="0"/>
+  <p:tag name="KSO_WM_UNIT_COMPATIBLE" val="0"/>
+  <p:tag name="KSO_WM_UNIT_DIAGRAM_ISNUMVISUAL" val="0"/>
+  <p:tag name="KSO_WM_UNIT_DIAGRAM_ISREFERUNIT" val="0"/>
+  <p:tag name="KSO_WM_UNIT_ID" val="_5**"/>
+  <p:tag name="KSO_WM_UNIT_LAYERLEVEL" val="1"/>
+  <p:tag name="KSO_WM_TAG_VERSION" val="1.0"/>
+  <p:tag name="KSO_WM_BEAUTIFY_FLAG" val="#wm#"/>
+</p:tagLst>
+</file>
+
+<file path=ppt/tags/tag31.xml><?xml version="1.0" encoding="utf-8"?>
+<p:tagLst xmlns:a="http://schemas.openxmlformats.org/drawingml/2006/main" xmlns:r="http://schemas.openxmlformats.org/officeDocument/2006/relationships" xmlns:p="http://schemas.openxmlformats.org/presentationml/2006/main">
+  <p:tag name="KSO_WM_UNIT_HIGHLIGHT" val="0"/>
+  <p:tag name="KSO_WM_UNIT_COMPATIBLE" val="0"/>
+  <p:tag name="KSO_WM_UNIT_DIAGRAM_ISNUMVISUAL" val="0"/>
+  <p:tag name="KSO_WM_UNIT_DIAGRAM_ISREFERUNIT" val="0"/>
+  <p:tag name="KSO_WM_UNIT_ID" val="_5**"/>
+  <p:tag name="KSO_WM_UNIT_LAYERLEVEL" val="1"/>
+  <p:tag name="KSO_WM_TAG_VERSION" val="1.0"/>
+  <p:tag name="KSO_WM_BEAUTIFY_FLAG" val="#wm#"/>
+</p:tagLst>
+</file>
+
+<file path=ppt/tags/tag32.xml><?xml version="1.0" encoding="utf-8"?>
+<p:tagLst xmlns:a="http://schemas.openxmlformats.org/drawingml/2006/main" xmlns:r="http://schemas.openxmlformats.org/officeDocument/2006/relationships" xmlns:p="http://schemas.openxmlformats.org/presentationml/2006/main">
+  <p:tag name="KSO_WM_UNIT_HIGHLIGHT" val="0"/>
+  <p:tag name="KSO_WM_UNIT_COMPATIBLE" val="0"/>
+  <p:tag name="KSO_WM_UNIT_DIAGRAM_ISNUMVISUAL" val="0"/>
+  <p:tag name="KSO_WM_UNIT_DIAGRAM_ISREFERUNIT" val="0"/>
+  <p:tag name="KSO_WM_UNIT_ID" val="_5**"/>
+  <p:tag name="KSO_WM_UNIT_LAYERLEVEL" val="1"/>
+  <p:tag name="KSO_WM_TAG_VERSION" val="1.0"/>
+  <p:tag name="KSO_WM_BEAUTIFY_FLAG" val="#wm#"/>
+</p:tagLst>
+</file>
+
+<file path=ppt/tags/tag33.xml><?xml version="1.0" encoding="utf-8"?>
+<p:tagLst xmlns:a="http://schemas.openxmlformats.org/drawingml/2006/main" xmlns:r="http://schemas.openxmlformats.org/officeDocument/2006/relationships" xmlns:p="http://schemas.openxmlformats.org/presentationml/2006/main">
+  <p:tag name="KSO_WM_UNIT_HIGHLIGHT" val="0"/>
+  <p:tag name="KSO_WM_UNIT_COMPATIBLE" val="0"/>
+  <p:tag name="KSO_WM_UNIT_DIAGRAM_ISNUMVISUAL" val="0"/>
+  <p:tag name="KSO_WM_UNIT_DIAGRAM_ISREFERUNIT" val="0"/>
+  <p:tag name="KSO_WM_UNIT_ID" val="_5**"/>
+  <p:tag name="KSO_WM_UNIT_LAYERLEVEL" val="1"/>
+  <p:tag name="KSO_WM_TAG_VERSION" val="1.0"/>
+  <p:tag name="KSO_WM_BEAUTIFY_FLAG" val="#wm#"/>
+</p:tagLst>
+</file>
+
+<file path=ppt/tags/tag34.xml><?xml version="1.0" encoding="utf-8"?>
+<p:tagLst xmlns:a="http://schemas.openxmlformats.org/drawingml/2006/main" xmlns:r="http://schemas.openxmlformats.org/officeDocument/2006/relationships" xmlns:p="http://schemas.openxmlformats.org/presentationml/2006/main">
+  <p:tag name="KSO_WM_UNIT_HIGHLIGHT" val="0"/>
+  <p:tag name="KSO_WM_UNIT_COMPATIBLE" val="0"/>
+  <p:tag name="KSO_WM_UNIT_DIAGRAM_ISNUMVISUAL" val="0"/>
+  <p:tag name="KSO_WM_UNIT_DIAGRAM_ISREFERUNIT" val="0"/>
+  <p:tag name="KSO_WM_UNIT_ID" val="_5**"/>
+  <p:tag name="KSO_WM_UNIT_LAYERLEVEL" val="1"/>
+  <p:tag name="KSO_WM_TAG_VERSION" val="1.0"/>
+  <p:tag name="KSO_WM_BEAUTIFY_FLAG" val="#wm#"/>
+</p:tagLst>
+</file>
+
+<file path=ppt/tags/tag35.xml><?xml version="1.0" encoding="utf-8"?>
+<p:tagLst xmlns:a="http://schemas.openxmlformats.org/drawingml/2006/main" xmlns:r="http://schemas.openxmlformats.org/officeDocument/2006/relationships" xmlns:p="http://schemas.openxmlformats.org/presentationml/2006/main">
+  <p:tag name="KSO_WM_UNIT_HIGHLIGHT" val="0"/>
+  <p:tag name="KSO_WM_UNIT_COMPATIBLE" val="0"/>
+  <p:tag name="KSO_WM_UNIT_DIAGRAM_ISNUMVISUAL" val="0"/>
+  <p:tag name="KSO_WM_UNIT_DIAGRAM_ISREFERUNIT" val="0"/>
+  <p:tag name="KSO_WM_UNIT_ID" val="_5**"/>
+  <p:tag name="KSO_WM_UNIT_LAYERLEVEL" val="1"/>
+  <p:tag name="KSO_WM_TAG_VERSION" val="1.0"/>
+  <p:tag name="KSO_WM_BEAUTIFY_FLAG" val="#wm#"/>
+</p:tagLst>
+</file>
+
+<file path=ppt/tags/tag36.xml><?xml version="1.0" encoding="utf-8"?>
+<p:tagLst xmlns:a="http://schemas.openxmlformats.org/drawingml/2006/main" xmlns:r="http://schemas.openxmlformats.org/officeDocument/2006/relationships" xmlns:p="http://schemas.openxmlformats.org/presentationml/2006/main">
+  <p:tag name="KSO_WM_UNIT_HIGHLIGHT" val="0"/>
+  <p:tag name="KSO_WM_UNIT_COMPATIBLE" val="0"/>
+  <p:tag name="KSO_WM_UNIT_DIAGRAM_ISNUMVISUAL" val="0"/>
+  <p:tag name="KSO_WM_UNIT_DIAGRAM_ISREFERUNIT" val="0"/>
+  <p:tag name="KSO_WM_UNIT_ID" val="_6**"/>
+  <p:tag name="KSO_WM_UNIT_LAYERLEVEL" val="1"/>
+  <p:tag name="KSO_WM_TAG_VERSION" val="1.0"/>
+  <p:tag name="KSO_WM_BEAUTIFY_FLAG" val="#wm#"/>
+</p:tagLst>
+</file>
+
+<file path=ppt/tags/tag37.xml><?xml version="1.0" encoding="utf-8"?>
+<p:tagLst xmlns:a="http://schemas.openxmlformats.org/drawingml/2006/main" xmlns:r="http://schemas.openxmlformats.org/officeDocument/2006/relationships" xmlns:p="http://schemas.openxmlformats.org/presentationml/2006/main">
+  <p:tag name="KSO_WM_UNIT_HIGHLIGHT" val="0"/>
+  <p:tag name="KSO_WM_UNIT_COMPATIBLE" val="0"/>
+  <p:tag name="KSO_WM_UNIT_DIAGRAM_ISNUMVISUAL" val="0"/>
+  <p:tag name="KSO_WM_UNIT_DIAGRAM_ISREFERUNIT" val="0"/>
+  <p:tag name="KSO_WM_UNIT_ID" val="_6**"/>
+  <p:tag name="KSO_WM_UNIT_LAYERLEVEL" val="1"/>
+  <p:tag name="KSO_WM_TAG_VERSION" val="1.0"/>
+  <p:tag name="KSO_WM_BEAUTIFY_FLAG" val="#wm#"/>
+</p:tagLst>
+</file>
+
+<file path=ppt/tags/tag38.xml><?xml version="1.0" encoding="utf-8"?>
+<p:tagLst xmlns:a="http://schemas.openxmlformats.org/drawingml/2006/main" xmlns:r="http://schemas.openxmlformats.org/officeDocument/2006/relationships" xmlns:p="http://schemas.openxmlformats.org/presentationml/2006/main">
+  <p:tag name="KSO_WM_UNIT_HIGHLIGHT" val="0"/>
+  <p:tag name="KSO_WM_UNIT_COMPATIBLE" val="0"/>
+  <p:tag name="KSO_WM_UNIT_DIAGRAM_ISNUMVISUAL" val="0"/>
+  <p:tag name="KSO_WM_UNIT_DIAGRAM_ISREFERUNIT" val="0"/>
+  <p:tag name="KSO_WM_UNIT_ID" val="_6**"/>
+  <p:tag name="KSO_WM_UNIT_LAYERLEVEL" val="1"/>
+  <p:tag name="KSO_WM_TAG_VERSION" val="1.0"/>
+  <p:tag name="KSO_WM_BEAUTIFY_FLAG" val="#wm#"/>
+</p:tagLst>
+</file>
+
+<file path=ppt/tags/tag39.xml><?xml version="1.0" encoding="utf-8"?>
+<p:tagLst xmlns:a="http://schemas.openxmlformats.org/drawingml/2006/main" xmlns:r="http://schemas.openxmlformats.org/officeDocument/2006/relationships" xmlns:p="http://schemas.openxmlformats.org/presentationml/2006/main">
+  <p:tag name="KSO_WM_UNIT_HIGHLIGHT" val="0"/>
+  <p:tag name="KSO_WM_UNIT_COMPATIBLE" val="0"/>
+  <p:tag name="KSO_WM_UNIT_DIAGRAM_ISNUMVISUAL" val="0"/>
+  <p:tag name="KSO_WM_UNIT_DIAGRAM_ISREFERUNIT" val="0"/>
+  <p:tag name="KSO_WM_UNIT_ID" val="_6**"/>
+  <p:tag name="KSO_WM_UNIT_LAYERLEVEL" val="1"/>
+  <p:tag name="KSO_WM_TAG_VERSION" val="1.0"/>
+  <p:tag name="KSO_WM_BEAUTIFY_FLAG" val="#wm#"/>
+</p:tagLst>
+</file>
+
+<file path=ppt/tags/tag4.xml><?xml version="1.0" encoding="utf-8"?>
+<p:tagLst xmlns:a="http://schemas.openxmlformats.org/drawingml/2006/main" xmlns:r="http://schemas.openxmlformats.org/officeDocument/2006/relationships" xmlns:p="http://schemas.openxmlformats.org/presentationml/2006/main">
+  <p:tag name="KSO_WM_UNIT_HIGHLIGHT" val="0"/>
+  <p:tag name="KSO_WM_UNIT_COMPATIBLE" val="0"/>
+  <p:tag name="KSO_WM_UNIT_DIAGRAM_ISNUMVISUAL" val="0"/>
+  <p:tag name="KSO_WM_UNIT_DIAGRAM_ISREFERUNIT" val="0"/>
+  <p:tag name="KSO_WM_UNIT_ID" val="_0**"/>
+  <p:tag name="KSO_WM_UNIT_LAYERLEVEL" val="1"/>
+  <p:tag name="KSO_WM_TAG_VERSION" val="1.0"/>
+  <p:tag name="KSO_WM_BEAUTIFY_FLAG" val="#wm#"/>
+</p:tagLst>
+</file>
+
+<file path=ppt/tags/tag40.xml><?xml version="1.0" encoding="utf-8"?>
+<p:tagLst xmlns:a="http://schemas.openxmlformats.org/drawingml/2006/main" xmlns:r="http://schemas.openxmlformats.org/officeDocument/2006/relationships" xmlns:p="http://schemas.openxmlformats.org/presentationml/2006/main">
+  <p:tag name="KSO_WM_UNIT_HIGHLIGHT" val="0"/>
+  <p:tag name="KSO_WM_UNIT_COMPATIBLE" val="0"/>
+  <p:tag name="KSO_WM_UNIT_DIAGRAM_ISNUMVISUAL" val="0"/>
+  <p:tag name="KSO_WM_UNIT_DIAGRAM_ISREFERUNIT" val="0"/>
+  <p:tag name="KSO_WM_UNIT_ID" val="_7**"/>
+  <p:tag name="KSO_WM_UNIT_LAYERLEVEL" val="1"/>
+  <p:tag name="KSO_WM_TAG_VERSION" val="1.0"/>
+  <p:tag name="KSO_WM_BEAUTIFY_FLAG" val="#wm#"/>
+</p:tagLst>
+</file>
+
+<file path=ppt/tags/tag41.xml><?xml version="1.0" encoding="utf-8"?>
+<p:tagLst xmlns:a="http://schemas.openxmlformats.org/drawingml/2006/main" xmlns:r="http://schemas.openxmlformats.org/officeDocument/2006/relationships" xmlns:p="http://schemas.openxmlformats.org/presentationml/2006/main">
+  <p:tag name="KSO_WM_UNIT_HIGHLIGHT" val="0"/>
+  <p:tag name="KSO_WM_UNIT_COMPATIBLE" val="0"/>
+  <p:tag name="KSO_WM_UNIT_DIAGRAM_ISNUMVISUAL" val="0"/>
+  <p:tag name="KSO_WM_UNIT_DIAGRAM_ISREFERUNIT" val="0"/>
+  <p:tag name="KSO_WM_UNIT_ID" val="_7**"/>
+  <p:tag name="KSO_WM_UNIT_LAYERLEVEL" val="1"/>
+  <p:tag name="KSO_WM_TAG_VERSION" val="1.0"/>
+  <p:tag name="KSO_WM_BEAUTIFY_FLAG" val="#wm#"/>
+</p:tagLst>
+</file>
+
+<file path=ppt/tags/tag42.xml><?xml version="1.0" encoding="utf-8"?>
+<p:tagLst xmlns:a="http://schemas.openxmlformats.org/drawingml/2006/main" xmlns:r="http://schemas.openxmlformats.org/officeDocument/2006/relationships" xmlns:p="http://schemas.openxmlformats.org/presentationml/2006/main">
+  <p:tag name="KSO_WM_UNIT_HIGHLIGHT" val="0"/>
+  <p:tag name="KSO_WM_UNIT_COMPATIBLE" val="0"/>
+  <p:tag name="KSO_WM_UNIT_DIAGRAM_ISNUMVISUAL" val="0"/>
+  <p:tag name="KSO_WM_UNIT_DIAGRAM_ISREFERUNIT" val="0"/>
+  <p:tag name="KSO_WM_UNIT_ID" val="_7**"/>
+  <p:tag name="KSO_WM_UNIT_LAYERLEVEL" val="1"/>
+  <p:tag name="KSO_WM_TAG_VERSION" val="1.0"/>
+  <p:tag name="KSO_WM_BEAUTIFY_FLAG" val="#wm#"/>
+</p:tagLst>
+</file>
+
+<file path=ppt/tags/tag43.xml><?xml version="1.0" encoding="utf-8"?>
+<p:tagLst xmlns:a="http://schemas.openxmlformats.org/drawingml/2006/main" xmlns:r="http://schemas.openxmlformats.org/officeDocument/2006/relationships" xmlns:p="http://schemas.openxmlformats.org/presentationml/2006/main">
+  <p:tag name="KSO_WM_UNIT_HIGHLIGHT" val="0"/>
+  <p:tag name="KSO_WM_UNIT_COMPATIBLE" val="0"/>
+  <p:tag name="KSO_WM_UNIT_DIAGRAM_ISNUMVISUAL" val="0"/>
+  <p:tag name="KSO_WM_UNIT_DIAGRAM_ISREFERUNIT" val="0"/>
+  <p:tag name="KSO_WM_UNIT_ID" val="_8**"/>
+  <p:tag name="KSO_WM_UNIT_LAYERLEVEL" val="1"/>
+  <p:tag name="KSO_WM_TAG_VERSION" val="1.0"/>
+  <p:tag name="KSO_WM_BEAUTIFY_FLAG" val="#wm#"/>
+</p:tagLst>
+</file>
+
+<file path=ppt/tags/tag44.xml><?xml version="1.0" encoding="utf-8"?>
+<p:tagLst xmlns:a="http://schemas.openxmlformats.org/drawingml/2006/main" xmlns:r="http://schemas.openxmlformats.org/officeDocument/2006/relationships" xmlns:p="http://schemas.openxmlformats.org/presentationml/2006/main">
+  <p:tag name="KSO_WM_UNIT_HIGHLIGHT" val="0"/>
+  <p:tag name="KSO_WM_UNIT_COMPATIBLE" val="0"/>
+  <p:tag name="KSO_WM_UNIT_DIAGRAM_ISNUMVISUAL" val="0"/>
+  <p:tag name="KSO_WM_UNIT_DIAGRAM_ISREFERUNIT" val="0"/>
+  <p:tag name="KSO_WM_UNIT_ID" val="_8**"/>
+  <p:tag name="KSO_WM_UNIT_LAYERLEVEL" val="1"/>
+  <p:tag name="KSO_WM_TAG_VERSION" val="1.0"/>
+  <p:tag name="KSO_WM_BEAUTIFY_FLAG" val="#wm#"/>
+</p:tagLst>
+</file>
+
+<file path=ppt/tags/tag45.xml><?xml version="1.0" encoding="utf-8"?>
+<p:tagLst xmlns:a="http://schemas.openxmlformats.org/drawingml/2006/main" xmlns:r="http://schemas.openxmlformats.org/officeDocument/2006/relationships" xmlns:p="http://schemas.openxmlformats.org/presentationml/2006/main">
+  <p:tag name="KSO_WM_UNIT_HIGHLIGHT" val="0"/>
+  <p:tag name="KSO_WM_UNIT_COMPATIBLE" val="0"/>
+  <p:tag name="KSO_WM_UNIT_DIAGRAM_ISNUMVISUAL" val="0"/>
+  <p:tag name="KSO_WM_UNIT_DIAGRAM_ISREFERUNIT" val="0"/>
+  <p:tag name="KSO_WM_UNIT_ID" val="_8**"/>
+  <p:tag name="KSO_WM_UNIT_LAYERLEVEL" val="1"/>
+  <p:tag name="KSO_WM_TAG_VERSION" val="1.0"/>
+  <p:tag name="KSO_WM_BEAUTIFY_FLAG" val="#wm#"/>
+</p:tagLst>
+</file>
+
+<file path=ppt/tags/tag46.xml><?xml version="1.0" encoding="utf-8"?>
+<p:tagLst xmlns:a="http://schemas.openxmlformats.org/drawingml/2006/main" xmlns:r="http://schemas.openxmlformats.org/officeDocument/2006/relationships" xmlns:p="http://schemas.openxmlformats.org/presentationml/2006/main">
+  <p:tag name="KSO_WM_UNIT_HIGHLIGHT" val="0"/>
+  <p:tag name="KSO_WM_UNIT_COMPATIBLE" val="0"/>
+  <p:tag name="KSO_WM_UNIT_DIAGRAM_ISNUMVISUAL" val="0"/>
+  <p:tag name="KSO_WM_UNIT_DIAGRAM_ISREFERUNIT" val="0"/>
+  <p:tag name="KSO_WM_UNIT_ID" val="_8**"/>
+  <p:tag name="KSO_WM_UNIT_LAYERLEVEL" val="1"/>
+  <p:tag name="KSO_WM_TAG_VERSION" val="1.0"/>
+  <p:tag name="KSO_WM_BEAUTIFY_FLAG" val="#wm#"/>
+</p:tagLst>
+</file>
+
+<file path=ppt/tags/tag47.xml><?xml version="1.0" encoding="utf-8"?>
+<p:tagLst xmlns:a="http://schemas.openxmlformats.org/drawingml/2006/main" xmlns:r="http://schemas.openxmlformats.org/officeDocument/2006/relationships" xmlns:p="http://schemas.openxmlformats.org/presentationml/2006/main">
+  <p:tag name="KSO_WM_UNIT_HIGHLIGHT" val="0"/>
+  <p:tag name="KSO_WM_UNIT_COMPATIBLE" val="0"/>
+  <p:tag name="KSO_WM_UNIT_DIAGRAM_ISNUMVISUAL" val="0"/>
+  <p:tag name="KSO_WM_UNIT_DIAGRAM_ISREFERUNIT" val="0"/>
+  <p:tag name="KSO_WM_UNIT_ID" val="_8**"/>
+  <p:tag name="KSO_WM_UNIT_LAYERLEVEL" val="1"/>
+  <p:tag name="KSO_WM_TAG_VERSION" val="1.0"/>
+  <p:tag name="KSO_WM_BEAUTIFY_FLAG" val="#wm#"/>
+</p:tagLst>
+</file>
+
+<file path=ppt/tags/tag48.xml><?xml version="1.0" encoding="utf-8"?>
+<p:tagLst xmlns:a="http://schemas.openxmlformats.org/drawingml/2006/main" xmlns:r="http://schemas.openxmlformats.org/officeDocument/2006/relationships" xmlns:p="http://schemas.openxmlformats.org/presentationml/2006/main">
+  <p:tag name="KSO_WM_UNIT_HIGHLIGHT" val="0"/>
+  <p:tag name="KSO_WM_UNIT_COMPATIBLE" val="0"/>
+  <p:tag name="KSO_WM_UNIT_DIAGRAM_ISNUMVISUAL" val="0"/>
+  <p:tag name="KSO_WM_UNIT_DIAGRAM_ISREFERUNIT" val="0"/>
+  <p:tag name="KSO_WM_UNIT_ID" val="_8**"/>
+  <p:tag name="KSO_WM_UNIT_LAYERLEVEL" val="1"/>
+  <p:tag name="KSO_WM_TAG_VERSION" val="1.0"/>
+  <p:tag name="KSO_WM_BEAUTIFY_FLAG" val="#wm#"/>
+</p:tagLst>
+</file>
+
+<file path=ppt/tags/tag49.xml><?xml version="1.0" encoding="utf-8"?>
+<p:tagLst xmlns:a="http://schemas.openxmlformats.org/drawingml/2006/main" xmlns:r="http://schemas.openxmlformats.org/officeDocument/2006/relationships" xmlns:p="http://schemas.openxmlformats.org/presentationml/2006/main">
+  <p:tag name="KSO_WM_UNIT_HIGHLIGHT" val="0"/>
+  <p:tag name="KSO_WM_UNIT_COMPATIBLE" val="0"/>
+  <p:tag name="KSO_WM_UNIT_DIAGRAM_ISNUMVISUAL" val="0"/>
+  <p:tag name="KSO_WM_UNIT_DIAGRAM_ISREFERUNIT" val="0"/>
+  <p:tag name="KSO_WM_UNIT_ID" val="_9**"/>
+  <p:tag name="KSO_WM_UNIT_LAYERLEVEL" val="1"/>
+  <p:tag name="KSO_WM_TAG_VERSION" val="1.0"/>
+  <p:tag name="KSO_WM_BEAUTIFY_FLAG" val="#wm#"/>
+</p:tagLst>
+</file>
+
+<file path=ppt/tags/tag5.xml><?xml version="1.0" encoding="utf-8"?>
+<p:tagLst xmlns:a="http://schemas.openxmlformats.org/drawingml/2006/main" xmlns:r="http://schemas.openxmlformats.org/officeDocument/2006/relationships" xmlns:p="http://schemas.openxmlformats.org/presentationml/2006/main">
+  <p:tag name="KSO_WM_UNIT_HIGHLIGHT" val="0"/>
+  <p:tag name="KSO_WM_UNIT_COMPATIBLE" val="0"/>
+  <p:tag name="KSO_WM_UNIT_DIAGRAM_ISNUMVISUAL" val="0"/>
+  <p:tag name="KSO_WM_UNIT_DIAGRAM_ISREFERUNIT" val="0"/>
+  <p:tag name="KSO_WM_UNIT_ID" val="_0**"/>
+  <p:tag name="KSO_WM_UNIT_LAYERLEVEL" val="1"/>
+  <p:tag name="KSO_WM_TAG_VERSION" val="1.0"/>
+  <p:tag name="KSO_WM_BEAUTIFY_FLAG" val="#wm#"/>
+</p:tagLst>
+</file>
+
+<file path=ppt/tags/tag50.xml><?xml version="1.0" encoding="utf-8"?>
+<p:tagLst xmlns:a="http://schemas.openxmlformats.org/drawingml/2006/main" xmlns:r="http://schemas.openxmlformats.org/officeDocument/2006/relationships" xmlns:p="http://schemas.openxmlformats.org/presentationml/2006/main">
+  <p:tag name="KSO_WM_UNIT_HIGHLIGHT" val="0"/>
+  <p:tag name="KSO_WM_UNIT_COMPATIBLE" val="0"/>
+  <p:tag name="KSO_WM_UNIT_DIAGRAM_ISNUMVISUAL" val="0"/>
+  <p:tag name="KSO_WM_UNIT_DIAGRAM_ISREFERUNIT" val="0"/>
+  <p:tag name="KSO_WM_UNIT_ID" val="_9**"/>
+  <p:tag name="KSO_WM_UNIT_LAYERLEVEL" val="1"/>
+  <p:tag name="KSO_WM_TAG_VERSION" val="1.0"/>
+  <p:tag name="KSO_WM_BEAUTIFY_FLAG" val="#wm#"/>
+</p:tagLst>
+</file>
+
+<file path=ppt/tags/tag51.xml><?xml version="1.0" encoding="utf-8"?>
+<p:tagLst xmlns:a="http://schemas.openxmlformats.org/drawingml/2006/main" xmlns:r="http://schemas.openxmlformats.org/officeDocument/2006/relationships" xmlns:p="http://schemas.openxmlformats.org/presentationml/2006/main">
+  <p:tag name="KSO_WM_UNIT_HIGHLIGHT" val="0"/>
+  <p:tag name="KSO_WM_UNIT_COMPATIBLE" val="0"/>
+  <p:tag name="KSO_WM_UNIT_DIAGRAM_ISNUMVISUAL" val="0"/>
+  <p:tag name="KSO_WM_UNIT_DIAGRAM_ISREFERUNIT" val="0"/>
+  <p:tag name="KSO_WM_UNIT_ID" val="_9**"/>
+  <p:tag name="KSO_WM_UNIT_LAYERLEVEL" val="1"/>
+  <p:tag name="KSO_WM_TAG_VERSION" val="1.0"/>
+  <p:tag name="KSO_WM_BEAUTIFY_FLAG" val="#wm#"/>
+</p:tagLst>
+</file>
+
+<file path=ppt/tags/tag52.xml><?xml version="1.0" encoding="utf-8"?>
+<p:tagLst xmlns:a="http://schemas.openxmlformats.org/drawingml/2006/main" xmlns:r="http://schemas.openxmlformats.org/officeDocument/2006/relationships" xmlns:p="http://schemas.openxmlformats.org/presentationml/2006/main">
+  <p:tag name="KSO_WM_UNIT_HIGHLIGHT" val="0"/>
+  <p:tag name="KSO_WM_UNIT_COMPATIBLE" val="0"/>
+  <p:tag name="KSO_WM_UNIT_DIAGRAM_ISNUMVISUAL" val="0"/>
+  <p:tag name="KSO_WM_UNIT_DIAGRAM_ISREFERUNIT" val="0"/>
+  <p:tag name="KSO_WM_UNIT_ID" val="_9**"/>
+  <p:tag name="KSO_WM_UNIT_LAYERLEVEL" val="1"/>
+  <p:tag name="KSO_WM_TAG_VERSION" val="1.0"/>
+  <p:tag name="KSO_WM_BEAUTIFY_FLAG" val="#wm#"/>
+</p:tagLst>
+</file>
+
+<file path=ppt/tags/tag53.xml><?xml version="1.0" encoding="utf-8"?>
+<p:tagLst xmlns:a="http://schemas.openxmlformats.org/drawingml/2006/main" xmlns:r="http://schemas.openxmlformats.org/officeDocument/2006/relationships" xmlns:p="http://schemas.openxmlformats.org/presentationml/2006/main">
+  <p:tag name="KSO_WM_UNIT_HIGHLIGHT" val="0"/>
+  <p:tag name="KSO_WM_UNIT_COMPATIBLE" val="0"/>
+  <p:tag name="KSO_WM_UNIT_DIAGRAM_ISNUMVISUAL" val="0"/>
+  <p:tag name="KSO_WM_UNIT_DIAGRAM_ISREFERUNIT" val="0"/>
+  <p:tag name="KSO_WM_UNIT_ID" val="_9**"/>
+  <p:tag name="KSO_WM_UNIT_LAYERLEVEL" val="1"/>
+  <p:tag name="KSO_WM_TAG_VERSION" val="1.0"/>
+  <p:tag name="KSO_WM_BEAUTIFY_FLAG" val="#wm#"/>
+</p:tagLst>
+</file>
+
+<file path=ppt/tags/tag54.xml><?xml version="1.0" encoding="utf-8"?>
+<p:tagLst xmlns:a="http://schemas.openxmlformats.org/drawingml/2006/main" xmlns:r="http://schemas.openxmlformats.org/officeDocument/2006/relationships" xmlns:p="http://schemas.openxmlformats.org/presentationml/2006/main">
+  <p:tag name="KSO_WM_UNIT_HIGHLIGHT" val="0"/>
+  <p:tag name="KSO_WM_UNIT_COMPATIBLE" val="0"/>
+  <p:tag name="KSO_WM_UNIT_DIAGRAM_ISNUMVISUAL" val="0"/>
+  <p:tag name="KSO_WM_UNIT_DIAGRAM_ISREFERUNIT" val="0"/>
+  <p:tag name="KSO_WM_UNIT_ID" val="_10**"/>
+  <p:tag name="KSO_WM_UNIT_LAYERLEVEL" val="1"/>
+  <p:tag name="KSO_WM_TAG_VERSION" val="1.0"/>
+  <p:tag name="KSO_WM_BEAUTIFY_FLAG" val="#wm#"/>
+</p:tagLst>
+</file>
+
+<file path=ppt/tags/tag55.xml><?xml version="1.0" encoding="utf-8"?>
+<p:tagLst xmlns:a="http://schemas.openxmlformats.org/drawingml/2006/main" xmlns:r="http://schemas.openxmlformats.org/officeDocument/2006/relationships" xmlns:p="http://schemas.openxmlformats.org/presentationml/2006/main">
+  <p:tag name="KSO_WM_UNIT_HIGHLIGHT" val="0"/>
+  <p:tag name="KSO_WM_UNIT_COMPATIBLE" val="0"/>
+  <p:tag name="KSO_WM_UNIT_DIAGRAM_ISNUMVISUAL" val="0"/>
+  <p:tag name="KSO_WM_UNIT_DIAGRAM_ISREFERUNIT" val="0"/>
+  <p:tag name="KSO_WM_UNIT_ID" val="_10**"/>
+  <p:tag name="KSO_WM_UNIT_LAYERLEVEL" val="1"/>
+  <p:tag name="KSO_WM_TAG_VERSION" val="1.0"/>
+  <p:tag name="KSO_WM_BEAUTIFY_FLAG" val="#wm#"/>
+</p:tagLst>
+</file>
+
+<file path=ppt/tags/tag56.xml><?xml version="1.0" encoding="utf-8"?>
+<p:tagLst xmlns:a="http://schemas.openxmlformats.org/drawingml/2006/main" xmlns:r="http://schemas.openxmlformats.org/officeDocument/2006/relationships" xmlns:p="http://schemas.openxmlformats.org/presentationml/2006/main">
+  <p:tag name="KSO_WM_UNIT_HIGHLIGHT" val="0"/>
+  <p:tag name="KSO_WM_UNIT_COMPATIBLE" val="0"/>
+  <p:tag name="KSO_WM_UNIT_DIAGRAM_ISNUMVISUAL" val="0"/>
+  <p:tag name="KSO_WM_UNIT_DIAGRAM_ISREFERUNIT" val="0"/>
+  <p:tag name="KSO_WM_UNIT_ID" val="_10**"/>
+  <p:tag name="KSO_WM_UNIT_LAYERLEVEL" val="1"/>
+  <p:tag name="KSO_WM_TAG_VERSION" val="1.0"/>
+  <p:tag name="KSO_WM_BEAUTIFY_FLAG" val="#wm#"/>
+</p:tagLst>
+</file>
+
+<file path=ppt/tags/tag57.xml><?xml version="1.0" encoding="utf-8"?>
+<p:tagLst xmlns:a="http://schemas.openxmlformats.org/drawingml/2006/main" xmlns:r="http://schemas.openxmlformats.org/officeDocument/2006/relationships" xmlns:p="http://schemas.openxmlformats.org/presentationml/2006/main">
+  <p:tag name="KSO_WM_UNIT_HIGHLIGHT" val="0"/>
+  <p:tag name="KSO_WM_UNIT_COMPATIBLE" val="0"/>
+  <p:tag name="KSO_WM_UNIT_DIAGRAM_ISNUMVISUAL" val="0"/>
+  <p:tag name="KSO_WM_UNIT_DIAGRAM_ISREFERUNIT" val="0"/>
+  <p:tag name="KSO_WM_UNIT_ID" val="_10**"/>
+  <p:tag name="KSO_WM_UNIT_LAYERLEVEL" val="1"/>
+  <p:tag name="KSO_WM_TAG_VERSION" val="1.0"/>
+  <p:tag name="KSO_WM_BEAUTIFY_FLAG" val="#wm#"/>
+</p:tagLst>
+</file>
+
+<file path=ppt/tags/tag58.xml><?xml version="1.0" encoding="utf-8"?>
+<p:tagLst xmlns:a="http://schemas.openxmlformats.org/drawingml/2006/main" xmlns:r="http://schemas.openxmlformats.org/officeDocument/2006/relationships" xmlns:p="http://schemas.openxmlformats.org/presentationml/2006/main">
+  <p:tag name="KSO_WM_UNIT_HIGHLIGHT" val="0"/>
+  <p:tag name="KSO_WM_UNIT_COMPATIBLE" val="0"/>
+  <p:tag name="KSO_WM_UNIT_DIAGRAM_ISNUMVISUAL" val="0"/>
+  <p:tag name="KSO_WM_UNIT_DIAGRAM_ISREFERUNIT" val="0"/>
+  <p:tag name="KSO_WM_UNIT_ID" val="_11**"/>
+  <p:tag name="KSO_WM_UNIT_LAYERLEVEL" val="1"/>
+  <p:tag name="KSO_WM_TAG_VERSION" val="1.0"/>
+  <p:tag name="KSO_WM_BEAUTIFY_FLAG" val="#wm#"/>
+</p:tagLst>
+</file>
+
+<file path=ppt/tags/tag59.xml><?xml version="1.0" encoding="utf-8"?>
+<p:tagLst xmlns:a="http://schemas.openxmlformats.org/drawingml/2006/main" xmlns:r="http://schemas.openxmlformats.org/officeDocument/2006/relationships" xmlns:p="http://schemas.openxmlformats.org/presentationml/2006/main">
+  <p:tag name="KSO_WM_UNIT_HIGHLIGHT" val="0"/>
+  <p:tag name="KSO_WM_UNIT_COMPATIBLE" val="0"/>
+  <p:tag name="KSO_WM_UNIT_DIAGRAM_ISNUMVISUAL" val="0"/>
+  <p:tag name="KSO_WM_UNIT_DIAGRAM_ISREFERUNIT" val="0"/>
+  <p:tag name="KSO_WM_UNIT_ID" val="_11**"/>
+  <p:tag name="KSO_WM_UNIT_LAYERLEVEL" val="1"/>
+  <p:tag name="KSO_WM_TAG_VERSION" val="1.0"/>
+  <p:tag name="KSO_WM_BEAUTIFY_FLAG" val="#wm#"/>
+</p:tagLst>
+</file>
+
+<file path=ppt/tags/tag6.xml><?xml version="1.0" encoding="utf-8"?>
+<p:tagLst xmlns:a="http://schemas.openxmlformats.org/drawingml/2006/main" xmlns:r="http://schemas.openxmlformats.org/officeDocument/2006/relationships" xmlns:p="http://schemas.openxmlformats.org/presentationml/2006/main">
+  <p:tag name="KSO_WM_UNIT_HIGHLIGHT" val="0"/>
+  <p:tag name="KSO_WM_UNIT_COMPATIBLE" val="0"/>
+  <p:tag name="KSO_WM_UNIT_DIAGRAM_ISNUMVISUAL" val="0"/>
+  <p:tag name="KSO_WM_UNIT_DIAGRAM_ISREFERUNIT" val="0"/>
+  <p:tag name="KSO_WM_UNIT_ID" val="_0**"/>
+  <p:tag name="KSO_WM_UNIT_LAYERLEVEL" val="1"/>
+  <p:tag name="KSO_WM_TAG_VERSION" val="1.0"/>
+  <p:tag name="KSO_WM_BEAUTIFY_FLAG" val="#wm#"/>
+</p:tagLst>
+</file>
+
+<file path=ppt/tags/tag60.xml><?xml version="1.0" encoding="utf-8"?>
+<p:tagLst xmlns:a="http://schemas.openxmlformats.org/drawingml/2006/main" xmlns:r="http://schemas.openxmlformats.org/officeDocument/2006/relationships" xmlns:p="http://schemas.openxmlformats.org/presentationml/2006/main">
+  <p:tag name="KSO_WM_UNIT_HIGHLIGHT" val="0"/>
+  <p:tag name="KSO_WM_UNIT_COMPATIBLE" val="0"/>
+  <p:tag name="KSO_WM_UNIT_DIAGRAM_ISNUMVISUAL" val="0"/>
+  <p:tag name="KSO_WM_UNIT_DIAGRAM_ISREFERUNIT" val="0"/>
+  <p:tag name="KSO_WM_UNIT_ID" val="_11**"/>
+  <p:tag name="KSO_WM_UNIT_LAYERLEVEL" val="1"/>
+  <p:tag name="KSO_WM_TAG_VERSION" val="1.0"/>
+  <p:tag name="KSO_WM_BEAUTIFY_FLAG" val="#wm#"/>
+</p:tagLst>
+</file>
+
+<file path=ppt/tags/tag61.xml><?xml version="1.0" encoding="utf-8"?>
+<p:tagLst xmlns:a="http://schemas.openxmlformats.org/drawingml/2006/main" xmlns:r="http://schemas.openxmlformats.org/officeDocument/2006/relationships" xmlns:p="http://schemas.openxmlformats.org/presentationml/2006/main">
+  <p:tag name="KSO_WM_UNIT_HIGHLIGHT" val="0"/>
+  <p:tag name="KSO_WM_UNIT_COMPATIBLE" val="0"/>
+  <p:tag name="KSO_WM_UNIT_DIAGRAM_ISNUMVISUAL" val="0"/>
+  <p:tag name="KSO_WM_UNIT_DIAGRAM_ISREFERUNIT" val="0"/>
+  <p:tag name="KSO_WM_UNIT_ID" val="_11**"/>
+  <p:tag name="KSO_WM_UNIT_LAYERLEVEL" val="1"/>
+  <p:tag name="KSO_WM_TAG_VERSION" val="1.0"/>
+  <p:tag name="KSO_WM_BEAUTIFY_FLAG" val="#wm#"/>
+</p:tagLst>
+</file>
+
+<file path=ppt/tags/tag62.xml><?xml version="1.0" encoding="utf-8"?>
+<p:tagLst xmlns:a="http://schemas.openxmlformats.org/drawingml/2006/main" xmlns:r="http://schemas.openxmlformats.org/officeDocument/2006/relationships" xmlns:p="http://schemas.openxmlformats.org/presentationml/2006/main">
+  <p:tag name="KSO_WM_UNIT_HIGHLIGHT" val="0"/>
+  <p:tag name="KSO_WM_UNIT_COMPATIBLE" val="0"/>
+  <p:tag name="KSO_WM_UNIT_DIAGRAM_ISNUMVISUAL" val="0"/>
+  <p:tag name="KSO_WM_UNIT_DIAGRAM_ISREFERUNIT" val="0"/>
+  <p:tag name="KSO_WM_UNIT_ID" val="_11**"/>
+  <p:tag name="KSO_WM_UNIT_LAYERLEVEL" val="1"/>
+  <p:tag name="KSO_WM_TAG_VERSION" val="1.0"/>
+  <p:tag name="KSO_WM_BEAUTIFY_FLAG" val="#wm#"/>
+</p:tagLst>
+</file>
+
+<file path=ppt/tags/tag63.xml><?xml version="1.0" encoding="utf-8"?>
+<p:tagLst xmlns:a="http://schemas.openxmlformats.org/drawingml/2006/main" xmlns:r="http://schemas.openxmlformats.org/officeDocument/2006/relationships" xmlns:p="http://schemas.openxmlformats.org/presentationml/2006/main">
+  <p:tag name="KSO_WM_UNIT_HIGHLIGHT" val="0"/>
+  <p:tag name="KSO_WM_UNIT_COMPATIBLE" val="0"/>
+  <p:tag name="KSO_WM_UNIT_DIAGRAM_ISNUMVISUAL" val="0"/>
+  <p:tag name="KSO_WM_UNIT_DIAGRAM_ISREFERUNIT" val="0"/>
+  <p:tag name="KSO_WM_UNIT_ID" val="_1**"/>
+  <p:tag name="KSO_WM_UNIT_LAYERLEVEL" val="1"/>
+  <p:tag name="KSO_WM_TAG_VERSION" val="1.0"/>
+  <p:tag name="KSO_WM_BEAUTIFY_FLAG" val="#wm#"/>
+</p:tagLst>
+</file>
+
+<file path=ppt/tags/tag64.xml><?xml version="1.0" encoding="utf-8"?>
+<p:tagLst xmlns:a="http://schemas.openxmlformats.org/drawingml/2006/main" xmlns:r="http://schemas.openxmlformats.org/officeDocument/2006/relationships" xmlns:p="http://schemas.openxmlformats.org/presentationml/2006/main">
+  <p:tag name="KSO_WM_UNIT_HIGHLIGHT" val="0"/>
+  <p:tag name="KSO_WM_UNIT_COMPATIBLE" val="0"/>
+  <p:tag name="KSO_WM_UNIT_DIAGRAM_ISNUMVISUAL" val="0"/>
+  <p:tag name="KSO_WM_UNIT_DIAGRAM_ISREFERUNIT" val="0"/>
+  <p:tag name="KSO_WM_UNIT_ID" val="_1**"/>
+  <p:tag name="KSO_WM_UNIT_LAYERLEVEL" val="1"/>
+  <p:tag name="KSO_WM_TAG_VERSION" val="1.0"/>
+  <p:tag name="KSO_WM_BEAUTIFY_FLAG" val="#wm#"/>
+</p:tagLst>
+</file>
+
+<file path=ppt/tags/tag65.xml><?xml version="1.0" encoding="utf-8"?>
+<p:tagLst xmlns:a="http://schemas.openxmlformats.org/drawingml/2006/main" xmlns:r="http://schemas.openxmlformats.org/officeDocument/2006/relationships" xmlns:p="http://schemas.openxmlformats.org/presentationml/2006/main">
   <p:tag name="KSO_WM_UNIT_HIGHLIGHT" val="0"/>
   <p:tag name="KSO_WM_UNIT_COMPATIBLE" val="0"/>
   <p:tag name="KSO_WM_UNIT_DIAGRAM_ISNUMVISUAL" val="0"/>
@@ -4495,8 +4336,8 @@
 </p:tagLst>
 </file>
 
-<file path=ppt/tags/tag73.xml><?xml version="1.0" encoding="utf-8"?>
-<p:tagLst xmlns:p="http://schemas.openxmlformats.org/presentationml/2006/main">
+<file path=ppt/tags/tag66.xml><?xml version="1.0" encoding="utf-8"?>
+<p:tagLst xmlns:a="http://schemas.openxmlformats.org/drawingml/2006/main" xmlns:r="http://schemas.openxmlformats.org/officeDocument/2006/relationships" xmlns:p="http://schemas.openxmlformats.org/presentationml/2006/main">
   <p:tag name="KSO_WM_UNIT_HIGHLIGHT" val="0"/>
   <p:tag name="KSO_WM_UNIT_COMPATIBLE" val="0"/>
   <p:tag name="KSO_WM_UNIT_DIAGRAM_ISNUMVISUAL" val="0"/>
@@ -4508,21 +4349,80 @@
 </p:tagLst>
 </file>
 
-<file path=ppt/tags/tag74.xml><?xml version="1.0" encoding="utf-8"?>
-<p:tagLst xmlns:p="http://schemas.openxmlformats.org/presentationml/2006/main">
+<file path=ppt/tags/tag67.xml><?xml version="1.0" encoding="utf-8"?>
+<p:tagLst xmlns:a="http://schemas.openxmlformats.org/drawingml/2006/main" xmlns:r="http://schemas.openxmlformats.org/officeDocument/2006/relationships" xmlns:p="http://schemas.openxmlformats.org/presentationml/2006/main">
   <p:tag name="KSO_WM_BEAUTIFY_FLAG" val="#wm#"/>
   <p:tag name="KSO_WM_TEMPLATE_CATEGORY" val="custom"/>
   <p:tag name="KSO_WM_TEMPLATE_INDEX" val="20205081"/>
 </p:tagLst>
 </file>
 
+<file path=ppt/tags/tag68.xml><?xml version="1.0" encoding="utf-8"?>
+<p:tagLst xmlns:a="http://schemas.openxmlformats.org/drawingml/2006/main" xmlns:r="http://schemas.openxmlformats.org/officeDocument/2006/relationships" xmlns:p="http://schemas.openxmlformats.org/presentationml/2006/main">
+  <p:tag name="KSO_WM_UNIT_HIGHLIGHT" val="0"/>
+  <p:tag name="KSO_WM_UNIT_COMPATIBLE" val="0"/>
+  <p:tag name="KSO_WM_UNIT_DIAGRAM_ISNUMVISUAL" val="0"/>
+  <p:tag name="KSO_WM_UNIT_DIAGRAM_ISREFERUNIT" val="0"/>
+  <p:tag name="KSO_WM_UNIT_ID" val="_2**"/>
+  <p:tag name="KSO_WM_UNIT_LAYERLEVEL" val="1"/>
+  <p:tag name="KSO_WM_TAG_VERSION" val="1.0"/>
+  <p:tag name="KSO_WM_BEAUTIFY_FLAG" val="#wm#"/>
+</p:tagLst>
+</file>
+
+<file path=ppt/tags/tag69.xml><?xml version="1.0" encoding="utf-8"?>
+<p:tagLst xmlns:a="http://schemas.openxmlformats.org/drawingml/2006/main" xmlns:r="http://schemas.openxmlformats.org/officeDocument/2006/relationships" xmlns:p="http://schemas.openxmlformats.org/presentationml/2006/main">
+  <p:tag name="KSO_WM_BEAUTIFY_FLAG" val="#wm#"/>
+  <p:tag name="KSO_WM_TEMPLATE_CATEGORY" val="custom"/>
+  <p:tag name="KSO_WM_TEMPLATE_INDEX" val="20205081"/>
+</p:tagLst>
+</file>
+
+<file path=ppt/tags/tag7.xml><?xml version="1.0" encoding="utf-8"?>
+<p:tagLst xmlns:a="http://schemas.openxmlformats.org/drawingml/2006/main" xmlns:r="http://schemas.openxmlformats.org/officeDocument/2006/relationships" xmlns:p="http://schemas.openxmlformats.org/presentationml/2006/main">
+  <p:tag name="KSO_WM_UNIT_HIGHLIGHT" val="0"/>
+  <p:tag name="KSO_WM_UNIT_COMPATIBLE" val="0"/>
+  <p:tag name="KSO_WM_UNIT_DIAGRAM_ISNUMVISUAL" val="0"/>
+  <p:tag name="KSO_WM_UNIT_DIAGRAM_ISREFERUNIT" val="0"/>
+  <p:tag name="KSO_WM_UNIT_ID" val="_1**"/>
+  <p:tag name="KSO_WM_UNIT_LAYERLEVEL" val="1"/>
+  <p:tag name="KSO_WM_TAG_VERSION" val="1.0"/>
+  <p:tag name="KSO_WM_BEAUTIFY_FLAG" val="#wm#"/>
+</p:tagLst>
+</file>
+
+<file path=ppt/tags/tag70.xml><?xml version="1.0" encoding="utf-8"?>
+<p:tagLst xmlns:a="http://schemas.openxmlformats.org/drawingml/2006/main" xmlns:r="http://schemas.openxmlformats.org/officeDocument/2006/relationships" xmlns:p="http://schemas.openxmlformats.org/presentationml/2006/main">
+  <p:tag name="KSO_WM_UNIT_HIGHLIGHT" val="0"/>
+  <p:tag name="KSO_WM_UNIT_COMPATIBLE" val="0"/>
+  <p:tag name="KSO_WM_UNIT_DIAGRAM_ISNUMVISUAL" val="0"/>
+  <p:tag name="KSO_WM_UNIT_DIAGRAM_ISREFERUNIT" val="0"/>
+  <p:tag name="KSO_WM_UNIT_ID" val="_2**"/>
+  <p:tag name="KSO_WM_UNIT_LAYERLEVEL" val="1"/>
+  <p:tag name="KSO_WM_TAG_VERSION" val="1.0"/>
+  <p:tag name="KSO_WM_BEAUTIFY_FLAG" val="#wm#"/>
+</p:tagLst>
+</file>
+
+<file path=ppt/tags/tag71.xml><?xml version="1.0" encoding="utf-8"?>
+<p:tagLst xmlns:a="http://schemas.openxmlformats.org/drawingml/2006/main" xmlns:r="http://schemas.openxmlformats.org/officeDocument/2006/relationships" xmlns:p="http://schemas.openxmlformats.org/presentationml/2006/main">
+  <p:tag name="KSO_WM_UNIT_HIGHLIGHT" val="0"/>
+  <p:tag name="KSO_WM_UNIT_COMPATIBLE" val="0"/>
+  <p:tag name="KSO_WM_UNIT_DIAGRAM_ISNUMVISUAL" val="0"/>
+  <p:tag name="KSO_WM_UNIT_DIAGRAM_ISREFERUNIT" val="0"/>
+  <p:tag name="KSO_WM_UNIT_ID" val="_2**"/>
+  <p:tag name="KSO_WM_UNIT_LAYERLEVEL" val="1"/>
+  <p:tag name="KSO_WM_TAG_VERSION" val="1.0"/>
+</p:tagLst>
+</file>
+
 <file path=ppt/tags/tag8.xml><?xml version="1.0" encoding="utf-8"?>
-<p:tagLst xmlns:p="http://schemas.openxmlformats.org/presentationml/2006/main">
-  <p:tag name="KSO_WM_UNIT_HIGHLIGHT" val="0"/>
-  <p:tag name="KSO_WM_UNIT_COMPATIBLE" val="0"/>
-  <p:tag name="KSO_WM_UNIT_DIAGRAM_ISNUMVISUAL" val="0"/>
-  <p:tag name="KSO_WM_UNIT_DIAGRAM_ISREFERUNIT" val="0"/>
-  <p:tag name="KSO_WM_UNIT_ID" val="_2**"/>
+<p:tagLst xmlns:a="http://schemas.openxmlformats.org/drawingml/2006/main" xmlns:r="http://schemas.openxmlformats.org/officeDocument/2006/relationships" xmlns:p="http://schemas.openxmlformats.org/presentationml/2006/main">
+  <p:tag name="KSO_WM_UNIT_HIGHLIGHT" val="0"/>
+  <p:tag name="KSO_WM_UNIT_COMPATIBLE" val="0"/>
+  <p:tag name="KSO_WM_UNIT_DIAGRAM_ISNUMVISUAL" val="0"/>
+  <p:tag name="KSO_WM_UNIT_DIAGRAM_ISREFERUNIT" val="0"/>
+  <p:tag name="KSO_WM_UNIT_ID" val="_1**"/>
   <p:tag name="KSO_WM_UNIT_LAYERLEVEL" val="1"/>
   <p:tag name="KSO_WM_TAG_VERSION" val="1.0"/>
   <p:tag name="KSO_WM_BEAUTIFY_FLAG" val="#wm#"/>
@@ -4530,12 +4430,12 @@
 </file>
 
 <file path=ppt/tags/tag9.xml><?xml version="1.0" encoding="utf-8"?>
-<p:tagLst xmlns:p="http://schemas.openxmlformats.org/presentationml/2006/main">
-  <p:tag name="KSO_WM_UNIT_HIGHLIGHT" val="0"/>
-  <p:tag name="KSO_WM_UNIT_COMPATIBLE" val="0"/>
-  <p:tag name="KSO_WM_UNIT_DIAGRAM_ISNUMVISUAL" val="0"/>
-  <p:tag name="KSO_WM_UNIT_DIAGRAM_ISREFERUNIT" val="0"/>
-  <p:tag name="KSO_WM_UNIT_ID" val="_2**"/>
+<p:tagLst xmlns:a="http://schemas.openxmlformats.org/drawingml/2006/main" xmlns:r="http://schemas.openxmlformats.org/officeDocument/2006/relationships" xmlns:p="http://schemas.openxmlformats.org/presentationml/2006/main">
+  <p:tag name="KSO_WM_UNIT_HIGHLIGHT" val="0"/>
+  <p:tag name="KSO_WM_UNIT_COMPATIBLE" val="0"/>
+  <p:tag name="KSO_WM_UNIT_DIAGRAM_ISNUMVISUAL" val="0"/>
+  <p:tag name="KSO_WM_UNIT_DIAGRAM_ISREFERUNIT" val="0"/>
+  <p:tag name="KSO_WM_UNIT_ID" val="_1**"/>
   <p:tag name="KSO_WM_UNIT_LAYERLEVEL" val="1"/>
   <p:tag name="KSO_WM_TAG_VERSION" val="1.0"/>
   <p:tag name="KSO_WM_BEAUTIFY_FLAG" val="#wm#"/>
@@ -4785,6 +4685,8 @@
       </a:bgFillStyleLst>
     </a:fmtScheme>
   </a:themeElements>
+  <a:objectDefaults/>
+  <a:extraClrSchemeLst/>
   <a:extLst>
     <a:ext uri="{05A4C25C-085E-4340-85A3-A5531E510DB2}">
       <thm15:themeFamily xmlns:thm15="http://schemas.microsoft.com/office/thememl/2012/main" name="Office Theme" id="{62F939B6-93AF-4DB8-9C6B-D6C7DFDC589F}" vid="{4A3C46E8-61CC-4603-A589-7422A47A8E4A}"/>
